--- a/MIMIC_NLP_Presentation.pptx
+++ b/MIMIC_NLP_Presentation.pptx
@@ -5,7 +5,7 @@
     <p:sldMasterId id="2147483648" r:id="rId1"/>
   </p:sldMasterIdLst>
   <p:notesMasterIdLst>
-    <p:notesMasterId r:id="rId10"/>
+    <p:notesMasterId r:id="rId16"/>
   </p:notesMasterIdLst>
   <p:sldIdLst>
     <p:sldId id="256" r:id="rId2"/>
@@ -16,6 +16,12 @@
     <p:sldId id="261" r:id="rId7"/>
     <p:sldId id="262" r:id="rId8"/>
     <p:sldId id="263" r:id="rId9"/>
+    <p:sldId id="264" r:id="rId10"/>
+    <p:sldId id="265" r:id="rId11"/>
+    <p:sldId id="266" r:id="rId12"/>
+    <p:sldId id="267" r:id="rId13"/>
+    <p:sldId id="268" r:id="rId14"/>
+    <p:sldId id="269" r:id="rId15"/>
   </p:sldIdLst>
   <p:sldSz cx="12192000" cy="6858000"/>
   <p:notesSz cx="6858000" cy="12192000"/>
@@ -122,9 +128,771 @@
 <file path=ppt/revisionInfo.xml><?xml version="1.0" encoding="utf-8"?>
 <p1510:revInfo xmlns:a="http://schemas.openxmlformats.org/drawingml/2006/main" xmlns:r="http://schemas.openxmlformats.org/officeDocument/2006/relationships" xmlns:p1510="http://schemas.microsoft.com/office/powerpoint/2015/10/main">
   <p1510:revLst>
-    <p1510:client id="{9AA1FC55-F999-5442-0AB8-01B9962A2E28}" v="36" dt="2026-07-07T04:21:36.981"/>
+    <p1510:client id="{4F9B3153-CE56-36E2-0E37-96C1DD391315}" v="86" dt="2026-07-09T01:10:59.831"/>
   </p1510:revLst>
 </p1510:revInfo>
+</file>
+
+<file path=ppt/charts/chart1.xml><?xml version="1.0" encoding="utf-8"?>
+<c:chartSpace xmlns:c="http://schemas.openxmlformats.org/drawingml/2006/chart" xmlns:a="http://schemas.openxmlformats.org/drawingml/2006/main" xmlns:r="http://schemas.openxmlformats.org/officeDocument/2006/relationships" xmlns:c16r2="http://schemas.microsoft.com/office/drawing/2015/06/chart">
+  <c:date1904 val="0"/>
+  <c:lang val="en-US"/>
+  <c:roundedCorners val="1"/>
+  <c:style val="2"/>
+  <c:chart>
+    <c:autoTitleDeleted val="1"/>
+    <c:plotArea>
+      <c:layout/>
+      <c:barChart>
+        <c:barDir val="bar"/>
+        <c:grouping val="clustered"/>
+        <c:varyColors val="0"/>
+        <c:ser>
+          <c:idx val="0"/>
+          <c:order val="0"/>
+          <c:tx>
+            <c:strRef>
+              <c:f>Sheet1!$B$1</c:f>
+              <c:strCache>
+                <c:ptCount val="1"/>
+                <c:pt idx="0">
+                  <c:v>Entity count</c:v>
+                </c:pt>
+              </c:strCache>
+            </c:strRef>
+          </c:tx>
+          <c:spPr>
+            <a:solidFill>
+              <a:srgbClr val="028090"/>
+            </a:solidFill>
+            <a:effectLst/>
+          </c:spPr>
+          <c:invertIfNegative val="0"/>
+          <c:dLbls>
+            <c:numFmt formatCode="#,##0" sourceLinked="0"/>
+            <c:spPr>
+              <a:noFill/>
+              <a:ln>
+                <a:noFill/>
+              </a:ln>
+              <a:effectLst/>
+            </c:spPr>
+            <c:txPr>
+              <a:bodyPr/>
+              <a:lstStyle/>
+              <a:p>
+                <a:pPr>
+                  <a:defRPr sz="1000" b="0" i="0" u="none" strike="noStrike">
+                    <a:solidFill>
+                      <a:srgbClr val="1E293B"/>
+                    </a:solidFill>
+                    <a:latin typeface="Arial"/>
+                  </a:defRPr>
+                </a:pPr>
+                <a:endParaRPr lang="en-US"/>
+              </a:p>
+            </c:txPr>
+            <c:showLegendKey val="0"/>
+            <c:showVal val="1"/>
+            <c:showCatName val="0"/>
+            <c:showSerName val="0"/>
+            <c:showPercent val="0"/>
+            <c:showBubbleSize val="0"/>
+            <c:showLeaderLines val="0"/>
+            <c:extLst>
+              <c:ext xmlns:c15="http://schemas.microsoft.com/office/drawing/2012/chart" uri="{CE6537A1-D6FC-4f65-9D91-7224C49458BB}">
+                <c15:showLeaderLines val="0"/>
+              </c:ext>
+            </c:extLst>
+          </c:dLbls>
+          <c:cat>
+            <c:strRef>
+              <c:f>Sheet1!$A$2:$A$10</c:f>
+              <c:strCache>
+                <c:ptCount val="9"/>
+                <c:pt idx="0">
+                  <c:v>QUANTITY</c:v>
+                </c:pt>
+                <c:pt idx="1">
+                  <c:v>PRODUCT</c:v>
+                </c:pt>
+                <c:pt idx="2">
+                  <c:v>PERCENT</c:v>
+                </c:pt>
+                <c:pt idx="3">
+                  <c:v>GPE</c:v>
+                </c:pt>
+                <c:pt idx="4">
+                  <c:v>TIME</c:v>
+                </c:pt>
+                <c:pt idx="5">
+                  <c:v>DATE</c:v>
+                </c:pt>
+                <c:pt idx="6">
+                  <c:v>PERSON</c:v>
+                </c:pt>
+                <c:pt idx="7">
+                  <c:v>ORG</c:v>
+                </c:pt>
+                <c:pt idx="8">
+                  <c:v>CARDINAL</c:v>
+                </c:pt>
+              </c:strCache>
+            </c:strRef>
+          </c:cat>
+          <c:val>
+            <c:numRef>
+              <c:f>Sheet1!$B$2:$B$10</c:f>
+              <c:numCache>
+                <c:formatCode>General</c:formatCode>
+                <c:ptCount val="9"/>
+                <c:pt idx="0">
+                  <c:v>39</c:v>
+                </c:pt>
+                <c:pt idx="1">
+                  <c:v>41</c:v>
+                </c:pt>
+                <c:pt idx="2">
+                  <c:v>44</c:v>
+                </c:pt>
+                <c:pt idx="3">
+                  <c:v>81</c:v>
+                </c:pt>
+                <c:pt idx="4">
+                  <c:v>117</c:v>
+                </c:pt>
+                <c:pt idx="5">
+                  <c:v>231</c:v>
+                </c:pt>
+                <c:pt idx="6">
+                  <c:v>312</c:v>
+                </c:pt>
+                <c:pt idx="7">
+                  <c:v>906</c:v>
+                </c:pt>
+                <c:pt idx="8">
+                  <c:v>1246</c:v>
+                </c:pt>
+              </c:numCache>
+            </c:numRef>
+          </c:val>
+          <c:extLst>
+            <c:ext xmlns:c16="http://schemas.microsoft.com/office/drawing/2014/chart" uri="{C3380CC4-5D6E-409C-BE32-E72D297353CC}">
+              <c16:uniqueId val="{00000000-9240-4DD3-859E-14C4CB8D2532}"/>
+            </c:ext>
+          </c:extLst>
+        </c:ser>
+        <c:dLbls>
+          <c:showLegendKey val="0"/>
+          <c:showVal val="1"/>
+          <c:showCatName val="0"/>
+          <c:showSerName val="0"/>
+          <c:showPercent val="0"/>
+          <c:showBubbleSize val="0"/>
+        </c:dLbls>
+        <c:gapWidth val="35"/>
+        <c:axId val="2094734554"/>
+        <c:axId val="2094734552"/>
+      </c:barChart>
+      <c:catAx>
+        <c:axId val="2094734554"/>
+        <c:scaling>
+          <c:orientation val="minMax"/>
+        </c:scaling>
+        <c:delete val="0"/>
+        <c:axPos val="l"/>
+        <c:numFmt formatCode="General" sourceLinked="1"/>
+        <c:majorTickMark val="out"/>
+        <c:minorTickMark val="none"/>
+        <c:tickLblPos val="nextTo"/>
+        <c:spPr>
+          <a:ln w="12700" cap="flat">
+            <a:solidFill>
+              <a:srgbClr val="888888"/>
+            </a:solidFill>
+            <a:prstDash val="solid"/>
+            <a:round/>
+          </a:ln>
+        </c:spPr>
+        <c:txPr>
+          <a:bodyPr/>
+          <a:lstStyle/>
+          <a:p>
+            <a:pPr>
+              <a:defRPr sz="1100" b="0" i="0" u="none" strike="noStrike">
+                <a:solidFill>
+                  <a:srgbClr val="64748B"/>
+                </a:solidFill>
+                <a:latin typeface="Arial"/>
+              </a:defRPr>
+            </a:pPr>
+            <a:endParaRPr lang="en-US"/>
+          </a:p>
+        </c:txPr>
+        <c:crossAx val="2094734552"/>
+        <c:crosses val="autoZero"/>
+        <c:auto val="1"/>
+        <c:lblAlgn val="ctr"/>
+        <c:lblOffset val="100"/>
+        <c:noMultiLvlLbl val="1"/>
+      </c:catAx>
+      <c:valAx>
+        <c:axId val="2094734552"/>
+        <c:scaling>
+          <c:orientation val="minMax"/>
+        </c:scaling>
+        <c:delete val="0"/>
+        <c:axPos val="b"/>
+        <c:majorGridlines>
+          <c:spPr>
+            <a:ln w="6350" cap="flat">
+              <a:solidFill>
+                <a:srgbClr val="E2E8F0"/>
+              </a:solidFill>
+              <a:prstDash val="solid"/>
+              <a:round/>
+            </a:ln>
+          </c:spPr>
+        </c:majorGridlines>
+        <c:numFmt formatCode="General" sourceLinked="0"/>
+        <c:majorTickMark val="out"/>
+        <c:minorTickMark val="none"/>
+        <c:tickLblPos val="low"/>
+        <c:spPr>
+          <a:ln w="12700" cap="flat">
+            <a:solidFill>
+              <a:srgbClr val="888888"/>
+            </a:solidFill>
+            <a:prstDash val="solid"/>
+            <a:round/>
+          </a:ln>
+        </c:spPr>
+        <c:txPr>
+          <a:bodyPr/>
+          <a:lstStyle/>
+          <a:p>
+            <a:pPr>
+              <a:defRPr sz="1000" b="0" i="0" u="none" strike="noStrike">
+                <a:solidFill>
+                  <a:srgbClr val="64748B"/>
+                </a:solidFill>
+                <a:latin typeface="Arial"/>
+              </a:defRPr>
+            </a:pPr>
+            <a:endParaRPr lang="en-US"/>
+          </a:p>
+        </c:txPr>
+        <c:crossAx val="2094734554"/>
+        <c:crosses val="autoZero"/>
+        <c:crossBetween val="between"/>
+      </c:valAx>
+      <c:spPr>
+        <a:solidFill>
+          <a:srgbClr val="FFFFFF"/>
+        </a:solidFill>
+        <a:ln>
+          <a:noFill/>
+        </a:ln>
+        <a:effectLst/>
+      </c:spPr>
+    </c:plotArea>
+    <c:plotVisOnly val="1"/>
+    <c:dispBlanksAs val="span"/>
+    <c:showDLblsOverMax val="1"/>
+  </c:chart>
+  <c:spPr>
+    <a:solidFill>
+      <a:srgbClr val="FFFFFF"/>
+    </a:solidFill>
+    <a:ln>
+      <a:noFill/>
+    </a:ln>
+    <a:effectLst/>
+  </c:spPr>
+  <c:externalData r:id="rId1">
+    <c:autoUpdate val="0"/>
+  </c:externalData>
+</c:chartSpace>
+</file>
+
+<file path=ppt/charts/chart2.xml><?xml version="1.0" encoding="utf-8"?>
+<c:chartSpace xmlns:c="http://schemas.openxmlformats.org/drawingml/2006/chart" xmlns:a="http://schemas.openxmlformats.org/drawingml/2006/main" xmlns:r="http://schemas.openxmlformats.org/officeDocument/2006/relationships" xmlns:c16r2="http://schemas.microsoft.com/office/drawing/2015/06/chart">
+  <c:date1904 val="0"/>
+  <c:lang val="en-US"/>
+  <c:roundedCorners val="1"/>
+  <c:style val="2"/>
+  <c:chart>
+    <c:autoTitleDeleted val="1"/>
+    <c:plotArea>
+      <c:layout/>
+      <c:barChart>
+        <c:barDir val="bar"/>
+        <c:grouping val="clustered"/>
+        <c:varyColors val="0"/>
+        <c:ser>
+          <c:idx val="0"/>
+          <c:order val="0"/>
+          <c:tx>
+            <c:strRef>
+              <c:f>Sheet1!$B$1</c:f>
+              <c:strCache>
+                <c:ptCount val="1"/>
+                <c:pt idx="0">
+                  <c:v>Entity count</c:v>
+                </c:pt>
+              </c:strCache>
+            </c:strRef>
+          </c:tx>
+          <c:spPr>
+            <a:solidFill>
+              <a:srgbClr val="028090"/>
+            </a:solidFill>
+            <a:effectLst/>
+          </c:spPr>
+          <c:invertIfNegative val="0"/>
+          <c:dLbls>
+            <c:numFmt formatCode="#,##0" sourceLinked="0"/>
+            <c:spPr>
+              <a:noFill/>
+              <a:ln>
+                <a:noFill/>
+              </a:ln>
+              <a:effectLst/>
+            </c:spPr>
+            <c:txPr>
+              <a:bodyPr/>
+              <a:lstStyle/>
+              <a:p>
+                <a:pPr>
+                  <a:defRPr sz="1000" b="0" i="0" u="none" strike="noStrike">
+                    <a:solidFill>
+                      <a:srgbClr val="1E293B"/>
+                    </a:solidFill>
+                    <a:latin typeface="Arial"/>
+                  </a:defRPr>
+                </a:pPr>
+                <a:endParaRPr lang="en-US"/>
+              </a:p>
+            </c:txPr>
+            <c:showLegendKey val="0"/>
+            <c:showVal val="1"/>
+            <c:showCatName val="0"/>
+            <c:showSerName val="0"/>
+            <c:showPercent val="0"/>
+            <c:showBubbleSize val="0"/>
+            <c:showLeaderLines val="0"/>
+            <c:extLst>
+              <c:ext xmlns:c15="http://schemas.microsoft.com/office/drawing/2012/chart" uri="{CE6537A1-D6FC-4f65-9D91-7224C49458BB}">
+                <c15:showLeaderLines val="0"/>
+              </c:ext>
+            </c:extLst>
+          </c:dLbls>
+          <c:cat>
+            <c:strRef>
+              <c:f>Sheet1!$A$2:$A$3</c:f>
+              <c:strCache>
+                <c:ptCount val="2"/>
+                <c:pt idx="0">
+                  <c:v>DISEASE</c:v>
+                </c:pt>
+                <c:pt idx="1">
+                  <c:v>CHEMICAL</c:v>
+                </c:pt>
+              </c:strCache>
+            </c:strRef>
+          </c:cat>
+          <c:val>
+            <c:numRef>
+              <c:f>Sheet1!$B$2:$B$3</c:f>
+              <c:numCache>
+                <c:formatCode>General</c:formatCode>
+                <c:ptCount val="2"/>
+                <c:pt idx="0">
+                  <c:v>1207</c:v>
+                </c:pt>
+                <c:pt idx="1">
+                  <c:v>779</c:v>
+                </c:pt>
+              </c:numCache>
+            </c:numRef>
+          </c:val>
+          <c:extLst>
+            <c:ext xmlns:c16="http://schemas.microsoft.com/office/drawing/2014/chart" uri="{C3380CC4-5D6E-409C-BE32-E72D297353CC}">
+              <c16:uniqueId val="{00000000-21E0-4986-AE03-ED9EC003CABC}"/>
+            </c:ext>
+          </c:extLst>
+        </c:ser>
+        <c:dLbls>
+          <c:showLegendKey val="0"/>
+          <c:showVal val="1"/>
+          <c:showCatName val="0"/>
+          <c:showSerName val="0"/>
+          <c:showPercent val="0"/>
+          <c:showBubbleSize val="0"/>
+        </c:dLbls>
+        <c:gapWidth val="35"/>
+        <c:axId val="2094734554"/>
+        <c:axId val="2094734552"/>
+      </c:barChart>
+      <c:catAx>
+        <c:axId val="2094734554"/>
+        <c:scaling>
+          <c:orientation val="minMax"/>
+        </c:scaling>
+        <c:delete val="0"/>
+        <c:axPos val="l"/>
+        <c:numFmt formatCode="General" sourceLinked="1"/>
+        <c:majorTickMark val="out"/>
+        <c:minorTickMark val="none"/>
+        <c:tickLblPos val="nextTo"/>
+        <c:spPr>
+          <a:ln w="12700" cap="flat">
+            <a:solidFill>
+              <a:srgbClr val="888888"/>
+            </a:solidFill>
+            <a:prstDash val="solid"/>
+            <a:round/>
+          </a:ln>
+        </c:spPr>
+        <c:txPr>
+          <a:bodyPr/>
+          <a:lstStyle/>
+          <a:p>
+            <a:pPr>
+              <a:defRPr sz="1100" b="0" i="0" u="none" strike="noStrike">
+                <a:solidFill>
+                  <a:srgbClr val="64748B"/>
+                </a:solidFill>
+                <a:latin typeface="Arial"/>
+              </a:defRPr>
+            </a:pPr>
+            <a:endParaRPr lang="en-US"/>
+          </a:p>
+        </c:txPr>
+        <c:crossAx val="2094734552"/>
+        <c:crosses val="autoZero"/>
+        <c:auto val="1"/>
+        <c:lblAlgn val="ctr"/>
+        <c:lblOffset val="100"/>
+        <c:noMultiLvlLbl val="1"/>
+      </c:catAx>
+      <c:valAx>
+        <c:axId val="2094734552"/>
+        <c:scaling>
+          <c:orientation val="minMax"/>
+        </c:scaling>
+        <c:delete val="0"/>
+        <c:axPos val="b"/>
+        <c:majorGridlines>
+          <c:spPr>
+            <a:ln w="6350" cap="flat">
+              <a:solidFill>
+                <a:srgbClr val="E2E8F0"/>
+              </a:solidFill>
+              <a:prstDash val="solid"/>
+              <a:round/>
+            </a:ln>
+          </c:spPr>
+        </c:majorGridlines>
+        <c:numFmt formatCode="General" sourceLinked="0"/>
+        <c:majorTickMark val="out"/>
+        <c:minorTickMark val="none"/>
+        <c:tickLblPos val="low"/>
+        <c:spPr>
+          <a:ln w="12700" cap="flat">
+            <a:solidFill>
+              <a:srgbClr val="888888"/>
+            </a:solidFill>
+            <a:prstDash val="solid"/>
+            <a:round/>
+          </a:ln>
+        </c:spPr>
+        <c:txPr>
+          <a:bodyPr/>
+          <a:lstStyle/>
+          <a:p>
+            <a:pPr>
+              <a:defRPr sz="1000" b="0" i="0" u="none" strike="noStrike">
+                <a:solidFill>
+                  <a:srgbClr val="64748B"/>
+                </a:solidFill>
+                <a:latin typeface="Arial"/>
+              </a:defRPr>
+            </a:pPr>
+            <a:endParaRPr lang="en-US"/>
+          </a:p>
+        </c:txPr>
+        <c:crossAx val="2094734554"/>
+        <c:crosses val="autoZero"/>
+        <c:crossBetween val="between"/>
+      </c:valAx>
+      <c:spPr>
+        <a:solidFill>
+          <a:srgbClr val="FFFFFF"/>
+        </a:solidFill>
+        <a:ln>
+          <a:noFill/>
+        </a:ln>
+        <a:effectLst/>
+      </c:spPr>
+    </c:plotArea>
+    <c:plotVisOnly val="1"/>
+    <c:dispBlanksAs val="span"/>
+    <c:showDLblsOverMax val="1"/>
+  </c:chart>
+  <c:spPr>
+    <a:solidFill>
+      <a:srgbClr val="FFFFFF"/>
+    </a:solidFill>
+    <a:ln>
+      <a:noFill/>
+    </a:ln>
+    <a:effectLst/>
+  </c:spPr>
+  <c:externalData r:id="rId1">
+    <c:autoUpdate val="0"/>
+  </c:externalData>
+</c:chartSpace>
+</file>
+
+<file path=ppt/charts/chart3.xml><?xml version="1.0" encoding="utf-8"?>
+<c:chartSpace xmlns:c="http://schemas.openxmlformats.org/drawingml/2006/chart" xmlns:a="http://schemas.openxmlformats.org/drawingml/2006/main" xmlns:r="http://schemas.openxmlformats.org/officeDocument/2006/relationships" xmlns:c16r2="http://schemas.microsoft.com/office/drawing/2015/06/chart">
+  <c:date1904 val="0"/>
+  <c:lang val="en-US"/>
+  <c:roundedCorners val="1"/>
+  <c:style val="2"/>
+  <c:chart>
+    <c:autoTitleDeleted val="1"/>
+    <c:plotArea>
+      <c:layout/>
+      <c:barChart>
+        <c:barDir val="bar"/>
+        <c:grouping val="clustered"/>
+        <c:varyColors val="0"/>
+        <c:ser>
+          <c:idx val="0"/>
+          <c:order val="0"/>
+          <c:tx>
+            <c:strRef>
+              <c:f>Sheet1!$B$1</c:f>
+              <c:strCache>
+                <c:ptCount val="1"/>
+                <c:pt idx="0">
+                  <c:v>Entity count</c:v>
+                </c:pt>
+              </c:strCache>
+            </c:strRef>
+          </c:tx>
+          <c:spPr>
+            <a:solidFill>
+              <a:srgbClr val="028090"/>
+            </a:solidFill>
+            <a:effectLst/>
+          </c:spPr>
+          <c:invertIfNegative val="0"/>
+          <c:dLbls>
+            <c:numFmt formatCode="#,##0" sourceLinked="0"/>
+            <c:spPr>
+              <a:noFill/>
+              <a:ln>
+                <a:noFill/>
+              </a:ln>
+              <a:effectLst/>
+            </c:spPr>
+            <c:txPr>
+              <a:bodyPr/>
+              <a:lstStyle/>
+              <a:p>
+                <a:pPr>
+                  <a:defRPr sz="1000" b="0" i="0" u="none" strike="noStrike">
+                    <a:solidFill>
+                      <a:srgbClr val="1E293B"/>
+                    </a:solidFill>
+                    <a:latin typeface="Arial"/>
+                  </a:defRPr>
+                </a:pPr>
+                <a:endParaRPr lang="en-US"/>
+              </a:p>
+            </c:txPr>
+            <c:showLegendKey val="0"/>
+            <c:showVal val="1"/>
+            <c:showCatName val="0"/>
+            <c:showSerName val="0"/>
+            <c:showPercent val="0"/>
+            <c:showBubbleSize val="0"/>
+            <c:showLeaderLines val="0"/>
+            <c:extLst>
+              <c:ext xmlns:c15="http://schemas.microsoft.com/office/drawing/2012/chart" uri="{CE6537A1-D6FC-4f65-9D91-7224C49458BB}">
+                <c15:showLeaderLines val="0"/>
+              </c:ext>
+            </c:extLst>
+          </c:dLbls>
+          <c:cat>
+            <c:strRef>
+              <c:f>Sheet1!$A$2:$A$3</c:f>
+              <c:strCache>
+                <c:ptCount val="2"/>
+                <c:pt idx="0">
+                  <c:v>CONDITION</c:v>
+                </c:pt>
+                <c:pt idx="1">
+                  <c:v>SYMPTOM</c:v>
+                </c:pt>
+              </c:strCache>
+            </c:strRef>
+          </c:cat>
+          <c:val>
+            <c:numRef>
+              <c:f>Sheet1!$B$2:$B$3</c:f>
+              <c:numCache>
+                <c:formatCode>General</c:formatCode>
+                <c:ptCount val="2"/>
+                <c:pt idx="0">
+                  <c:v>150</c:v>
+                </c:pt>
+                <c:pt idx="1">
+                  <c:v>104</c:v>
+                </c:pt>
+              </c:numCache>
+            </c:numRef>
+          </c:val>
+          <c:extLst>
+            <c:ext xmlns:c16="http://schemas.microsoft.com/office/drawing/2014/chart" uri="{C3380CC4-5D6E-409C-BE32-E72D297353CC}">
+              <c16:uniqueId val="{00000000-AC6A-4C4B-877E-3F180CDA2301}"/>
+            </c:ext>
+          </c:extLst>
+        </c:ser>
+        <c:dLbls>
+          <c:showLegendKey val="0"/>
+          <c:showVal val="1"/>
+          <c:showCatName val="0"/>
+          <c:showSerName val="0"/>
+          <c:showPercent val="0"/>
+          <c:showBubbleSize val="0"/>
+        </c:dLbls>
+        <c:gapWidth val="35"/>
+        <c:axId val="2094734554"/>
+        <c:axId val="2094734552"/>
+      </c:barChart>
+      <c:catAx>
+        <c:axId val="2094734554"/>
+        <c:scaling>
+          <c:orientation val="minMax"/>
+        </c:scaling>
+        <c:delete val="0"/>
+        <c:axPos val="l"/>
+        <c:numFmt formatCode="General" sourceLinked="1"/>
+        <c:majorTickMark val="out"/>
+        <c:minorTickMark val="none"/>
+        <c:tickLblPos val="nextTo"/>
+        <c:spPr>
+          <a:ln w="12700" cap="flat">
+            <a:solidFill>
+              <a:srgbClr val="888888"/>
+            </a:solidFill>
+            <a:prstDash val="solid"/>
+            <a:round/>
+          </a:ln>
+        </c:spPr>
+        <c:txPr>
+          <a:bodyPr/>
+          <a:lstStyle/>
+          <a:p>
+            <a:pPr>
+              <a:defRPr sz="1100" b="0" i="0" u="none" strike="noStrike">
+                <a:solidFill>
+                  <a:srgbClr val="64748B"/>
+                </a:solidFill>
+                <a:latin typeface="Arial"/>
+              </a:defRPr>
+            </a:pPr>
+            <a:endParaRPr lang="en-US"/>
+          </a:p>
+        </c:txPr>
+        <c:crossAx val="2094734552"/>
+        <c:crosses val="autoZero"/>
+        <c:auto val="1"/>
+        <c:lblAlgn val="ctr"/>
+        <c:lblOffset val="100"/>
+        <c:noMultiLvlLbl val="1"/>
+      </c:catAx>
+      <c:valAx>
+        <c:axId val="2094734552"/>
+        <c:scaling>
+          <c:orientation val="minMax"/>
+        </c:scaling>
+        <c:delete val="0"/>
+        <c:axPos val="b"/>
+        <c:majorGridlines>
+          <c:spPr>
+            <a:ln w="6350" cap="flat">
+              <a:solidFill>
+                <a:srgbClr val="E2E8F0"/>
+              </a:solidFill>
+              <a:prstDash val="solid"/>
+              <a:round/>
+            </a:ln>
+          </c:spPr>
+        </c:majorGridlines>
+        <c:numFmt formatCode="General" sourceLinked="0"/>
+        <c:majorTickMark val="out"/>
+        <c:minorTickMark val="none"/>
+        <c:tickLblPos val="low"/>
+        <c:spPr>
+          <a:ln w="12700" cap="flat">
+            <a:solidFill>
+              <a:srgbClr val="888888"/>
+            </a:solidFill>
+            <a:prstDash val="solid"/>
+            <a:round/>
+          </a:ln>
+        </c:spPr>
+        <c:txPr>
+          <a:bodyPr/>
+          <a:lstStyle/>
+          <a:p>
+            <a:pPr>
+              <a:defRPr sz="1000" b="0" i="0" u="none" strike="noStrike">
+                <a:solidFill>
+                  <a:srgbClr val="64748B"/>
+                </a:solidFill>
+                <a:latin typeface="Arial"/>
+              </a:defRPr>
+            </a:pPr>
+            <a:endParaRPr lang="en-US"/>
+          </a:p>
+        </c:txPr>
+        <c:crossAx val="2094734554"/>
+        <c:crosses val="autoZero"/>
+        <c:crossBetween val="between"/>
+      </c:valAx>
+      <c:spPr>
+        <a:solidFill>
+          <a:srgbClr val="FFFFFF"/>
+        </a:solidFill>
+        <a:ln>
+          <a:noFill/>
+        </a:ln>
+        <a:effectLst/>
+      </c:spPr>
+    </c:plotArea>
+    <c:plotVisOnly val="1"/>
+    <c:dispBlanksAs val="span"/>
+    <c:showDLblsOverMax val="1"/>
+  </c:chart>
+  <c:spPr>
+    <a:solidFill>
+      <a:srgbClr val="FFFFFF"/>
+    </a:solidFill>
+    <a:ln>
+      <a:noFill/>
+    </a:ln>
+    <a:effectLst/>
+  </c:spPr>
+  <c:externalData r:id="rId1">
+    <c:autoUpdate val="0"/>
+  </c:externalData>
+</c:chartSpace>
 </file>
 
 <file path=ppt/notesMasters/notesMaster1.xml><?xml version="1.0" encoding="utf-8"?>
@@ -207,8 +975,8 @@
             </a:lvl1pPr>
           </a:lstStyle>
           <a:p>
-            <a:fld id="{45D7BA89-5955-483A-A666-4ACDF1A4CA28}" type="datetimeFigureOut">
-              <a:t>7/6/2026</a:t>
+            <a:fld id="{A1F3073E-6672-46EE-A8E5-BF0CFCA79A80}" type="datetimeFigureOut">
+              <a:t>7/8/2026</a:t>
             </a:fld>
             <a:endParaRPr lang="en-US"/>
           </a:p>
@@ -364,7 +1132,7 @@
             </a:lvl1pPr>
           </a:lstStyle>
           <a:p>
-            <a:fld id="{C842BB3E-2AB3-4AFD-99F5-B4DBB8DCC971}" type="slidenum">
+            <a:fld id="{51152B5F-5495-46D3-863F-A7BE5027D20A}" type="slidenum">
               <a:t>‹#›</a:t>
             </a:fld>
             <a:endParaRPr lang="en-US"/>
@@ -374,7 +1142,7 @@
     </p:spTree>
     <p:extLst>
       <p:ext uri="{BB962C8B-B14F-4D97-AF65-F5344CB8AC3E}">
-        <p14:creationId xmlns:p14="http://schemas.microsoft.com/office/powerpoint/2010/main" val="1589788570"/>
+        <p14:creationId xmlns:p14="http://schemas.microsoft.com/office/powerpoint/2010/main" val="1671277272"/>
       </p:ext>
     </p:extLst>
   </p:cSld>
@@ -558,6 +1326,426 @@
 </p:notes>
 </file>
 
+<file path=ppt/notesSlides/notesSlide10.xml><?xml version="1.0" encoding="utf-8"?>
+<p:notes xmlns:a="http://schemas.openxmlformats.org/drawingml/2006/main" xmlns:r="http://schemas.openxmlformats.org/officeDocument/2006/relationships" xmlns:p="http://schemas.openxmlformats.org/presentationml/2006/main">
+  <p:cSld>
+    <p:spTree>
+      <p:nvGrpSpPr>
+        <p:cNvPr id="1" name=""/>
+        <p:cNvGrpSpPr/>
+        <p:nvPr/>
+      </p:nvGrpSpPr>
+      <p:grpSpPr>
+        <a:xfrm>
+          <a:off x="0" y="0"/>
+          <a:ext cx="0" cy="0"/>
+          <a:chOff x="0" y="0"/>
+          <a:chExt cx="0" cy="0"/>
+        </a:xfrm>
+      </p:grpSpPr>
+      <p:sp>
+        <p:nvSpPr>
+          <p:cNvPr id="2" name="Slide Image Placeholder 1"/>
+          <p:cNvSpPr>
+            <a:spLocks noGrp="1" noRot="1" noChangeAspect="1"/>
+          </p:cNvSpPr>
+          <p:nvPr>
+            <p:ph type="sldImg"/>
+          </p:nvPr>
+        </p:nvSpPr>
+        <p:spPr/>
+      </p:sp>
+      <p:sp>
+        <p:nvSpPr>
+          <p:cNvPr id="3" name="Notes Placeholder 2"/>
+          <p:cNvSpPr>
+            <a:spLocks noGrp="1"/>
+          </p:cNvSpPr>
+          <p:nvPr>
+            <p:ph type="body" idx="1"/>
+          </p:nvPr>
+        </p:nvSpPr>
+        <p:spPr/>
+        <p:txBody>
+          <a:bodyPr/>
+          <a:lstStyle/>
+          <a:p>
+            <a:endParaRPr lang="en-US" dirty="0"/>
+          </a:p>
+        </p:txBody>
+      </p:sp>
+      <p:sp>
+        <p:nvSpPr>
+          <p:cNvPr id="4" name="Slide Number Placeholder 3"/>
+          <p:cNvSpPr>
+            <a:spLocks noGrp="1"/>
+          </p:cNvSpPr>
+          <p:nvPr>
+            <p:ph type="sldNum" sz="quarter" idx="10"/>
+          </p:nvPr>
+        </p:nvSpPr>
+        <p:spPr/>
+        <p:txBody>
+          <a:bodyPr/>
+          <a:lstStyle/>
+          <a:p>
+            <a:fld id="{F7021451-1387-4CA6-816F-3879F97B5CBC}" type="slidenum">
+              <a:rPr lang="en-US"/>
+              <a:t>10</a:t>
+            </a:fld>
+            <a:endParaRPr lang="en-US"/>
+          </a:p>
+        </p:txBody>
+      </p:sp>
+    </p:spTree>
+    <p:extLst>
+      <p:ext uri="{BB962C8B-B14F-4D97-AF65-F5344CB8AC3E}">
+        <p14:creationId xmlns:p14="http://schemas.microsoft.com/office/powerpoint/2010/main" val="1024086991"/>
+      </p:ext>
+    </p:extLst>
+  </p:cSld>
+  <p:clrMapOvr>
+    <a:masterClrMapping/>
+  </p:clrMapOvr>
+</p:notes>
+</file>
+
+<file path=ppt/notesSlides/notesSlide11.xml><?xml version="1.0" encoding="utf-8"?>
+<p:notes xmlns:a="http://schemas.openxmlformats.org/drawingml/2006/main" xmlns:r="http://schemas.openxmlformats.org/officeDocument/2006/relationships" xmlns:p="http://schemas.openxmlformats.org/presentationml/2006/main">
+  <p:cSld>
+    <p:spTree>
+      <p:nvGrpSpPr>
+        <p:cNvPr id="1" name=""/>
+        <p:cNvGrpSpPr/>
+        <p:nvPr/>
+      </p:nvGrpSpPr>
+      <p:grpSpPr>
+        <a:xfrm>
+          <a:off x="0" y="0"/>
+          <a:ext cx="0" cy="0"/>
+          <a:chOff x="0" y="0"/>
+          <a:chExt cx="0" cy="0"/>
+        </a:xfrm>
+      </p:grpSpPr>
+      <p:sp>
+        <p:nvSpPr>
+          <p:cNvPr id="2" name="Slide Image Placeholder 1"/>
+          <p:cNvSpPr>
+            <a:spLocks noGrp="1" noRot="1" noChangeAspect="1"/>
+          </p:cNvSpPr>
+          <p:nvPr>
+            <p:ph type="sldImg"/>
+          </p:nvPr>
+        </p:nvSpPr>
+        <p:spPr/>
+      </p:sp>
+      <p:sp>
+        <p:nvSpPr>
+          <p:cNvPr id="3" name="Notes Placeholder 2"/>
+          <p:cNvSpPr>
+            <a:spLocks noGrp="1"/>
+          </p:cNvSpPr>
+          <p:nvPr>
+            <p:ph type="body" idx="1"/>
+          </p:nvPr>
+        </p:nvSpPr>
+        <p:spPr/>
+        <p:txBody>
+          <a:bodyPr/>
+          <a:lstStyle/>
+          <a:p>
+            <a:endParaRPr lang="en-US" dirty="0"/>
+          </a:p>
+        </p:txBody>
+      </p:sp>
+      <p:sp>
+        <p:nvSpPr>
+          <p:cNvPr id="4" name="Slide Number Placeholder 3"/>
+          <p:cNvSpPr>
+            <a:spLocks noGrp="1"/>
+          </p:cNvSpPr>
+          <p:nvPr>
+            <p:ph type="sldNum" sz="quarter" idx="10"/>
+          </p:nvPr>
+        </p:nvSpPr>
+        <p:spPr/>
+        <p:txBody>
+          <a:bodyPr/>
+          <a:lstStyle/>
+          <a:p>
+            <a:fld id="{F7021451-1387-4CA6-816F-3879F97B5CBC}" type="slidenum">
+              <a:rPr lang="en-US"/>
+              <a:t>11</a:t>
+            </a:fld>
+            <a:endParaRPr lang="en-US"/>
+          </a:p>
+        </p:txBody>
+      </p:sp>
+    </p:spTree>
+    <p:extLst>
+      <p:ext uri="{BB962C8B-B14F-4D97-AF65-F5344CB8AC3E}">
+        <p14:creationId xmlns:p14="http://schemas.microsoft.com/office/powerpoint/2010/main" val="1024086991"/>
+      </p:ext>
+    </p:extLst>
+  </p:cSld>
+  <p:clrMapOvr>
+    <a:masterClrMapping/>
+  </p:clrMapOvr>
+</p:notes>
+</file>
+
+<file path=ppt/notesSlides/notesSlide12.xml><?xml version="1.0" encoding="utf-8"?>
+<p:notes xmlns:a="http://schemas.openxmlformats.org/drawingml/2006/main" xmlns:r="http://schemas.openxmlformats.org/officeDocument/2006/relationships" xmlns:p="http://schemas.openxmlformats.org/presentationml/2006/main">
+  <p:cSld>
+    <p:spTree>
+      <p:nvGrpSpPr>
+        <p:cNvPr id="1" name=""/>
+        <p:cNvGrpSpPr/>
+        <p:nvPr/>
+      </p:nvGrpSpPr>
+      <p:grpSpPr>
+        <a:xfrm>
+          <a:off x="0" y="0"/>
+          <a:ext cx="0" cy="0"/>
+          <a:chOff x="0" y="0"/>
+          <a:chExt cx="0" cy="0"/>
+        </a:xfrm>
+      </p:grpSpPr>
+      <p:sp>
+        <p:nvSpPr>
+          <p:cNvPr id="2" name="Slide Image Placeholder 1"/>
+          <p:cNvSpPr>
+            <a:spLocks noGrp="1" noRot="1" noChangeAspect="1"/>
+          </p:cNvSpPr>
+          <p:nvPr>
+            <p:ph type="sldImg"/>
+          </p:nvPr>
+        </p:nvSpPr>
+        <p:spPr/>
+      </p:sp>
+      <p:sp>
+        <p:nvSpPr>
+          <p:cNvPr id="3" name="Notes Placeholder 2"/>
+          <p:cNvSpPr>
+            <a:spLocks noGrp="1"/>
+          </p:cNvSpPr>
+          <p:nvPr>
+            <p:ph type="body" idx="1"/>
+          </p:nvPr>
+        </p:nvSpPr>
+        <p:spPr/>
+        <p:txBody>
+          <a:bodyPr/>
+          <a:lstStyle/>
+          <a:p>
+            <a:endParaRPr lang="en-US" dirty="0"/>
+          </a:p>
+        </p:txBody>
+      </p:sp>
+      <p:sp>
+        <p:nvSpPr>
+          <p:cNvPr id="4" name="Slide Number Placeholder 3"/>
+          <p:cNvSpPr>
+            <a:spLocks noGrp="1"/>
+          </p:cNvSpPr>
+          <p:nvPr>
+            <p:ph type="sldNum" sz="quarter" idx="10"/>
+          </p:nvPr>
+        </p:nvSpPr>
+        <p:spPr/>
+        <p:txBody>
+          <a:bodyPr/>
+          <a:lstStyle/>
+          <a:p>
+            <a:fld id="{F7021451-1387-4CA6-816F-3879F97B5CBC}" type="slidenum">
+              <a:rPr lang="en-US"/>
+              <a:t>12</a:t>
+            </a:fld>
+            <a:endParaRPr lang="en-US"/>
+          </a:p>
+        </p:txBody>
+      </p:sp>
+    </p:spTree>
+    <p:extLst>
+      <p:ext uri="{BB962C8B-B14F-4D97-AF65-F5344CB8AC3E}">
+        <p14:creationId xmlns:p14="http://schemas.microsoft.com/office/powerpoint/2010/main" val="1024086991"/>
+      </p:ext>
+    </p:extLst>
+  </p:cSld>
+  <p:clrMapOvr>
+    <a:masterClrMapping/>
+  </p:clrMapOvr>
+</p:notes>
+</file>
+
+<file path=ppt/notesSlides/notesSlide13.xml><?xml version="1.0" encoding="utf-8"?>
+<p:notes xmlns:a="http://schemas.openxmlformats.org/drawingml/2006/main" xmlns:r="http://schemas.openxmlformats.org/officeDocument/2006/relationships" xmlns:p="http://schemas.openxmlformats.org/presentationml/2006/main">
+  <p:cSld>
+    <p:spTree>
+      <p:nvGrpSpPr>
+        <p:cNvPr id="1" name=""/>
+        <p:cNvGrpSpPr/>
+        <p:nvPr/>
+      </p:nvGrpSpPr>
+      <p:grpSpPr>
+        <a:xfrm>
+          <a:off x="0" y="0"/>
+          <a:ext cx="0" cy="0"/>
+          <a:chOff x="0" y="0"/>
+          <a:chExt cx="0" cy="0"/>
+        </a:xfrm>
+      </p:grpSpPr>
+      <p:sp>
+        <p:nvSpPr>
+          <p:cNvPr id="2" name="Slide Image Placeholder 1"/>
+          <p:cNvSpPr>
+            <a:spLocks noGrp="1" noRot="1" noChangeAspect="1"/>
+          </p:cNvSpPr>
+          <p:nvPr>
+            <p:ph type="sldImg"/>
+          </p:nvPr>
+        </p:nvSpPr>
+        <p:spPr/>
+      </p:sp>
+      <p:sp>
+        <p:nvSpPr>
+          <p:cNvPr id="3" name="Notes Placeholder 2"/>
+          <p:cNvSpPr>
+            <a:spLocks noGrp="1"/>
+          </p:cNvSpPr>
+          <p:nvPr>
+            <p:ph type="body" idx="1"/>
+          </p:nvPr>
+        </p:nvSpPr>
+        <p:spPr/>
+        <p:txBody>
+          <a:bodyPr/>
+          <a:lstStyle/>
+          <a:p>
+            <a:endParaRPr lang="en-US" dirty="0"/>
+          </a:p>
+        </p:txBody>
+      </p:sp>
+      <p:sp>
+        <p:nvSpPr>
+          <p:cNvPr id="4" name="Slide Number Placeholder 3"/>
+          <p:cNvSpPr>
+            <a:spLocks noGrp="1"/>
+          </p:cNvSpPr>
+          <p:nvPr>
+            <p:ph type="sldNum" sz="quarter" idx="10"/>
+          </p:nvPr>
+        </p:nvSpPr>
+        <p:spPr/>
+        <p:txBody>
+          <a:bodyPr/>
+          <a:lstStyle/>
+          <a:p>
+            <a:fld id="{F7021451-1387-4CA6-816F-3879F97B5CBC}" type="slidenum">
+              <a:rPr lang="en-US"/>
+              <a:t>13</a:t>
+            </a:fld>
+            <a:endParaRPr lang="en-US"/>
+          </a:p>
+        </p:txBody>
+      </p:sp>
+    </p:spTree>
+    <p:extLst>
+      <p:ext uri="{BB962C8B-B14F-4D97-AF65-F5344CB8AC3E}">
+        <p14:creationId xmlns:p14="http://schemas.microsoft.com/office/powerpoint/2010/main" val="1024086991"/>
+      </p:ext>
+    </p:extLst>
+  </p:cSld>
+  <p:clrMapOvr>
+    <a:masterClrMapping/>
+  </p:clrMapOvr>
+</p:notes>
+</file>
+
+<file path=ppt/notesSlides/notesSlide14.xml><?xml version="1.0" encoding="utf-8"?>
+<p:notes xmlns:a="http://schemas.openxmlformats.org/drawingml/2006/main" xmlns:r="http://schemas.openxmlformats.org/officeDocument/2006/relationships" xmlns:p="http://schemas.openxmlformats.org/presentationml/2006/main">
+  <p:cSld>
+    <p:spTree>
+      <p:nvGrpSpPr>
+        <p:cNvPr id="1" name=""/>
+        <p:cNvGrpSpPr/>
+        <p:nvPr/>
+      </p:nvGrpSpPr>
+      <p:grpSpPr>
+        <a:xfrm>
+          <a:off x="0" y="0"/>
+          <a:ext cx="0" cy="0"/>
+          <a:chOff x="0" y="0"/>
+          <a:chExt cx="0" cy="0"/>
+        </a:xfrm>
+      </p:grpSpPr>
+      <p:sp>
+        <p:nvSpPr>
+          <p:cNvPr id="2" name="Slide Image Placeholder 1"/>
+          <p:cNvSpPr>
+            <a:spLocks noGrp="1" noRot="1" noChangeAspect="1"/>
+          </p:cNvSpPr>
+          <p:nvPr>
+            <p:ph type="sldImg"/>
+          </p:nvPr>
+        </p:nvSpPr>
+        <p:spPr/>
+      </p:sp>
+      <p:sp>
+        <p:nvSpPr>
+          <p:cNvPr id="3" name="Notes Placeholder 2"/>
+          <p:cNvSpPr>
+            <a:spLocks noGrp="1"/>
+          </p:cNvSpPr>
+          <p:nvPr>
+            <p:ph type="body" idx="1"/>
+          </p:nvPr>
+        </p:nvSpPr>
+        <p:spPr/>
+        <p:txBody>
+          <a:bodyPr/>
+          <a:lstStyle/>
+          <a:p>
+            <a:endParaRPr lang="en-US" dirty="0"/>
+          </a:p>
+        </p:txBody>
+      </p:sp>
+      <p:sp>
+        <p:nvSpPr>
+          <p:cNvPr id="4" name="Slide Number Placeholder 3"/>
+          <p:cNvSpPr>
+            <a:spLocks noGrp="1"/>
+          </p:cNvSpPr>
+          <p:nvPr>
+            <p:ph type="sldNum" sz="quarter" idx="10"/>
+          </p:nvPr>
+        </p:nvSpPr>
+        <p:spPr/>
+        <p:txBody>
+          <a:bodyPr/>
+          <a:lstStyle/>
+          <a:p>
+            <a:fld id="{F7021451-1387-4CA6-816F-3879F97B5CBC}" type="slidenum">
+              <a:rPr lang="en-US"/>
+              <a:t>14</a:t>
+            </a:fld>
+            <a:endParaRPr lang="en-US"/>
+          </a:p>
+        </p:txBody>
+      </p:sp>
+    </p:spTree>
+    <p:extLst>
+      <p:ext uri="{BB962C8B-B14F-4D97-AF65-F5344CB8AC3E}">
+        <p14:creationId xmlns:p14="http://schemas.microsoft.com/office/powerpoint/2010/main" val="1024086991"/>
+      </p:ext>
+    </p:extLst>
+  </p:cSld>
+  <p:clrMapOvr>
+    <a:masterClrMapping/>
+  </p:clrMapOvr>
+</p:notes>
+</file>
+
 <file path=ppt/notesSlides/notesSlide2.xml><?xml version="1.0" encoding="utf-8"?>
 <p:notes xmlns:a="http://schemas.openxmlformats.org/drawingml/2006/main" xmlns:r="http://schemas.openxmlformats.org/officeDocument/2006/relationships" xmlns:p="http://schemas.openxmlformats.org/presentationml/2006/main">
   <p:cSld>
@@ -1128,6 +2316,90 @@
             <a:fld id="{F7021451-1387-4CA6-816F-3879F97B5CBC}" type="slidenum">
               <a:rPr lang="en-US"/>
               <a:t>8</a:t>
+            </a:fld>
+            <a:endParaRPr lang="en-US"/>
+          </a:p>
+        </p:txBody>
+      </p:sp>
+    </p:spTree>
+    <p:extLst>
+      <p:ext uri="{BB962C8B-B14F-4D97-AF65-F5344CB8AC3E}">
+        <p14:creationId xmlns:p14="http://schemas.microsoft.com/office/powerpoint/2010/main" val="1024086991"/>
+      </p:ext>
+    </p:extLst>
+  </p:cSld>
+  <p:clrMapOvr>
+    <a:masterClrMapping/>
+  </p:clrMapOvr>
+</p:notes>
+</file>
+
+<file path=ppt/notesSlides/notesSlide9.xml><?xml version="1.0" encoding="utf-8"?>
+<p:notes xmlns:a="http://schemas.openxmlformats.org/drawingml/2006/main" xmlns:r="http://schemas.openxmlformats.org/officeDocument/2006/relationships" xmlns:p="http://schemas.openxmlformats.org/presentationml/2006/main">
+  <p:cSld>
+    <p:spTree>
+      <p:nvGrpSpPr>
+        <p:cNvPr id="1" name=""/>
+        <p:cNvGrpSpPr/>
+        <p:nvPr/>
+      </p:nvGrpSpPr>
+      <p:grpSpPr>
+        <a:xfrm>
+          <a:off x="0" y="0"/>
+          <a:ext cx="0" cy="0"/>
+          <a:chOff x="0" y="0"/>
+          <a:chExt cx="0" cy="0"/>
+        </a:xfrm>
+      </p:grpSpPr>
+      <p:sp>
+        <p:nvSpPr>
+          <p:cNvPr id="2" name="Slide Image Placeholder 1"/>
+          <p:cNvSpPr>
+            <a:spLocks noGrp="1" noRot="1" noChangeAspect="1"/>
+          </p:cNvSpPr>
+          <p:nvPr>
+            <p:ph type="sldImg"/>
+          </p:nvPr>
+        </p:nvSpPr>
+        <p:spPr/>
+      </p:sp>
+      <p:sp>
+        <p:nvSpPr>
+          <p:cNvPr id="3" name="Notes Placeholder 2"/>
+          <p:cNvSpPr>
+            <a:spLocks noGrp="1"/>
+          </p:cNvSpPr>
+          <p:nvPr>
+            <p:ph type="body" idx="1"/>
+          </p:nvPr>
+        </p:nvSpPr>
+        <p:spPr/>
+        <p:txBody>
+          <a:bodyPr/>
+          <a:lstStyle/>
+          <a:p>
+            <a:endParaRPr lang="en-US" dirty="0"/>
+          </a:p>
+        </p:txBody>
+      </p:sp>
+      <p:sp>
+        <p:nvSpPr>
+          <p:cNvPr id="4" name="Slide Number Placeholder 3"/>
+          <p:cNvSpPr>
+            <a:spLocks noGrp="1"/>
+          </p:cNvSpPr>
+          <p:nvPr>
+            <p:ph type="sldNum" sz="quarter" idx="10"/>
+          </p:nvPr>
+        </p:nvSpPr>
+        <p:spPr/>
+        <p:txBody>
+          <a:bodyPr/>
+          <a:lstStyle/>
+          <a:p>
+            <a:fld id="{F7021451-1387-4CA6-816F-3879F97B5CBC}" type="slidenum">
+              <a:rPr lang="en-US"/>
+              <a:t>9</a:t>
             </a:fld>
             <a:endParaRPr lang="en-US"/>
           </a:p>
@@ -1582,11 +2854,8 @@
           <a:bodyPr wrap="square" lIns="91440" tIns="45720" rIns="91440" bIns="45720" rtlCol="0" anchor="ctr"/>
           <a:lstStyle/>
           <a:p>
-            <a:pPr marL="0" indent="0">
-              <a:buNone/>
-            </a:pPr>
-            <a:r>
-              <a:rPr lang="en-US" sz="1400" dirty="0">
+            <a:r>
+              <a:rPr lang="en-US" sz="1400">
                 <a:solidFill>
                   <a:srgbClr val="8FA3C4"/>
                 </a:solidFill>
@@ -1594,35 +2863,9 @@
                 <a:ea typeface="Calibri"/>
                 <a:cs typeface="Calibri"/>
               </a:rPr>
-              <a:t>AI 395T — AI for </a:t>
-            </a:r>
-            <a:r>
-              <a:rPr lang="en-US" sz="1400" dirty="0" err="1">
-                <a:solidFill>
-                  <a:srgbClr val="8FA3C4"/>
-                </a:solidFill>
-                <a:latin typeface="Calibri"/>
-                <a:ea typeface="Calibri"/>
-                <a:cs typeface="Calibri"/>
-              </a:rPr>
-              <a:t>Healthcae</a:t>
-            </a:r>
-            <a:r>
-              <a:rPr lang="en-US" sz="1400" dirty="0">
-                <a:solidFill>
-                  <a:srgbClr val="8FA3C4"/>
-                </a:solidFill>
-                <a:latin typeface="Calibri"/>
-                <a:ea typeface="Calibri"/>
-                <a:cs typeface="Calibri"/>
-              </a:rPr>
-              <a:t>  |  Summer 2026 </a:t>
-            </a:r>
-            <a:endParaRPr lang="en-US" sz="1400" dirty="0">
-              <a:latin typeface="Calibri"/>
-              <a:ea typeface="Calibri"/>
-              <a:cs typeface="Calibri"/>
-            </a:endParaRPr>
+              <a:t>AI 395T — AI for Healthcare  |  Summer 2026  | Murali Balarama Chakaravarthy</a:t>
+            </a:r>
+            <a:endParaRPr lang="en-US" sz="1400" dirty="0"/>
           </a:p>
         </p:txBody>
       </p:sp>
@@ -1634,9 +2877,9 @@
 </p:sld>
 </file>
 
-<file path=ppt/slides/slide2.xml><?xml version="1.0" encoding="utf-8"?>
+<file path=ppt/slides/slide10.xml><?xml version="1.0" encoding="utf-8"?>
 <p:sld xmlns:a="http://schemas.openxmlformats.org/drawingml/2006/main" xmlns:r="http://schemas.openxmlformats.org/officeDocument/2006/relationships" xmlns:p="http://schemas.openxmlformats.org/presentationml/2006/main">
-  <p:cSld name="Slide 2">
+  <p:cSld name="Slide 10">
     <p:bg>
       <p:bgPr>
         <a:solidFill>
@@ -1692,7 +2935,7 @@
                 <a:ea typeface="Calibri" pitchFamily="34" charset="-122"/>
                 <a:cs typeface="Calibri" pitchFamily="34" charset="-120"/>
               </a:rPr>
-              <a:t>BACKGROUND</a:t>
+              <a:t>TOOL 3 OF 3</a:t>
             </a:r>
             <a:endParaRPr lang="en-US" sz="1300" dirty="0"/>
           </a:p>
@@ -1707,7 +2950,7 @@
         <p:spPr>
           <a:xfrm>
             <a:off x="548640" y="868680"/>
-            <a:ext cx="10972800" cy="640080"/>
+            <a:ext cx="10972800" cy="548640"/>
           </a:xfrm>
           <a:prstGeom prst="rect">
             <a:avLst/>
@@ -1723,7 +2966,7 @@
               <a:buNone/>
             </a:pPr>
             <a:r>
-              <a:rPr lang="en-US" sz="3000" b="1" dirty="0">
+              <a:rPr lang="en-US" sz="2800" b="1" dirty="0">
                 <a:solidFill>
                   <a:srgbClr val="1E293B"/>
                 </a:solidFill>
@@ -1731,26 +2974,65 @@
                 <a:ea typeface="Cambria" pitchFamily="34" charset="-122"/>
                 <a:cs typeface="Cambria" pitchFamily="34" charset="-120"/>
               </a:rPr>
-              <a:t>Why Compare Three NLP Tools on Clinical Text?</a:t>
-            </a:r>
-            <a:endParaRPr lang="en-US" sz="3000" dirty="0"/>
-          </a:p>
-        </p:txBody>
-      </p:sp>
-      <p:sp>
-        <p:nvSpPr>
-          <p:cNvPr id="4" name="Shape 2"/>
+              <a:t>medspaCy — Clinical Context Detection</a:t>
+            </a:r>
+            <a:endParaRPr lang="en-US" sz="2800" dirty="0"/>
+          </a:p>
+        </p:txBody>
+      </p:sp>
+      <p:sp>
+        <p:nvSpPr>
+          <p:cNvPr id="4" name="Text 2"/>
           <p:cNvSpPr/>
           <p:nvPr/>
         </p:nvSpPr>
         <p:spPr>
           <a:xfrm>
-            <a:off x="548640" y="1874520"/>
-            <a:ext cx="3520440" cy="3200400"/>
+            <a:off x="548640" y="1417320"/>
+            <a:ext cx="10972800" cy="365760"/>
+          </a:xfrm>
+          <a:prstGeom prst="rect">
+            <a:avLst/>
+          </a:prstGeom>
+          <a:noFill/>
+          <a:ln/>
+        </p:spPr>
+        <p:txBody>
+          <a:bodyPr wrap="square" rtlCol="0" anchor="ctr"/>
+          <a:lstStyle/>
+          <a:p>
+            <a:pPr marL="0" indent="0">
+              <a:buNone/>
+            </a:pPr>
+            <a:r>
+              <a:rPr lang="en-US" sz="1500" i="1" dirty="0">
+                <a:solidFill>
+                  <a:srgbClr val="64748B"/>
+                </a:solidFill>
+                <a:latin typeface="Calibri" pitchFamily="34" charset="0"/>
+                <a:ea typeface="Calibri" pitchFamily="34" charset="-122"/>
+                <a:cs typeface="Calibri" pitchFamily="34" charset="-120"/>
+              </a:rPr>
+              <a:t>Adds negation, family history, and hypothetical detection on top of entities</a:t>
+            </a:r>
+            <a:endParaRPr lang="en-US" sz="1500" dirty="0"/>
+          </a:p>
+        </p:txBody>
+      </p:sp>
+      <p:sp>
+        <p:nvSpPr>
+          <p:cNvPr id="5" name="Shape 3"/>
+          <p:cNvSpPr/>
+          <p:nvPr/>
+        </p:nvSpPr>
+        <p:spPr>
+          <a:xfrm>
+            <a:off x="548640" y="1965960"/>
+            <a:ext cx="5943600" cy="3977640"/>
           </a:xfrm>
           <a:prstGeom prst="roundRect">
             <a:avLst>
-              <a:gd name="adj" fmla="val 2286"/>
+              <a:gd name="adj" fmla="val 1839"/>
             </a:avLst>
           </a:prstGeom>
           <a:solidFill>
@@ -1768,14 +3050,14 @@
       </p:sp>
       <p:sp>
         <p:nvSpPr>
-          <p:cNvPr id="6" name="Text 3"/>
+          <p:cNvPr id="6" name="Text 4"/>
           <p:cNvSpPr/>
           <p:nvPr/>
         </p:nvSpPr>
         <p:spPr>
           <a:xfrm>
-            <a:off x="822960" y="2788920"/>
-            <a:ext cx="2971800" cy="548640"/>
+            <a:off x="868680" y="2240280"/>
+            <a:ext cx="5349240" cy="3474720"/>
           </a:xfrm>
           <a:prstGeom prst="rect">
             <a:avLst/>
@@ -1784,14 +3066,17 @@
           <a:ln/>
         </p:spPr>
         <p:txBody>
-          <a:bodyPr wrap="square" rtlCol="0" anchor="ctr"/>
+          <a:bodyPr wrap="square" lIns="91440" tIns="45720" rIns="91440" bIns="45720" rtlCol="0" anchor="t"/>
           <a:lstStyle/>
           <a:p>
             <a:pPr marL="0" indent="0">
+              <a:spcAft>
+                <a:spcPts val="600"/>
+              </a:spcAft>
               <a:buNone/>
             </a:pPr>
             <a:r>
-              <a:rPr lang="en-US" sz="1600" b="1" dirty="0">
+              <a:rPr lang="en-US" sz="1400" b="1" dirty="0">
                 <a:solidFill>
                   <a:srgbClr val="028090"/>
                 </a:solidFill>
@@ -1799,38 +3084,19 @@
                 <a:ea typeface="Calibri" pitchFamily="34" charset="-122"/>
                 <a:cs typeface="Calibri" pitchFamily="34" charset="-120"/>
               </a:rPr>
-              <a:t>The Problem It Solves</a:t>
-            </a:r>
-            <a:endParaRPr lang="en-US" sz="1600" dirty="0"/>
-          </a:p>
-        </p:txBody>
-      </p:sp>
-      <p:sp>
-        <p:nvSpPr>
-          <p:cNvPr id="7" name="Text 4"/>
-          <p:cNvSpPr/>
-          <p:nvPr/>
-        </p:nvSpPr>
-        <p:spPr>
-          <a:xfrm>
-            <a:off x="822960" y="3337560"/>
-            <a:ext cx="2971800" cy="1463040"/>
-          </a:xfrm>
-          <a:prstGeom prst="rect">
-            <a:avLst/>
-          </a:prstGeom>
-          <a:noFill/>
-          <a:ln/>
-        </p:spPr>
-        <p:txBody>
-          <a:bodyPr wrap="square" rtlCol="0" anchor="t"/>
-          <a:lstStyle/>
+              <a:t>What it does:</a:t>
+            </a:r>
+            <a:endParaRPr lang="en-US" sz="1400" dirty="0"/>
+          </a:p>
           <a:p>
             <a:pPr marL="0" indent="0">
+              <a:spcAft>
+                <a:spcPts val="600"/>
+              </a:spcAft>
               <a:buNone/>
             </a:pPr>
             <a:r>
-              <a:rPr lang="en-US" sz="1350" dirty="0">
+              <a:rPr lang="en-US" sz="1400" dirty="0">
                 <a:solidFill>
                   <a:srgbClr val="1E293B"/>
                 </a:solidFill>
@@ -1838,30 +3104,216 @@
                 <a:ea typeface="Calibri" pitchFamily="34" charset="-122"/>
                 <a:cs typeface="Calibri" pitchFamily="34" charset="-120"/>
               </a:rPr>
-              <a:t>General NLP tools miss a lot of clinical meaning - they don't know 'MI' means heart attack, or that 'denies pain' is a negative finding.</a:t>
-            </a:r>
-            <a:endParaRPr lang="en-US" sz="1350" dirty="0"/>
-          </a:p>
-        </p:txBody>
-      </p:sp>
-      <p:sp>
-        <p:nvSpPr>
-          <p:cNvPr id="8" name="Shape 5"/>
+              <a:t>Flags whether a clinical concept is negated, historical, hypothetical, or about a family member - not just whether it's mentioned.</a:t>
+            </a:r>
+            <a:endParaRPr lang="en-US" sz="1400" dirty="0"/>
+          </a:p>
+          <a:p>
+            <a:pPr marL="0" indent="0">
+              <a:spcAft>
+                <a:spcPts val="600"/>
+              </a:spcAft>
+              <a:buNone/>
+            </a:pPr>
+            <a:r>
+              <a:rPr lang="en-US" sz="400" dirty="0">
+                <a:solidFill>
+                  <a:srgbClr val="000000"/>
+                </a:solidFill>
+                <a:latin typeface="Calibri" pitchFamily="34" charset="0"/>
+                <a:ea typeface="Calibri" pitchFamily="34" charset="-122"/>
+                <a:cs typeface="Calibri" pitchFamily="34" charset="-120"/>
+              </a:rPr>
+              <a:t> </a:t>
+            </a:r>
+            <a:endParaRPr lang="en-US" sz="1400" dirty="0"/>
+          </a:p>
+          <a:p>
+            <a:pPr marL="0" indent="0">
+              <a:spcAft>
+                <a:spcPts val="600"/>
+              </a:spcAft>
+              <a:buNone/>
+            </a:pPr>
+            <a:r>
+              <a:rPr lang="en-US" sz="1400" b="1" dirty="0">
+                <a:solidFill>
+                  <a:srgbClr val="028090"/>
+                </a:solidFill>
+                <a:latin typeface="Calibri" pitchFamily="34" charset="0"/>
+                <a:ea typeface="Calibri" pitchFamily="34" charset="-122"/>
+                <a:cs typeface="Calibri" pitchFamily="34" charset="-120"/>
+              </a:rPr>
+              <a:t>Why it matters:</a:t>
+            </a:r>
+            <a:endParaRPr lang="en-US" sz="1400" dirty="0"/>
+          </a:p>
+          <a:p>
+            <a:pPr marL="0" indent="0">
+              <a:spcAft>
+                <a:spcPts val="600"/>
+              </a:spcAft>
+              <a:buNone/>
+            </a:pPr>
+            <a:r>
+              <a:rPr lang="en-US" sz="1400" dirty="0">
+                <a:solidFill>
+                  <a:srgbClr val="1E293B"/>
+                </a:solidFill>
+                <a:latin typeface="Calibri"/>
+                <a:ea typeface="Calibri"/>
+                <a:cs typeface="Calibri"/>
+              </a:rPr>
+              <a:t>'Denies chest pain' and 'has chest pain' are opposite findings. Only </a:t>
+            </a:r>
+            <a:r>
+              <a:rPr lang="en-US" sz="1400" dirty="0" err="1">
+                <a:solidFill>
+                  <a:srgbClr val="1E293B"/>
+                </a:solidFill>
+                <a:latin typeface="Calibri"/>
+                <a:ea typeface="Calibri"/>
+                <a:cs typeface="Calibri"/>
+              </a:rPr>
+              <a:t>medspaCy</a:t>
+            </a:r>
+            <a:r>
+              <a:rPr lang="en-US" sz="1400" dirty="0">
+                <a:solidFill>
+                  <a:srgbClr val="1E293B"/>
+                </a:solidFill>
+                <a:latin typeface="Calibri"/>
+                <a:ea typeface="Calibri"/>
+                <a:cs typeface="Calibri"/>
+              </a:rPr>
+              <a:t> tells them apart.</a:t>
+            </a:r>
+            <a:endParaRPr lang="en-US" sz="1400" dirty="0">
+              <a:latin typeface="Calibri"/>
+              <a:ea typeface="Calibri"/>
+              <a:cs typeface="Calibri"/>
+            </a:endParaRPr>
+          </a:p>
+          <a:p>
+            <a:pPr marL="0" indent="0">
+              <a:spcAft>
+                <a:spcPts val="600"/>
+              </a:spcAft>
+              <a:buNone/>
+            </a:pPr>
+            <a:r>
+              <a:rPr lang="en-US" sz="400" dirty="0">
+                <a:solidFill>
+                  <a:srgbClr val="000000"/>
+                </a:solidFill>
+                <a:latin typeface="Calibri" pitchFamily="34" charset="0"/>
+                <a:ea typeface="Calibri" pitchFamily="34" charset="-122"/>
+                <a:cs typeface="Calibri" pitchFamily="34" charset="-120"/>
+              </a:rPr>
+              <a:t> </a:t>
+            </a:r>
+            <a:endParaRPr lang="en-US" sz="1400" dirty="0"/>
+          </a:p>
+          <a:p>
+            <a:pPr>
+              <a:spcAft>
+                <a:spcPts val="600"/>
+              </a:spcAft>
+            </a:pPr>
+            <a:r>
+              <a:rPr lang="en-US" sz="1400" b="1" dirty="0">
+                <a:solidFill>
+                  <a:srgbClr val="028090"/>
+                </a:solidFill>
+                <a:latin typeface="Calibri"/>
+                <a:ea typeface="Calibri"/>
+                <a:cs typeface="Calibri"/>
+              </a:rPr>
+              <a:t>How it was </a:t>
+            </a:r>
+            <a:r>
+              <a:rPr lang="en-US" sz="1400" b="1">
+                <a:solidFill>
+                  <a:srgbClr val="028090"/>
+                </a:solidFill>
+                <a:latin typeface="Calibri"/>
+                <a:ea typeface="Calibri"/>
+                <a:cs typeface="Calibri"/>
+              </a:rPr>
+              <a:t> run:</a:t>
+            </a:r>
+            <a:endParaRPr lang="en-US" sz="1400">
+              <a:latin typeface="Calibri"/>
+              <a:ea typeface="Calibri"/>
+              <a:cs typeface="Calibri"/>
+            </a:endParaRPr>
+          </a:p>
+          <a:p>
+            <a:pPr marL="0" indent="0">
+              <a:spcAft>
+                <a:spcPts val="600"/>
+              </a:spcAft>
+              <a:buNone/>
+            </a:pPr>
+            <a:r>
+              <a:rPr lang="en-US" sz="1400" dirty="0">
+                <a:solidFill>
+                  <a:srgbClr val="1E293B"/>
+                </a:solidFill>
+                <a:latin typeface="Calibri"/>
+                <a:ea typeface="Calibri"/>
+                <a:cs typeface="Calibri"/>
+              </a:rPr>
+              <a:t>Load </a:t>
+            </a:r>
+            <a:r>
+              <a:rPr lang="en-US" sz="1400" dirty="0" err="1">
+                <a:solidFill>
+                  <a:srgbClr val="1E293B"/>
+                </a:solidFill>
+                <a:latin typeface="Calibri"/>
+                <a:ea typeface="Calibri"/>
+                <a:cs typeface="Calibri"/>
+              </a:rPr>
+              <a:t>medspaCy</a:t>
+            </a:r>
+            <a:r>
+              <a:rPr lang="en-US" sz="1400" dirty="0">
+                <a:solidFill>
+                  <a:srgbClr val="1E293B"/>
+                </a:solidFill>
+                <a:latin typeface="Calibri"/>
+                <a:ea typeface="Calibri"/>
+                <a:cs typeface="Calibri"/>
+              </a:rPr>
+              <a:t>, add target rules for SAH-related concepts, run context detection over the sample.</a:t>
+            </a:r>
+            <a:endParaRPr lang="en-US" sz="1400" dirty="0">
+              <a:latin typeface="Calibri"/>
+              <a:ea typeface="Calibri"/>
+              <a:cs typeface="Calibri"/>
+            </a:endParaRPr>
+          </a:p>
+        </p:txBody>
+      </p:sp>
+      <p:sp>
+        <p:nvSpPr>
+          <p:cNvPr id="7" name="Shape 5"/>
           <p:cNvSpPr/>
           <p:nvPr/>
         </p:nvSpPr>
         <p:spPr>
           <a:xfrm>
-            <a:off x="4389120" y="1874520"/>
-            <a:ext cx="3520440" cy="3200400"/>
+            <a:off x="6720840" y="1965960"/>
+            <a:ext cx="4892040" cy="3977640"/>
           </a:xfrm>
           <a:prstGeom prst="roundRect">
             <a:avLst>
-              <a:gd name="adj" fmla="val 2286"/>
+              <a:gd name="adj" fmla="val 1839"/>
             </a:avLst>
           </a:prstGeom>
           <a:solidFill>
-            <a:srgbClr val="FFFFFF"/>
+            <a:srgbClr val="EAFBF6"/>
           </a:solidFill>
           <a:ln/>
           <a:effectLst>
@@ -1875,14 +3327,14 @@
       </p:sp>
       <p:sp>
         <p:nvSpPr>
-          <p:cNvPr id="10" name="Text 6"/>
+          <p:cNvPr id="9" name="Text 6"/>
           <p:cNvSpPr/>
           <p:nvPr/>
         </p:nvSpPr>
         <p:spPr>
           <a:xfrm>
-            <a:off x="4663440" y="2788920"/>
-            <a:ext cx="2971800" cy="548640"/>
+            <a:off x="7589520" y="2258568"/>
+            <a:ext cx="3840480" cy="457200"/>
           </a:xfrm>
           <a:prstGeom prst="rect">
             <a:avLst/>
@@ -1898,30 +3350,30 @@
               <a:buNone/>
             </a:pPr>
             <a:r>
-              <a:rPr lang="en-US" sz="1600" b="1" dirty="0">
-                <a:solidFill>
-                  <a:srgbClr val="028090"/>
+              <a:rPr lang="en-US" sz="1500" b="1" dirty="0">
+                <a:solidFill>
+                  <a:srgbClr val="0F766E"/>
                 </a:solidFill>
                 <a:latin typeface="Calibri" pitchFamily="34" charset="0"/>
                 <a:ea typeface="Calibri" pitchFamily="34" charset="-122"/>
                 <a:cs typeface="Calibri" pitchFamily="34" charset="-120"/>
               </a:rPr>
-              <a:t>What Makes It Different</a:t>
-            </a:r>
-            <a:endParaRPr lang="en-US" sz="1600" dirty="0"/>
-          </a:p>
-        </p:txBody>
-      </p:sp>
-      <p:sp>
-        <p:nvSpPr>
-          <p:cNvPr id="11" name="Text 7"/>
+              <a:t>Finding</a:t>
+            </a:r>
+            <a:endParaRPr lang="en-US" sz="1500" dirty="0"/>
+          </a:p>
+        </p:txBody>
+      </p:sp>
+      <p:sp>
+        <p:nvSpPr>
+          <p:cNvPr id="10" name="Text 7"/>
           <p:cNvSpPr/>
           <p:nvPr/>
         </p:nvSpPr>
         <p:spPr>
           <a:xfrm>
-            <a:off x="4663440" y="3337560"/>
-            <a:ext cx="2971800" cy="1463040"/>
+            <a:off x="6995160" y="2834640"/>
+            <a:ext cx="4343400" cy="1828800"/>
           </a:xfrm>
           <a:prstGeom prst="rect">
             <a:avLst/>
@@ -1937,7 +3389,7 @@
               <a:buNone/>
             </a:pPr>
             <a:r>
-              <a:rPr lang="en-US" sz="1350" dirty="0">
+              <a:rPr lang="en-US" sz="1400" dirty="0">
                 <a:solidFill>
                   <a:srgbClr val="1E293B"/>
                 </a:solidFill>
@@ -1945,51 +3397,22 @@
                 <a:ea typeface="Calibri" pitchFamily="34" charset="-122"/>
                 <a:cs typeface="Calibri" pitchFamily="34" charset="-120"/>
               </a:rPr>
-              <a:t>spaCy is general-purpose. scispaCy adds biomedical training. medspaCy adds clinical context - negation, family history, hypothetical statements.</a:t>
-            </a:r>
-            <a:endParaRPr lang="en-US" sz="1350" dirty="0"/>
-          </a:p>
-        </p:txBody>
-      </p:sp>
-      <p:sp>
-        <p:nvSpPr>
-          <p:cNvPr id="12" name="Shape 8"/>
+              <a:t>254 entities found (needed 15 custom target rules first). Of these, 58 were flagged as negated - catching findings spaCy and scispaCy can't tell apart from a positive mention.</a:t>
+            </a:r>
+            <a:endParaRPr lang="en-US" sz="1400" dirty="0"/>
+          </a:p>
+        </p:txBody>
+      </p:sp>
+      <p:sp>
+        <p:nvSpPr>
+          <p:cNvPr id="11" name="Text 8"/>
           <p:cNvSpPr/>
           <p:nvPr/>
         </p:nvSpPr>
         <p:spPr>
           <a:xfrm>
-            <a:off x="8229600" y="1874520"/>
-            <a:ext cx="3520440" cy="3200400"/>
-          </a:xfrm>
-          <a:prstGeom prst="roundRect">
-            <a:avLst>
-              <a:gd name="adj" fmla="val 2286"/>
-            </a:avLst>
-          </a:prstGeom>
-          <a:solidFill>
-            <a:srgbClr val="FFFFFF"/>
-          </a:solidFill>
-          <a:ln/>
-          <a:effectLst>
-            <a:outerShdw blurRad="101600" dist="38100" dir="5400000" algn="bl" rotWithShape="0">
-              <a:srgbClr val="000000">
-                <a:alpha val="10000"/>
-              </a:srgbClr>
-            </a:outerShdw>
-          </a:effectLst>
-        </p:spPr>
-      </p:sp>
-      <p:sp>
-        <p:nvSpPr>
-          <p:cNvPr id="14" name="Text 9"/>
-          <p:cNvSpPr/>
-          <p:nvPr/>
-        </p:nvSpPr>
-        <p:spPr>
-          <a:xfrm>
-            <a:off x="8503920" y="2788920"/>
-            <a:ext cx="2971800" cy="548640"/>
+            <a:off x="6995160" y="4709160"/>
+            <a:ext cx="4343400" cy="1097280"/>
           </a:xfrm>
           <a:prstGeom prst="rect">
             <a:avLst/>
@@ -1998,37 +3421,37 @@
           <a:ln/>
         </p:spPr>
         <p:txBody>
-          <a:bodyPr wrap="square" rtlCol="0" anchor="ctr"/>
+          <a:bodyPr wrap="square" rtlCol="0" anchor="t"/>
           <a:lstStyle/>
           <a:p>
             <a:pPr marL="0" indent="0">
               <a:buNone/>
             </a:pPr>
             <a:r>
-              <a:rPr lang="en-US" sz="1600" b="1" dirty="0">
-                <a:solidFill>
-                  <a:srgbClr val="028090"/>
+              <a:rPr lang="en-US" sz="1250" dirty="0">
+                <a:solidFill>
+                  <a:srgbClr val="64748B"/>
                 </a:solidFill>
                 <a:latin typeface="Calibri" pitchFamily="34" charset="0"/>
                 <a:ea typeface="Calibri" pitchFamily="34" charset="-122"/>
                 <a:cs typeface="Calibri" pitchFamily="34" charset="-120"/>
               </a:rPr>
-              <a:t>Why This Matters</a:t>
-            </a:r>
-            <a:endParaRPr lang="en-US" sz="1600" dirty="0"/>
-          </a:p>
-        </p:txBody>
-      </p:sp>
-      <p:sp>
-        <p:nvSpPr>
-          <p:cNvPr id="15" name="Text 10"/>
+              <a:t>Word2vec vocabulary size: 2,386 words</a:t>
+            </a:r>
+            <a:endParaRPr lang="en-US" sz="1250" dirty="0"/>
+          </a:p>
+        </p:txBody>
+      </p:sp>
+      <p:sp>
+        <p:nvSpPr>
+          <p:cNvPr id="12" name="Text 9"/>
           <p:cNvSpPr/>
           <p:nvPr/>
         </p:nvSpPr>
         <p:spPr>
           <a:xfrm>
-            <a:off x="8503920" y="3337560"/>
-            <a:ext cx="2971800" cy="1463040"/>
+            <a:off x="548640" y="6355080"/>
+            <a:ext cx="10972800" cy="320040"/>
           </a:xfrm>
           <a:prstGeom prst="rect">
             <a:avLst/>
@@ -2037,30 +3460,30 @@
           <a:ln/>
         </p:spPr>
         <p:txBody>
-          <a:bodyPr wrap="square" rtlCol="0" anchor="t"/>
+          <a:bodyPr wrap="square" rtlCol="0" anchor="ctr"/>
           <a:lstStyle/>
           <a:p>
             <a:pPr marL="0" indent="0">
               <a:buNone/>
             </a:pPr>
             <a:r>
-              <a:rPr lang="en-US" sz="1350" dirty="0">
-                <a:solidFill>
-                  <a:srgbClr val="1E293B"/>
+              <a:rPr lang="en-US" sz="1100" dirty="0">
+                <a:solidFill>
+                  <a:srgbClr val="64748B"/>
                 </a:solidFill>
                 <a:latin typeface="Calibri" pitchFamily="34" charset="0"/>
                 <a:ea typeface="Calibri" pitchFamily="34" charset="-122"/>
                 <a:cs typeface="Calibri" pitchFamily="34" charset="-120"/>
               </a:rPr>
-              <a:t>Choosing the right NLP tool changes what information you can reliably pull out of real patient notes.</a:t>
-            </a:r>
-            <a:endParaRPr lang="en-US" sz="1350" dirty="0"/>
-          </a:p>
-        </p:txBody>
-      </p:sp>
-      <p:sp>
-        <p:nvSpPr>
-          <p:cNvPr id="17" name="Text 12"/>
+              <a:t>Package: medspaCy  |  Output: entity + negation/context flags, word2vec, tuned t-SNE plot</a:t>
+            </a:r>
+            <a:endParaRPr lang="en-US" sz="1100" dirty="0"/>
+          </a:p>
+        </p:txBody>
+      </p:sp>
+      <p:sp>
+        <p:nvSpPr>
+          <p:cNvPr id="13" name="Text 10"/>
           <p:cNvSpPr/>
           <p:nvPr/>
         </p:nvSpPr>
@@ -2091,7 +3514,7 @@
                 <a:ea typeface="Calibri" pitchFamily="34" charset="-122"/>
                 <a:cs typeface="Calibri" pitchFamily="34" charset="-120"/>
               </a:rPr>
-              <a:t>2</a:t>
+              <a:t>10</a:t>
             </a:r>
             <a:endParaRPr lang="en-US" sz="1000" dirty="0"/>
           </a:p>
@@ -2105,9 +3528,9 @@
 </p:sld>
 </file>
 
-<file path=ppt/slides/slide3.xml><?xml version="1.0" encoding="utf-8"?>
+<file path=ppt/slides/slide11.xml><?xml version="1.0" encoding="utf-8"?>
 <p:sld xmlns:a="http://schemas.openxmlformats.org/drawingml/2006/main" xmlns:r="http://schemas.openxmlformats.org/officeDocument/2006/relationships" xmlns:p="http://schemas.openxmlformats.org/presentationml/2006/main">
-  <p:cSld name="Slide 3">
+  <p:cSld name="Slide 11">
     <p:bg>
       <p:bgPr>
         <a:solidFill>
@@ -2163,7 +3586,7 @@
                 <a:ea typeface="Calibri" pitchFamily="34" charset="-122"/>
                 <a:cs typeface="Calibri" pitchFamily="34" charset="-120"/>
               </a:rPr>
-              <a:t>SETUP</a:t>
+              <a:t>TOOL 3 OF 3</a:t>
             </a:r>
             <a:endParaRPr lang="en-US" sz="1300" dirty="0"/>
           </a:p>
@@ -2177,8 +3600,8 @@
         </p:nvSpPr>
         <p:spPr>
           <a:xfrm>
-            <a:off x="548640" y="868680"/>
-            <a:ext cx="10972800" cy="640080"/>
+            <a:off x="548640" y="457200"/>
+            <a:ext cx="10972800" cy="548640"/>
           </a:xfrm>
           <a:prstGeom prst="rect">
             <a:avLst/>
@@ -2187,24 +3610,46 @@
           <a:ln/>
         </p:spPr>
         <p:txBody>
-          <a:bodyPr wrap="square" rtlCol="0" anchor="ctr"/>
-          <a:lstStyle/>
-          <a:p>
-            <a:pPr marL="0" indent="0">
-              <a:buNone/>
-            </a:pPr>
-            <a:r>
-              <a:rPr lang="en-US" sz="3000" b="1" dirty="0">
+          <a:bodyPr wrap="square" lIns="91440" tIns="45720" rIns="91440" bIns="45720" rtlCol="0" anchor="ctr"/>
+          <a:lstStyle/>
+          <a:p>
+            <a:r>
+              <a:rPr lang="en-US" sz="2600" b="1" dirty="0">
                 <a:solidFill>
                   <a:srgbClr val="1E293B"/>
                 </a:solidFill>
-                <a:latin typeface="Cambria" pitchFamily="34" charset="0"/>
-                <a:ea typeface="Cambria" pitchFamily="34" charset="-122"/>
+                <a:latin typeface="Cambria"/>
+                <a:ea typeface="Cambria"/>
                 <a:cs typeface="Cambria" pitchFamily="34" charset="-120"/>
               </a:rPr>
-              <a:t>How the Pipeline Is Structured</a:t>
-            </a:r>
-            <a:endParaRPr lang="en-US" sz="3000" dirty="0"/>
+              <a:t>     </a:t>
+            </a:r>
+            <a:r>
+              <a:rPr lang="en-US" sz="2600" b="1" dirty="0" err="1">
+                <a:solidFill>
+                  <a:srgbClr val="1E293B"/>
+                </a:solidFill>
+                <a:latin typeface="Cambria"/>
+                <a:ea typeface="Cambria"/>
+                <a:cs typeface="Cambria" pitchFamily="34" charset="-120"/>
+              </a:rPr>
+              <a:t>medspaCy</a:t>
+            </a:r>
+            <a:r>
+              <a:rPr lang="en-US" sz="2600" b="1" dirty="0">
+                <a:solidFill>
+                  <a:srgbClr val="1E293B"/>
+                </a:solidFill>
+                <a:latin typeface="Cambria"/>
+                <a:ea typeface="Cambria"/>
+                <a:cs typeface="Cambria" pitchFamily="34" charset="-120"/>
+              </a:rPr>
+              <a:t> — Extracted Entities &amp; word2vec</a:t>
+            </a:r>
+            <a:endParaRPr lang="en-US" sz="2600" dirty="0">
+              <a:latin typeface="Cambria"/>
+              <a:ea typeface="Cambria"/>
+            </a:endParaRPr>
           </a:p>
         </p:txBody>
       </p:sp>
@@ -2216,12 +3661,12 @@
         </p:nvSpPr>
         <p:spPr>
           <a:xfrm>
-            <a:off x="548640" y="1828800"/>
-            <a:ext cx="5394960" cy="4160520"/>
+            <a:off x="548640" y="1234440"/>
+            <a:ext cx="6949440" cy="5074920"/>
           </a:xfrm>
           <a:prstGeom prst="roundRect">
             <a:avLst>
-              <a:gd name="adj" fmla="val 1758"/>
+              <a:gd name="adj" fmla="val 1441"/>
             </a:avLst>
           </a:prstGeom>
           <a:solidFill>
@@ -2239,14 +3684,14 @@
       </p:sp>
       <p:sp>
         <p:nvSpPr>
-          <p:cNvPr id="6" name="Text 3"/>
+          <p:cNvPr id="5" name="Text 3"/>
           <p:cNvSpPr/>
           <p:nvPr/>
         </p:nvSpPr>
         <p:spPr>
           <a:xfrm>
-            <a:off x="1463040" y="2121408"/>
-            <a:ext cx="4206240" cy="457200"/>
+            <a:off x="868680" y="1417320"/>
+            <a:ext cx="6400800" cy="365760"/>
           </a:xfrm>
           <a:prstGeom prst="rect">
             <a:avLst/>
@@ -2262,7 +3707,7 @@
               <a:buNone/>
             </a:pPr>
             <a:r>
-              <a:rPr lang="en-US" sz="1700" b="1" dirty="0">
+              <a:rPr lang="en-US" sz="1500" b="1" dirty="0">
                 <a:solidFill>
                   <a:srgbClr val="028090"/>
                 </a:solidFill>
@@ -2270,22 +3715,22 @@
                 <a:ea typeface="Calibri" pitchFamily="34" charset="-122"/>
                 <a:cs typeface="Calibri" pitchFamily="34" charset="-120"/>
               </a:rPr>
-              <a:t>Cohort &amp; Data Source</a:t>
-            </a:r>
-            <a:endParaRPr lang="en-US" sz="1700" dirty="0"/>
-          </a:p>
-        </p:txBody>
-      </p:sp>
-      <p:sp>
-        <p:nvSpPr>
-          <p:cNvPr id="7" name="Text 4"/>
+              <a:t>Extracted Entities (by label)</a:t>
+            </a:r>
+            <a:endParaRPr lang="en-US" sz="1500" dirty="0"/>
+          </a:p>
+        </p:txBody>
+      </p:sp>
+      <p:sp>
+        <p:nvSpPr>
+          <p:cNvPr id="6" name="Text 4"/>
           <p:cNvSpPr/>
           <p:nvPr/>
         </p:nvSpPr>
         <p:spPr>
           <a:xfrm>
-            <a:off x="868680" y="2743200"/>
-            <a:ext cx="4754880" cy="3108960"/>
+            <a:off x="868680" y="1755648"/>
+            <a:ext cx="6400800" cy="274320"/>
           </a:xfrm>
           <a:prstGeom prst="rect">
             <a:avLst/>
@@ -2294,136 +3739,43 @@
           <a:ln/>
         </p:spPr>
         <p:txBody>
-          <a:bodyPr wrap="square" lIns="91440" tIns="45720" rIns="91440" bIns="45720" rtlCol="0" anchor="t"/>
-          <a:lstStyle/>
-          <a:p>
-            <a:pPr marL="342900" indent="-342900">
-              <a:spcAft>
-                <a:spcPts val="1000"/>
-              </a:spcAft>
-              <a:buSzPct val="100000"/>
-              <a:buChar char="•"/>
-            </a:pPr>
-            <a:r>
-              <a:rPr lang="en-US" sz="1400" dirty="0">
-                <a:solidFill>
-                  <a:srgbClr val="1E293B"/>
-                </a:solidFill>
-                <a:latin typeface="Calibri"/>
-                <a:ea typeface="Calibri"/>
-                <a:cs typeface="Calibri"/>
-              </a:rPr>
-              <a:t>Data pulled from Google </a:t>
-            </a:r>
-            <a:r>
-              <a:rPr lang="en-US" sz="1400" dirty="0" err="1">
-                <a:solidFill>
-                  <a:srgbClr val="1E293B"/>
-                </a:solidFill>
-                <a:latin typeface="Calibri"/>
-                <a:ea typeface="Calibri"/>
-                <a:cs typeface="Calibri"/>
-              </a:rPr>
-              <a:t>BigQuery</a:t>
-            </a:r>
-            <a:r>
-              <a:rPr lang="en-US" sz="1400" dirty="0">
-                <a:solidFill>
-                  <a:srgbClr val="1E293B"/>
-                </a:solidFill>
-                <a:latin typeface="Calibri"/>
-                <a:ea typeface="Calibri"/>
-                <a:cs typeface="Calibri"/>
-              </a:rPr>
-              <a:t> (MIMIC-III public dataset)</a:t>
-            </a:r>
-            <a:endParaRPr lang="en-US" sz="1400" dirty="0">
-              <a:latin typeface="Calibri"/>
-              <a:ea typeface="Calibri"/>
-              <a:cs typeface="Calibri"/>
-            </a:endParaRPr>
-          </a:p>
-          <a:p>
-            <a:pPr marL="342900" indent="-342900">
-              <a:spcAft>
-                <a:spcPts val="1000"/>
-              </a:spcAft>
-              <a:buSzPct val="100000"/>
-              <a:buChar char="•"/>
-            </a:pPr>
-            <a:r>
-              <a:rPr lang="en-US" sz="1400" dirty="0">
-                <a:solidFill>
-                  <a:srgbClr val="1E293B"/>
+          <a:bodyPr wrap="square" rtlCol="0" anchor="ctr"/>
+          <a:lstStyle/>
+          <a:p>
+            <a:pPr marL="0" indent="0">
+              <a:buNone/>
+            </a:pPr>
+            <a:r>
+              <a:rPr lang="en-US" sz="1150" i="1" dirty="0">
+                <a:solidFill>
+                  <a:srgbClr val="64748B"/>
                 </a:solidFill>
                 <a:latin typeface="Calibri" pitchFamily="34" charset="0"/>
                 <a:ea typeface="Calibri" pitchFamily="34" charset="-122"/>
                 <a:cs typeface="Calibri" pitchFamily="34" charset="-120"/>
               </a:rPr>
-              <a:t>Cohort: patients with ICD-9 code 430 (subarachnoid hemorrhage)</a:t>
-            </a:r>
-            <a:endParaRPr lang="en-US" sz="1400" dirty="0"/>
-          </a:p>
-          <a:p>
-            <a:pPr marL="342900" indent="-342900">
-              <a:spcAft>
-                <a:spcPts val="1000"/>
-              </a:spcAft>
-              <a:buSzPct val="100000"/>
-              <a:buChar char="•"/>
-            </a:pPr>
-            <a:r>
-              <a:rPr lang="en-US" sz="1400" dirty="0">
-                <a:solidFill>
-                  <a:srgbClr val="1E293B"/>
-                </a:solidFill>
-                <a:latin typeface="Calibri" pitchFamily="34" charset="0"/>
-                <a:ea typeface="Calibri" pitchFamily="34" charset="-122"/>
-                <a:cs typeface="Calibri" pitchFamily="34" charset="-120"/>
-              </a:rPr>
-              <a:t>Note type: Discharge summaries only</a:t>
-            </a:r>
-            <a:endParaRPr lang="en-US" sz="1400" dirty="0"/>
-          </a:p>
-          <a:p>
-            <a:pPr marL="342900" indent="-342900">
-              <a:spcAft>
-                <a:spcPts val="1000"/>
-              </a:spcAft>
-              <a:buSzPct val="100000"/>
-              <a:buChar char="•"/>
-            </a:pPr>
-            <a:r>
-              <a:rPr lang="en-US" sz="1400" dirty="0">
-                <a:solidFill>
-                  <a:srgbClr val="1E293B"/>
-                </a:solidFill>
-                <a:latin typeface="Calibri" pitchFamily="34" charset="0"/>
-                <a:ea typeface="Calibri" pitchFamily="34" charset="-122"/>
-                <a:cs typeface="Calibri" pitchFamily="34" charset="-120"/>
-              </a:rPr>
-              <a:t>888 matching notes found; a smaller sample used for processing speed</a:t>
-            </a:r>
-            <a:endParaRPr lang="en-US" sz="1400" dirty="0"/>
-          </a:p>
-          <a:p>
-            <a:pPr marL="342900" indent="-342900">
-              <a:spcAft>
-                <a:spcPts val="1000"/>
-              </a:spcAft>
-              <a:buSzPct val="100000"/>
-              <a:buChar char="•"/>
-            </a:pPr>
-            <a:endParaRPr lang="en-US" sz="1400" dirty="0">
-              <a:solidFill>
-                <a:srgbClr val="1E293B"/>
-              </a:solidFill>
-              <a:ea typeface="Calibri"/>
-              <a:cs typeface="Calibri"/>
-            </a:endParaRPr>
-          </a:p>
-        </p:txBody>
-      </p:sp>
+              <a:t>Examples: "hemorrhage" -&gt; CONDITION, negated=True; "headache" -&gt; SYMPTOM, negated=False</a:t>
+            </a:r>
+            <a:endParaRPr lang="en-US" sz="1150" dirty="0"/>
+          </a:p>
+        </p:txBody>
+      </p:sp>
+      <p:graphicFrame>
+        <p:nvGraphicFramePr>
+          <p:cNvPr id="7" name="Chart 0"/>
+          <p:cNvGraphicFramePr/>
+          <p:nvPr/>
+        </p:nvGraphicFramePr>
+        <p:xfrm>
+          <a:off x="777240" y="2103120"/>
+          <a:ext cx="6400800" cy="4023360"/>
+        </p:xfrm>
+        <a:graphic>
+          <a:graphicData uri="http://schemas.openxmlformats.org/drawingml/2006/chart">
+            <c:chart xmlns:c="http://schemas.openxmlformats.org/drawingml/2006/chart" xmlns:r="http://schemas.openxmlformats.org/officeDocument/2006/relationships" r:id="rId3"/>
+          </a:graphicData>
+        </a:graphic>
+      </p:graphicFrame>
       <p:sp>
         <p:nvSpPr>
           <p:cNvPr id="8" name="Shape 5"/>
@@ -2432,16 +3784,16 @@
         </p:nvSpPr>
         <p:spPr>
           <a:xfrm>
-            <a:off x="6217920" y="1828800"/>
-            <a:ext cx="5394960" cy="4160520"/>
+            <a:off x="7680960" y="1234440"/>
+            <a:ext cx="3931920" cy="5074920"/>
           </a:xfrm>
           <a:prstGeom prst="roundRect">
             <a:avLst>
-              <a:gd name="adj" fmla="val 1758"/>
+              <a:gd name="adj" fmla="val 1860"/>
             </a:avLst>
           </a:prstGeom>
           <a:solidFill>
-            <a:srgbClr val="FFFFFF"/>
+            <a:srgbClr val="EAFBF6"/>
           </a:solidFill>
           <a:ln/>
           <a:effectLst>
@@ -2455,14 +3807,14 @@
       </p:sp>
       <p:sp>
         <p:nvSpPr>
-          <p:cNvPr id="10" name="Text 6"/>
+          <p:cNvPr id="9" name="Text 6"/>
           <p:cNvSpPr/>
           <p:nvPr/>
         </p:nvSpPr>
         <p:spPr>
           <a:xfrm>
-            <a:off x="7132320" y="2121408"/>
-            <a:ext cx="4206240" cy="457200"/>
+            <a:off x="7955280" y="1417320"/>
+            <a:ext cx="3383280" cy="365760"/>
           </a:xfrm>
           <a:prstGeom prst="rect">
             <a:avLst/>
@@ -2478,7 +3830,7 @@
               <a:buNone/>
             </a:pPr>
             <a:r>
-              <a:rPr lang="en-US" sz="1700" b="1" dirty="0">
+              <a:rPr lang="en-US" sz="1500" b="1" dirty="0">
                 <a:solidFill>
                   <a:srgbClr val="028090"/>
                 </a:solidFill>
@@ -2486,22 +3838,22 @@
                 <a:ea typeface="Calibri" pitchFamily="34" charset="-122"/>
                 <a:cs typeface="Calibri" pitchFamily="34" charset="-120"/>
               </a:rPr>
-              <a:t>What Each Tool Does</a:t>
-            </a:r>
-            <a:endParaRPr lang="en-US" sz="1700" dirty="0"/>
-          </a:p>
-        </p:txBody>
-      </p:sp>
-      <p:sp>
-        <p:nvSpPr>
-          <p:cNvPr id="11" name="Text 7"/>
+              <a:t>word2vec Embeddings</a:t>
+            </a:r>
+            <a:endParaRPr lang="en-US" sz="1500" dirty="0"/>
+          </a:p>
+        </p:txBody>
+      </p:sp>
+      <p:sp>
+        <p:nvSpPr>
+          <p:cNvPr id="10" name="Text 7"/>
           <p:cNvSpPr/>
           <p:nvPr/>
         </p:nvSpPr>
         <p:spPr>
           <a:xfrm>
-            <a:off x="6537960" y="2743200"/>
-            <a:ext cx="4754880" cy="3108960"/>
+            <a:off x="7955280" y="2011680"/>
+            <a:ext cx="3383280" cy="914400"/>
           </a:xfrm>
           <a:prstGeom prst="rect">
             <a:avLst/>
@@ -2510,18 +3862,96 @@
           <a:ln/>
         </p:spPr>
         <p:txBody>
+          <a:bodyPr wrap="square" rtlCol="0" anchor="ctr"/>
+          <a:lstStyle/>
+          <a:p>
+            <a:pPr marL="0" indent="0">
+              <a:buNone/>
+            </a:pPr>
+            <a:r>
+              <a:rPr lang="en-US" sz="5600" b="1" dirty="0">
+                <a:solidFill>
+                  <a:srgbClr val="0F766E"/>
+                </a:solidFill>
+                <a:latin typeface="Calibri" pitchFamily="34" charset="0"/>
+                <a:ea typeface="Calibri" pitchFamily="34" charset="-122"/>
+                <a:cs typeface="Calibri" pitchFamily="34" charset="-120"/>
+              </a:rPr>
+              <a:t>2,386</a:t>
+            </a:r>
+            <a:endParaRPr lang="en-US" sz="5600" dirty="0"/>
+          </a:p>
+        </p:txBody>
+      </p:sp>
+      <p:sp>
+        <p:nvSpPr>
+          <p:cNvPr id="11" name="Text 8"/>
+          <p:cNvSpPr/>
+          <p:nvPr/>
+        </p:nvSpPr>
+        <p:spPr>
+          <a:xfrm>
+            <a:off x="7955280" y="2880360"/>
+            <a:ext cx="3383280" cy="365760"/>
+          </a:xfrm>
+          <a:prstGeom prst="rect">
+            <a:avLst/>
+          </a:prstGeom>
+          <a:noFill/>
+          <a:ln/>
+        </p:spPr>
+        <p:txBody>
+          <a:bodyPr wrap="square" rtlCol="0" anchor="ctr"/>
+          <a:lstStyle/>
+          <a:p>
+            <a:pPr marL="0" indent="0">
+              <a:buNone/>
+            </a:pPr>
+            <a:r>
+              <a:rPr lang="en-US" sz="1300" dirty="0">
+                <a:solidFill>
+                  <a:srgbClr val="64748B"/>
+                </a:solidFill>
+                <a:latin typeface="Calibri" pitchFamily="34" charset="0"/>
+                <a:ea typeface="Calibri" pitchFamily="34" charset="-122"/>
+                <a:cs typeface="Calibri" pitchFamily="34" charset="-120"/>
+              </a:rPr>
+              <a:t>vocabulary words learned</a:t>
+            </a:r>
+            <a:endParaRPr lang="en-US" sz="1300" dirty="0"/>
+          </a:p>
+        </p:txBody>
+      </p:sp>
+      <p:sp>
+        <p:nvSpPr>
+          <p:cNvPr id="12" name="Text 9"/>
+          <p:cNvSpPr/>
+          <p:nvPr/>
+        </p:nvSpPr>
+        <p:spPr>
+          <a:xfrm>
+            <a:off x="7955280" y="3429000"/>
+            <a:ext cx="3383280" cy="2651760"/>
+          </a:xfrm>
+          <a:prstGeom prst="rect">
+            <a:avLst/>
+          </a:prstGeom>
+          <a:noFill/>
+          <a:ln/>
+        </p:spPr>
+        <p:txBody>
           <a:bodyPr wrap="square" rtlCol="0" anchor="t"/>
           <a:lstStyle/>
           <a:p>
             <a:pPr marL="342900" indent="-342900">
               <a:spcAft>
-                <a:spcPts val="1000"/>
+                <a:spcPts val="800"/>
               </a:spcAft>
               <a:buSzPct val="100000"/>
               <a:buChar char="•"/>
             </a:pPr>
             <a:r>
-              <a:rPr lang="en-US" sz="1400" dirty="0">
+              <a:rPr lang="en-US" sz="1250" dirty="0">
                 <a:solidFill>
                   <a:srgbClr val="1E293B"/>
                 </a:solidFill>
@@ -2529,20 +3959,20 @@
                 <a:ea typeface="Calibri" pitchFamily="34" charset="-122"/>
                 <a:cs typeface="Calibri" pitchFamily="34" charset="-120"/>
               </a:rPr>
-              <a:t>Entity extraction: find clinical terms in the text</a:t>
-            </a:r>
-            <a:endParaRPr lang="en-US" sz="1400" dirty="0"/>
+              <a:t>Vector size: 100 dimensions</a:t>
+            </a:r>
+            <a:endParaRPr lang="en-US" sz="1250" dirty="0"/>
           </a:p>
           <a:p>
             <a:pPr marL="342900" indent="-342900">
               <a:spcAft>
-                <a:spcPts val="1000"/>
+                <a:spcPts val="800"/>
               </a:spcAft>
               <a:buSzPct val="100000"/>
               <a:buChar char="•"/>
             </a:pPr>
             <a:r>
-              <a:rPr lang="en-US" sz="1400" dirty="0">
+              <a:rPr lang="en-US" sz="1250" dirty="0">
                 <a:solidFill>
                   <a:srgbClr val="1E293B"/>
                 </a:solidFill>
@@ -2550,20 +3980,20 @@
                 <a:ea typeface="Calibri" pitchFamily="34" charset="-122"/>
                 <a:cs typeface="Calibri" pitchFamily="34" charset="-120"/>
               </a:rPr>
-              <a:t>word2vec: turn words into number vectors based on context</a:t>
-            </a:r>
-            <a:endParaRPr lang="en-US" sz="1400" dirty="0"/>
+              <a:t>Window: 5 words of context</a:t>
+            </a:r>
+            <a:endParaRPr lang="en-US" sz="1250" dirty="0"/>
           </a:p>
           <a:p>
             <a:pPr marL="342900" indent="-342900">
               <a:spcAft>
-                <a:spcPts val="1000"/>
+                <a:spcPts val="800"/>
               </a:spcAft>
               <a:buSzPct val="100000"/>
               <a:buChar char="•"/>
             </a:pPr>
             <a:r>
-              <a:rPr lang="en-US" sz="1400" dirty="0">
+              <a:rPr lang="en-US" sz="1250" dirty="0">
                 <a:solidFill>
                   <a:srgbClr val="1E293B"/>
                 </a:solidFill>
@@ -2571,20 +4001,20 @@
                 <a:ea typeface="Calibri" pitchFamily="34" charset="-122"/>
                 <a:cs typeface="Calibri" pitchFamily="34" charset="-120"/>
               </a:rPr>
-              <a:t>t-SNE: compress those vectors down to 2D so we can plot and compare them</a:t>
-            </a:r>
-            <a:endParaRPr lang="en-US" sz="1400" dirty="0"/>
+              <a:t>Min count: 2 occurrences</a:t>
+            </a:r>
+            <a:endParaRPr lang="en-US" sz="1250" dirty="0"/>
           </a:p>
           <a:p>
             <a:pPr marL="342900" indent="-342900">
               <a:spcAft>
-                <a:spcPts val="1000"/>
+                <a:spcPts val="800"/>
               </a:spcAft>
               <a:buSzPct val="100000"/>
               <a:buChar char="•"/>
             </a:pPr>
             <a:r>
-              <a:rPr lang="en-US" sz="1400" dirty="0">
+              <a:rPr lang="en-US" sz="1250" dirty="0">
                 <a:solidFill>
                   <a:srgbClr val="1E293B"/>
                 </a:solidFill>
@@ -2592,15 +4022,15 @@
                 <a:ea typeface="Calibri" pitchFamily="34" charset="-122"/>
                 <a:cs typeface="Calibri" pitchFamily="34" charset="-120"/>
               </a:rPr>
-              <a:t>Same steps run for spaCy, scispaCy, and medspaCy on the same notes</a:t>
-            </a:r>
-            <a:endParaRPr lang="en-US" sz="1400" dirty="0"/>
-          </a:p>
-        </p:txBody>
-      </p:sp>
-      <p:sp>
-        <p:nvSpPr>
-          <p:cNvPr id="12" name="Text 8"/>
+              <a:t>Trained on: tokenized note text from this tool's pipeline</a:t>
+            </a:r>
+            <a:endParaRPr lang="en-US" sz="1250" dirty="0"/>
+          </a:p>
+        </p:txBody>
+      </p:sp>
+      <p:sp>
+        <p:nvSpPr>
+          <p:cNvPr id="13" name="Text 10"/>
           <p:cNvSpPr/>
           <p:nvPr/>
         </p:nvSpPr>
@@ -2631,7 +4061,7 @@
                 <a:ea typeface="Calibri" pitchFamily="34" charset="-122"/>
                 <a:cs typeface="Calibri" pitchFamily="34" charset="-120"/>
               </a:rPr>
-              <a:t>3</a:t>
+              <a:t>11</a:t>
             </a:r>
             <a:endParaRPr lang="en-US" sz="1000" dirty="0"/>
           </a:p>
@@ -2645,9 +4075,9 @@
 </p:sld>
 </file>
 
-<file path=ppt/slides/slide4.xml><?xml version="1.0" encoding="utf-8"?>
+<file path=ppt/slides/slide12.xml><?xml version="1.0" encoding="utf-8"?>
 <p:sld xmlns:a="http://schemas.openxmlformats.org/drawingml/2006/main" xmlns:r="http://schemas.openxmlformats.org/officeDocument/2006/relationships" xmlns:p="http://schemas.openxmlformats.org/presentationml/2006/main">
-  <p:cSld name="Slide 4">
+  <p:cSld name="Slide 12">
     <p:bg>
       <p:bgPr>
         <a:solidFill>
@@ -2703,7 +4133,7 @@
                 <a:ea typeface="Calibri" pitchFamily="34" charset="-122"/>
                 <a:cs typeface="Calibri" pitchFamily="34" charset="-120"/>
               </a:rPr>
-              <a:t>TOOL 1 OF 3</a:t>
+              <a:t>TOOL 3 OF 3</a:t>
             </a:r>
             <a:endParaRPr lang="en-US" sz="1300" dirty="0"/>
           </a:p>
@@ -2717,8 +4147,8 @@
         </p:nvSpPr>
         <p:spPr>
           <a:xfrm>
-            <a:off x="548640" y="868680"/>
-            <a:ext cx="10972800" cy="548640"/>
+            <a:off x="548640" y="457200"/>
+            <a:ext cx="10972800" cy="502920"/>
           </a:xfrm>
           <a:prstGeom prst="rect">
             <a:avLst/>
@@ -2727,6 +4157,67 @@
           <a:ln/>
         </p:spPr>
         <p:txBody>
+          <a:bodyPr wrap="square" lIns="91440" tIns="45720" rIns="91440" bIns="45720" rtlCol="0" anchor="ctr"/>
+          <a:lstStyle/>
+          <a:p>
+            <a:r>
+              <a:rPr lang="en-US" sz="2600" b="1" dirty="0">
+                <a:solidFill>
+                  <a:srgbClr val="1E293B"/>
+                </a:solidFill>
+                <a:latin typeface="Cambria"/>
+                <a:ea typeface="Cambria"/>
+                <a:cs typeface="Cambria" pitchFamily="34" charset="-120"/>
+              </a:rPr>
+              <a:t>    </a:t>
+            </a:r>
+            <a:r>
+              <a:rPr lang="en-US" sz="2600" b="1">
+                <a:solidFill>
+                  <a:srgbClr val="1E293B"/>
+                </a:solidFill>
+                <a:latin typeface="Cambria"/>
+                <a:ea typeface="Cambria"/>
+                <a:cs typeface="Cambria" pitchFamily="34" charset="-120"/>
+              </a:rPr>
+              <a:t>   </a:t>
+            </a:r>
+            <a:r>
+              <a:rPr lang="en-US" sz="2600" b="1" dirty="0">
+                <a:solidFill>
+                  <a:srgbClr val="1E293B"/>
+                </a:solidFill>
+                <a:latin typeface="Cambria"/>
+                <a:ea typeface="Cambria"/>
+                <a:cs typeface="Cambria" pitchFamily="34" charset="-120"/>
+              </a:rPr>
+              <a:t>medspaCy — Tuned t-SNE Plot</a:t>
+            </a:r>
+            <a:endParaRPr lang="en-US" sz="2600" dirty="0">
+              <a:latin typeface="Cambria"/>
+              <a:ea typeface="Cambria"/>
+            </a:endParaRPr>
+          </a:p>
+        </p:txBody>
+      </p:sp>
+      <p:sp>
+        <p:nvSpPr>
+          <p:cNvPr id="4" name="Text 2"/>
+          <p:cNvSpPr/>
+          <p:nvPr/>
+        </p:nvSpPr>
+        <p:spPr>
+          <a:xfrm>
+            <a:off x="548640" y="960120"/>
+            <a:ext cx="10972800" cy="365760"/>
+          </a:xfrm>
+          <a:prstGeom prst="rect">
+            <a:avLst/>
+          </a:prstGeom>
+          <a:noFill/>
+          <a:ln/>
+        </p:spPr>
+        <p:txBody>
           <a:bodyPr wrap="square" rtlCol="0" anchor="ctr"/>
           <a:lstStyle/>
           <a:p>
@@ -2734,17 +4225,17 @@
               <a:buNone/>
             </a:pPr>
             <a:r>
-              <a:rPr lang="en-US" sz="2800" b="1" dirty="0">
-                <a:solidFill>
-                  <a:srgbClr val="1E293B"/>
-                </a:solidFill>
-                <a:latin typeface="Cambria" pitchFamily="34" charset="0"/>
-                <a:ea typeface="Cambria" pitchFamily="34" charset="-122"/>
-                <a:cs typeface="Cambria" pitchFamily="34" charset="-120"/>
-              </a:rPr>
-              <a:t>spaCy — General-Purpose NLP</a:t>
-            </a:r>
-            <a:endParaRPr lang="en-US" sz="2800" dirty="0"/>
+              <a:rPr lang="en-US" sz="1400" i="1" dirty="0">
+                <a:solidFill>
+                  <a:srgbClr val="64748B"/>
+                </a:solidFill>
+                <a:latin typeface="Calibri" pitchFamily="34" charset="0"/>
+                <a:ea typeface="Calibri" pitchFamily="34" charset="-122"/>
+                <a:cs typeface="Calibri" pitchFamily="34" charset="-120"/>
+              </a:rPr>
+              <a:t>word2vec embeddings projected to 2D across four perplexity values</a:t>
+            </a:r>
+            <a:endParaRPr lang="en-US" sz="1400" dirty="0"/>
           </a:p>
         </p:txBody>
       </p:sp>
@@ -2756,12 +4247,12 @@
         </p:nvSpPr>
         <p:spPr>
           <a:xfrm>
-            <a:off x="548640" y="1965960"/>
-            <a:ext cx="5943600" cy="3977640"/>
+            <a:off x="548640" y="1463040"/>
+            <a:ext cx="11064240" cy="4572000"/>
           </a:xfrm>
           <a:prstGeom prst="roundRect">
             <a:avLst>
-              <a:gd name="adj" fmla="val 1839"/>
+              <a:gd name="adj" fmla="val 1600"/>
             </a:avLst>
           </a:prstGeom>
           <a:solidFill>
@@ -2777,331 +4268,105 @@
           </a:effectLst>
         </p:spPr>
       </p:sp>
-      <p:sp>
-        <p:nvSpPr>
-          <p:cNvPr id="6" name="Text 4"/>
-          <p:cNvSpPr/>
-          <p:nvPr/>
-        </p:nvSpPr>
-        <p:spPr>
-          <a:xfrm>
-            <a:off x="868680" y="2240280"/>
-            <a:ext cx="5349240" cy="3474720"/>
+      <p:pic>
+        <p:nvPicPr>
+          <p:cNvPr id="6" name="Image 0" descr="/home/claude/tsne_images/medspacy_tsne.png"/>
+          <p:cNvPicPr>
+            <a:picLocks noChangeAspect="1"/>
+          </p:cNvPicPr>
+          <p:nvPr/>
+        </p:nvPicPr>
+        <p:blipFill>
+          <a:blip r:embed="rId3"/>
+          <a:stretch>
+            <a:fillRect/>
+          </a:stretch>
+        </p:blipFill>
+        <p:spPr>
+          <a:xfrm>
+            <a:off x="822960" y="2492883"/>
+            <a:ext cx="10515600" cy="2329433"/>
           </a:xfrm>
           <a:prstGeom prst="rect">
             <a:avLst/>
           </a:prstGeom>
+        </p:spPr>
+      </p:pic>
+      <p:sp>
+        <p:nvSpPr>
+          <p:cNvPr id="7" name="Text 4"/>
+          <p:cNvSpPr/>
+          <p:nvPr/>
+        </p:nvSpPr>
+        <p:spPr>
+          <a:xfrm>
+            <a:off x="868680" y="5623560"/>
+            <a:ext cx="10424160" cy="365760"/>
+          </a:xfrm>
+          <a:prstGeom prst="rect">
+            <a:avLst/>
+          </a:prstGeom>
           <a:noFill/>
           <a:ln/>
         </p:spPr>
         <p:txBody>
-          <a:bodyPr wrap="square" rtlCol="0" anchor="t"/>
+          <a:bodyPr wrap="square" rtlCol="0" anchor="ctr"/>
           <a:lstStyle/>
           <a:p>
             <a:pPr marL="0" indent="0">
-              <a:spcAft>
-                <a:spcPts val="600"/>
-              </a:spcAft>
               <a:buNone/>
             </a:pPr>
             <a:r>
-              <a:rPr lang="en-US" sz="1400" b="1" dirty="0">
-                <a:solidFill>
-                  <a:srgbClr val="028090"/>
+              <a:rPr lang="en-US" sz="1250" dirty="0">
+                <a:solidFill>
+                  <a:srgbClr val="64748B"/>
                 </a:solidFill>
                 <a:latin typeface="Calibri" pitchFamily="34" charset="0"/>
                 <a:ea typeface="Calibri" pitchFamily="34" charset="-122"/>
                 <a:cs typeface="Calibri" pitchFamily="34" charset="-120"/>
               </a:rPr>
-              <a:t>What it does:</a:t>
-            </a:r>
-            <a:endParaRPr lang="en-US" sz="1400" dirty="0"/>
-          </a:p>
-          <a:p>
-            <a:pPr marL="0" indent="0">
-              <a:spcAft>
-                <a:spcPts val="600"/>
-              </a:spcAft>
+              <a:t>Built from the same token vocabulary as the entity pipeline above, independent of how many entities the target rules matched.</a:t>
+            </a:r>
+            <a:endParaRPr lang="en-US" sz="1250" dirty="0"/>
+          </a:p>
+        </p:txBody>
+      </p:sp>
+      <p:sp>
+        <p:nvSpPr>
+          <p:cNvPr id="8" name="Text 5"/>
+          <p:cNvSpPr/>
+          <p:nvPr/>
+        </p:nvSpPr>
+        <p:spPr>
+          <a:xfrm>
+            <a:off x="10058400" y="6446520"/>
+            <a:ext cx="1828800" cy="274320"/>
+          </a:xfrm>
+          <a:prstGeom prst="rect">
+            <a:avLst/>
+          </a:prstGeom>
+          <a:noFill/>
+          <a:ln/>
+        </p:spPr>
+        <p:txBody>
+          <a:bodyPr wrap="square" rtlCol="0" anchor="ctr"/>
+          <a:lstStyle/>
+          <a:p>
+            <a:pPr marL="0" indent="0" algn="r">
               <a:buNone/>
             </a:pPr>
             <a:r>
-              <a:rPr lang="en-US" sz="1400" dirty="0">
-                <a:solidFill>
-                  <a:srgbClr val="1E293B"/>
+              <a:rPr lang="en-US" sz="1000" dirty="0">
+                <a:solidFill>
+                  <a:srgbClr val="64748B"/>
                 </a:solidFill>
                 <a:latin typeface="Calibri" pitchFamily="34" charset="0"/>
                 <a:ea typeface="Calibri" pitchFamily="34" charset="-122"/>
                 <a:cs typeface="Calibri" pitchFamily="34" charset="-120"/>
               </a:rPr>
-              <a:t>Runs standard named entity recognition (people, places, dates, numbers) plus word2vec and t-SNE on the same notes.</a:t>
-            </a:r>
-            <a:endParaRPr lang="en-US" sz="1400" dirty="0"/>
-          </a:p>
-          <a:p>
-            <a:pPr marL="0" indent="0">
-              <a:spcAft>
-                <a:spcPts val="600"/>
-              </a:spcAft>
-              <a:buNone/>
-            </a:pPr>
-            <a:r>
-              <a:rPr lang="en-US" sz="400" dirty="0">
-                <a:solidFill>
-                  <a:srgbClr val="000000"/>
-                </a:solidFill>
-                <a:latin typeface="Calibri" pitchFamily="34" charset="0"/>
-                <a:ea typeface="Calibri" pitchFamily="34" charset="-122"/>
-                <a:cs typeface="Calibri" pitchFamily="34" charset="-120"/>
-              </a:rPr>
-              <a:t> </a:t>
-            </a:r>
-            <a:endParaRPr lang="en-US" sz="1400" dirty="0"/>
-          </a:p>
-          <a:p>
-            <a:pPr marL="0" indent="0">
-              <a:spcAft>
-                <a:spcPts val="600"/>
-              </a:spcAft>
-              <a:buNone/>
-            </a:pPr>
-            <a:r>
-              <a:rPr lang="en-US" sz="1400" b="1" dirty="0">
-                <a:solidFill>
-                  <a:srgbClr val="028090"/>
-                </a:solidFill>
-                <a:latin typeface="Calibri" pitchFamily="34" charset="0"/>
-                <a:ea typeface="Calibri" pitchFamily="34" charset="-122"/>
-                <a:cs typeface="Calibri" pitchFamily="34" charset="-120"/>
-              </a:rPr>
-              <a:t>Why it matters:</a:t>
-            </a:r>
-            <a:endParaRPr lang="en-US" sz="1400" dirty="0"/>
-          </a:p>
-          <a:p>
-            <a:pPr marL="0" indent="0">
-              <a:spcAft>
-                <a:spcPts val="600"/>
-              </a:spcAft>
-              <a:buNone/>
-            </a:pPr>
-            <a:r>
-              <a:rPr lang="en-US" sz="1400" dirty="0">
-                <a:solidFill>
-                  <a:srgbClr val="1E293B"/>
-                </a:solidFill>
-                <a:latin typeface="Calibri" pitchFamily="34" charset="0"/>
-                <a:ea typeface="Calibri" pitchFamily="34" charset="-122"/>
-                <a:cs typeface="Calibri" pitchFamily="34" charset="-120"/>
-              </a:rPr>
-              <a:t>It's a fair baseline to measure the other two tools against - free of any medical training.</a:t>
-            </a:r>
-            <a:endParaRPr lang="en-US" sz="1400" dirty="0"/>
-          </a:p>
-          <a:p>
-            <a:pPr marL="0" indent="0">
-              <a:spcAft>
-                <a:spcPts val="600"/>
-              </a:spcAft>
-              <a:buNone/>
-            </a:pPr>
-            <a:r>
-              <a:rPr lang="en-US" sz="400" dirty="0">
-                <a:solidFill>
-                  <a:srgbClr val="000000"/>
-                </a:solidFill>
-                <a:latin typeface="Calibri" pitchFamily="34" charset="0"/>
-                <a:ea typeface="Calibri" pitchFamily="34" charset="-122"/>
-                <a:cs typeface="Calibri" pitchFamily="34" charset="-120"/>
-              </a:rPr>
-              <a:t> </a:t>
-            </a:r>
-            <a:endParaRPr lang="en-US" sz="1400" dirty="0"/>
-          </a:p>
-          <a:p>
-            <a:pPr marL="0" indent="0">
-              <a:spcAft>
-                <a:spcPts val="600"/>
-              </a:spcAft>
-              <a:buNone/>
-            </a:pPr>
-            <a:r>
-              <a:rPr lang="en-US" sz="1400" b="1" dirty="0">
-                <a:solidFill>
-                  <a:srgbClr val="028090"/>
-                </a:solidFill>
-                <a:latin typeface="Calibri" pitchFamily="34" charset="0"/>
-                <a:ea typeface="Calibri" pitchFamily="34" charset="-122"/>
-                <a:cs typeface="Calibri" pitchFamily="34" charset="-120"/>
-              </a:rPr>
-              <a:t>How we ran it:</a:t>
-            </a:r>
-            <a:endParaRPr lang="en-US" sz="1400" dirty="0"/>
-          </a:p>
-          <a:p>
-            <a:pPr marL="0" indent="0">
-              <a:spcAft>
-                <a:spcPts val="600"/>
-              </a:spcAft>
-              <a:buNone/>
-            </a:pPr>
-            <a:r>
-              <a:rPr lang="en-US" sz="1400" dirty="0">
-                <a:solidFill>
-                  <a:srgbClr val="1E293B"/>
-                </a:solidFill>
-                <a:latin typeface="Calibri" pitchFamily="34" charset="0"/>
-                <a:ea typeface="Calibri" pitchFamily="34" charset="-122"/>
-                <a:cs typeface="Calibri" pitchFamily="34" charset="-120"/>
-              </a:rPr>
-              <a:t>Load en_core_web_sm, extract entities, tokenize, train word2vec, plot tuned t-SNE.</a:t>
-            </a:r>
-            <a:endParaRPr lang="en-US" sz="1400" dirty="0"/>
-          </a:p>
-        </p:txBody>
-      </p:sp>
-      <p:sp>
-        <p:nvSpPr>
-          <p:cNvPr id="7" name="Shape 5"/>
-          <p:cNvSpPr/>
-          <p:nvPr/>
-        </p:nvSpPr>
-        <p:spPr>
-          <a:xfrm>
-            <a:off x="6720840" y="1965960"/>
-            <a:ext cx="4892040" cy="3977640"/>
-          </a:xfrm>
-          <a:prstGeom prst="roundRect">
-            <a:avLst>
-              <a:gd name="adj" fmla="val 1839"/>
-            </a:avLst>
-          </a:prstGeom>
-          <a:solidFill>
-            <a:srgbClr val="FEF7EC"/>
-          </a:solidFill>
-          <a:ln/>
-          <a:effectLst>
-            <a:outerShdw blurRad="101600" dist="38100" dir="5400000" algn="bl" rotWithShape="0">
-              <a:srgbClr val="000000">
-                <a:alpha val="10000"/>
-              </a:srgbClr>
-            </a:outerShdw>
-          </a:effectLst>
-        </p:spPr>
-      </p:sp>
-      <p:sp>
-        <p:nvSpPr>
-          <p:cNvPr id="9" name="Text 6"/>
-          <p:cNvSpPr/>
-          <p:nvPr/>
-        </p:nvSpPr>
-        <p:spPr>
-          <a:xfrm>
-            <a:off x="7589520" y="2258568"/>
-            <a:ext cx="3840480" cy="457200"/>
-          </a:xfrm>
-          <a:prstGeom prst="rect">
-            <a:avLst/>
-          </a:prstGeom>
-          <a:noFill/>
-          <a:ln/>
-        </p:spPr>
-        <p:txBody>
-          <a:bodyPr wrap="square" rtlCol="0" anchor="ctr"/>
-          <a:lstStyle/>
-          <a:p>
-            <a:pPr marL="0" indent="0">
-              <a:buNone/>
-            </a:pPr>
-            <a:r>
-              <a:rPr lang="en-US" sz="1500" b="1" dirty="0">
-                <a:solidFill>
-                  <a:srgbClr val="B45309"/>
-                </a:solidFill>
-                <a:latin typeface="Calibri" pitchFamily="34" charset="0"/>
-                <a:ea typeface="Calibri" pitchFamily="34" charset="-122"/>
-                <a:cs typeface="Calibri" pitchFamily="34" charset="-120"/>
-              </a:rPr>
-              <a:t>Finding</a:t>
-            </a:r>
-            <a:endParaRPr lang="en-US" sz="1500" dirty="0"/>
-          </a:p>
-        </p:txBody>
-      </p:sp>
-      <p:sp>
-        <p:nvSpPr>
-          <p:cNvPr id="10" name="Text 7"/>
-          <p:cNvSpPr/>
-          <p:nvPr/>
-        </p:nvSpPr>
-        <p:spPr>
-          <a:xfrm>
-            <a:off x="6995160" y="2834640"/>
-            <a:ext cx="4343400" cy="1828800"/>
-          </a:xfrm>
-          <a:prstGeom prst="rect">
-            <a:avLst/>
-          </a:prstGeom>
-          <a:noFill/>
-          <a:ln/>
-        </p:spPr>
-        <p:txBody>
-          <a:bodyPr wrap="square" rtlCol="0" anchor="t"/>
-          <a:lstStyle/>
-          <a:p>
-            <a:pPr marL="0" indent="0">
-              <a:buNone/>
-            </a:pPr>
-            <a:r>
-              <a:rPr lang="en-US" sz="1400" dirty="0">
-                <a:solidFill>
-                  <a:srgbClr val="1E293B"/>
-                </a:solidFill>
-                <a:latin typeface="Calibri" pitchFamily="34" charset="0"/>
-                <a:ea typeface="Calibri" pitchFamily="34" charset="-122"/>
-                <a:cs typeface="Calibri" pitchFamily="34" charset="-120"/>
-              </a:rPr>
-              <a:t>Top entity types were CARDINAL, ORG, PERSON, and DATE - generic categories. It missed almost all clinical concepts (diagnoses, symptoms, medications).</a:t>
-            </a:r>
-            <a:endParaRPr lang="en-US" sz="1400" dirty="0"/>
-          </a:p>
-        </p:txBody>
-      </p:sp>
-      <p:sp>
-        <p:nvSpPr>
-          <p:cNvPr id="11" name="Text 8"/>
-          <p:cNvSpPr/>
-          <p:nvPr/>
-        </p:nvSpPr>
-        <p:spPr>
-          <a:xfrm>
-            <a:off x="6995160" y="4709160"/>
-            <a:ext cx="4343400" cy="1097280"/>
-          </a:xfrm>
-          <a:prstGeom prst="rect">
-            <a:avLst/>
-          </a:prstGeom>
-          <a:noFill/>
-          <a:ln/>
-        </p:spPr>
-        <p:txBody>
-          <a:bodyPr wrap="square" rtlCol="0" anchor="t"/>
-          <a:lstStyle/>
-          <a:p>
-            <a:pPr marL="0" indent="0">
-              <a:buNone/>
-            </a:pPr>
-            <a:r>
-              <a:rPr lang="en-US" sz="1250" dirty="0">
-                <a:solidFill>
-                  <a:srgbClr val="64748B"/>
-                </a:solidFill>
-                <a:latin typeface="Calibri" pitchFamily="34" charset="0"/>
-                <a:ea typeface="Calibri" pitchFamily="34" charset="-122"/>
-                <a:cs typeface="Calibri" pitchFamily="34" charset="-120"/>
-              </a:rPr>
-              <a:t>Word2vec vocabulary size: 2,166 words</a:t>
-            </a:r>
-            <a:endParaRPr lang="en-US" sz="1250" dirty="0"/>
+              <a:t>12</a:t>
+            </a:r>
+            <a:endParaRPr lang="en-US" sz="1000" dirty="0"/>
           </a:p>
         </p:txBody>
       </p:sp>
@@ -3113,9 +4378,9 @@
 </p:sld>
 </file>
 
-<file path=ppt/slides/slide5.xml><?xml version="1.0" encoding="utf-8"?>
+<file path=ppt/slides/slide13.xml><?xml version="1.0" encoding="utf-8"?>
 <p:sld xmlns:a="http://schemas.openxmlformats.org/drawingml/2006/main" xmlns:r="http://schemas.openxmlformats.org/officeDocument/2006/relationships" xmlns:p="http://schemas.openxmlformats.org/presentationml/2006/main">
-  <p:cSld name="Slide 5">
+  <p:cSld name="Slide 13">
     <p:bg>
       <p:bgPr>
         <a:solidFill>
@@ -3171,7 +4436,7 @@
                 <a:ea typeface="Calibri" pitchFamily="34" charset="-122"/>
                 <a:cs typeface="Calibri" pitchFamily="34" charset="-120"/>
               </a:rPr>
-              <a:t>TOOL 2 OF 3</a:t>
+              <a:t>RESULTS</a:t>
             </a:r>
             <a:endParaRPr lang="en-US" sz="1300" dirty="0"/>
           </a:p>
@@ -3186,7 +4451,7 @@
         <p:spPr>
           <a:xfrm>
             <a:off x="548640" y="868680"/>
-            <a:ext cx="10972800" cy="548640"/>
+            <a:ext cx="10972800" cy="640080"/>
           </a:xfrm>
           <a:prstGeom prst="rect">
             <a:avLst/>
@@ -3202,7 +4467,7 @@
               <a:buNone/>
             </a:pPr>
             <a:r>
-              <a:rPr lang="en-US" sz="2800" b="1" dirty="0">
+              <a:rPr lang="en-US" sz="3000" b="1" dirty="0">
                 <a:solidFill>
                   <a:srgbClr val="1E293B"/>
                 </a:solidFill>
@@ -3210,1137 +4475,6 @@
                 <a:ea typeface="Cambria" pitchFamily="34" charset="-122"/>
                 <a:cs typeface="Cambria" pitchFamily="34" charset="-120"/>
               </a:rPr>
-              <a:t>scispaCy — Biomedical NLP</a:t>
-            </a:r>
-            <a:endParaRPr lang="en-US" sz="2800" dirty="0"/>
-          </a:p>
-        </p:txBody>
-      </p:sp>
-      <p:sp>
-        <p:nvSpPr>
-          <p:cNvPr id="5" name="Shape 3"/>
-          <p:cNvSpPr/>
-          <p:nvPr/>
-        </p:nvSpPr>
-        <p:spPr>
-          <a:xfrm>
-            <a:off x="548640" y="1965960"/>
-            <a:ext cx="5943600" cy="3977640"/>
-          </a:xfrm>
-          <a:prstGeom prst="roundRect">
-            <a:avLst>
-              <a:gd name="adj" fmla="val 1839"/>
-            </a:avLst>
-          </a:prstGeom>
-          <a:solidFill>
-            <a:srgbClr val="FFFFFF"/>
-          </a:solidFill>
-          <a:ln/>
-          <a:effectLst>
-            <a:outerShdw blurRad="101600" dist="38100" dir="5400000" algn="bl" rotWithShape="0">
-              <a:srgbClr val="000000">
-                <a:alpha val="10000"/>
-              </a:srgbClr>
-            </a:outerShdw>
-          </a:effectLst>
-        </p:spPr>
-      </p:sp>
-      <p:sp>
-        <p:nvSpPr>
-          <p:cNvPr id="6" name="Text 4"/>
-          <p:cNvSpPr/>
-          <p:nvPr/>
-        </p:nvSpPr>
-        <p:spPr>
-          <a:xfrm>
-            <a:off x="868680" y="2240280"/>
-            <a:ext cx="5349240" cy="3474720"/>
-          </a:xfrm>
-          <a:prstGeom prst="rect">
-            <a:avLst/>
-          </a:prstGeom>
-          <a:noFill/>
-          <a:ln/>
-        </p:spPr>
-        <p:txBody>
-          <a:bodyPr wrap="square" rtlCol="0" anchor="t"/>
-          <a:lstStyle/>
-          <a:p>
-            <a:pPr marL="0" indent="0">
-              <a:spcAft>
-                <a:spcPts val="600"/>
-              </a:spcAft>
-              <a:buNone/>
-            </a:pPr>
-            <a:r>
-              <a:rPr lang="en-US" sz="1400" b="1" dirty="0">
-                <a:solidFill>
-                  <a:srgbClr val="028090"/>
-                </a:solidFill>
-                <a:latin typeface="Calibri" pitchFamily="34" charset="0"/>
-                <a:ea typeface="Calibri" pitchFamily="34" charset="-122"/>
-                <a:cs typeface="Calibri" pitchFamily="34" charset="-120"/>
-              </a:rPr>
-              <a:t>What it does:</a:t>
-            </a:r>
-            <a:endParaRPr lang="en-US" sz="1400" dirty="0"/>
-          </a:p>
-          <a:p>
-            <a:pPr marL="0" indent="0">
-              <a:spcAft>
-                <a:spcPts val="600"/>
-              </a:spcAft>
-              <a:buNone/>
-            </a:pPr>
-            <a:r>
-              <a:rPr lang="en-US" sz="1400" dirty="0">
-                <a:solidFill>
-                  <a:srgbClr val="1E293B"/>
-                </a:solidFill>
-                <a:latin typeface="Calibri" pitchFamily="34" charset="0"/>
-                <a:ea typeface="Calibri" pitchFamily="34" charset="-122"/>
-                <a:cs typeface="Calibri" pitchFamily="34" charset="-120"/>
-              </a:rPr>
-              <a:t>Uses models trained on biomedical literature to recognize diseases, chemicals, and other domain-specific terms.</a:t>
-            </a:r>
-            <a:endParaRPr lang="en-US" sz="1400" dirty="0"/>
-          </a:p>
-          <a:p>
-            <a:pPr marL="0" indent="0">
-              <a:spcAft>
-                <a:spcPts val="600"/>
-              </a:spcAft>
-              <a:buNone/>
-            </a:pPr>
-            <a:r>
-              <a:rPr lang="en-US" sz="400" dirty="0">
-                <a:solidFill>
-                  <a:srgbClr val="000000"/>
-                </a:solidFill>
-                <a:latin typeface="Calibri" pitchFamily="34" charset="0"/>
-                <a:ea typeface="Calibri" pitchFamily="34" charset="-122"/>
-                <a:cs typeface="Calibri" pitchFamily="34" charset="-120"/>
-              </a:rPr>
-              <a:t> </a:t>
-            </a:r>
-            <a:endParaRPr lang="en-US" sz="1400" dirty="0"/>
-          </a:p>
-          <a:p>
-            <a:pPr marL="0" indent="0">
-              <a:spcAft>
-                <a:spcPts val="600"/>
-              </a:spcAft>
-              <a:buNone/>
-            </a:pPr>
-            <a:r>
-              <a:rPr lang="en-US" sz="1400" b="1" dirty="0">
-                <a:solidFill>
-                  <a:srgbClr val="028090"/>
-                </a:solidFill>
-                <a:latin typeface="Calibri" pitchFamily="34" charset="0"/>
-                <a:ea typeface="Calibri" pitchFamily="34" charset="-122"/>
-                <a:cs typeface="Calibri" pitchFamily="34" charset="-120"/>
-              </a:rPr>
-              <a:t>Why it matters:</a:t>
-            </a:r>
-            <a:endParaRPr lang="en-US" sz="1400" dirty="0"/>
-          </a:p>
-          <a:p>
-            <a:pPr marL="0" indent="0">
-              <a:spcAft>
-                <a:spcPts val="600"/>
-              </a:spcAft>
-              <a:buNone/>
-            </a:pPr>
-            <a:r>
-              <a:rPr lang="en-US" sz="1400" dirty="0">
-                <a:solidFill>
-                  <a:srgbClr val="1E293B"/>
-                </a:solidFill>
-                <a:latin typeface="Calibri" pitchFamily="34" charset="0"/>
-                <a:ea typeface="Calibri" pitchFamily="34" charset="-122"/>
-                <a:cs typeface="Calibri" pitchFamily="34" charset="-120"/>
-              </a:rPr>
-              <a:t>It understands clinical vocabulary that general spaCy simply doesn't recognize.</a:t>
-            </a:r>
-            <a:endParaRPr lang="en-US" sz="1400" dirty="0"/>
-          </a:p>
-          <a:p>
-            <a:pPr marL="0" indent="0">
-              <a:spcAft>
-                <a:spcPts val="600"/>
-              </a:spcAft>
-              <a:buNone/>
-            </a:pPr>
-            <a:r>
-              <a:rPr lang="en-US" sz="400" dirty="0">
-                <a:solidFill>
-                  <a:srgbClr val="000000"/>
-                </a:solidFill>
-                <a:latin typeface="Calibri" pitchFamily="34" charset="0"/>
-                <a:ea typeface="Calibri" pitchFamily="34" charset="-122"/>
-                <a:cs typeface="Calibri" pitchFamily="34" charset="-120"/>
-              </a:rPr>
-              <a:t> </a:t>
-            </a:r>
-            <a:endParaRPr lang="en-US" sz="1400" dirty="0"/>
-          </a:p>
-          <a:p>
-            <a:pPr marL="0" indent="0">
-              <a:spcAft>
-                <a:spcPts val="600"/>
-              </a:spcAft>
-              <a:buNone/>
-            </a:pPr>
-            <a:r>
-              <a:rPr lang="en-US" sz="1400" b="1" dirty="0">
-                <a:solidFill>
-                  <a:srgbClr val="028090"/>
-                </a:solidFill>
-                <a:latin typeface="Calibri" pitchFamily="34" charset="0"/>
-                <a:ea typeface="Calibri" pitchFamily="34" charset="-122"/>
-                <a:cs typeface="Calibri" pitchFamily="34" charset="-120"/>
-              </a:rPr>
-              <a:t>How we ran it:</a:t>
-            </a:r>
-            <a:endParaRPr lang="en-US" sz="1400" dirty="0"/>
-          </a:p>
-          <a:p>
-            <a:pPr marL="0" indent="0">
-              <a:spcAft>
-                <a:spcPts val="600"/>
-              </a:spcAft>
-              <a:buNone/>
-            </a:pPr>
-            <a:r>
-              <a:rPr lang="en-US" sz="1400" dirty="0">
-                <a:solidFill>
-                  <a:srgbClr val="1E293B"/>
-                </a:solidFill>
-                <a:latin typeface="Calibri" pitchFamily="34" charset="0"/>
-                <a:ea typeface="Calibri" pitchFamily="34" charset="-122"/>
-                <a:cs typeface="Calibri" pitchFamily="34" charset="-120"/>
-              </a:rPr>
-              <a:t>Load en_core_sci_sm and en_ner_bc5cdr_md, extract entities, tokenize, train word2vec, plot tuned t-SNE.</a:t>
-            </a:r>
-            <a:endParaRPr lang="en-US" sz="1400" dirty="0"/>
-          </a:p>
-        </p:txBody>
-      </p:sp>
-      <p:sp>
-        <p:nvSpPr>
-          <p:cNvPr id="7" name="Shape 5"/>
-          <p:cNvSpPr/>
-          <p:nvPr/>
-        </p:nvSpPr>
-        <p:spPr>
-          <a:xfrm>
-            <a:off x="6720840" y="1965960"/>
-            <a:ext cx="4892040" cy="3977640"/>
-          </a:xfrm>
-          <a:prstGeom prst="roundRect">
-            <a:avLst>
-              <a:gd name="adj" fmla="val 1839"/>
-            </a:avLst>
-          </a:prstGeom>
-          <a:solidFill>
-            <a:srgbClr val="EAFBF6"/>
-          </a:solidFill>
-          <a:ln/>
-          <a:effectLst>
-            <a:outerShdw blurRad="101600" dist="38100" dir="5400000" algn="bl" rotWithShape="0">
-              <a:srgbClr val="000000">
-                <a:alpha val="10000"/>
-              </a:srgbClr>
-            </a:outerShdw>
-          </a:effectLst>
-        </p:spPr>
-      </p:sp>
-      <p:sp>
-        <p:nvSpPr>
-          <p:cNvPr id="9" name="Text 6"/>
-          <p:cNvSpPr/>
-          <p:nvPr/>
-        </p:nvSpPr>
-        <p:spPr>
-          <a:xfrm>
-            <a:off x="7589520" y="2258568"/>
-            <a:ext cx="3840480" cy="457200"/>
-          </a:xfrm>
-          <a:prstGeom prst="rect">
-            <a:avLst/>
-          </a:prstGeom>
-          <a:noFill/>
-          <a:ln/>
-        </p:spPr>
-        <p:txBody>
-          <a:bodyPr wrap="square" rtlCol="0" anchor="ctr"/>
-          <a:lstStyle/>
-          <a:p>
-            <a:pPr marL="0" indent="0">
-              <a:buNone/>
-            </a:pPr>
-            <a:r>
-              <a:rPr lang="en-US" sz="1500" b="1" dirty="0">
-                <a:solidFill>
-                  <a:srgbClr val="0F766E"/>
-                </a:solidFill>
-                <a:latin typeface="Calibri" pitchFamily="34" charset="0"/>
-                <a:ea typeface="Calibri" pitchFamily="34" charset="-122"/>
-                <a:cs typeface="Calibri" pitchFamily="34" charset="-120"/>
-              </a:rPr>
-              <a:t>Finding</a:t>
-            </a:r>
-            <a:endParaRPr lang="en-US" sz="1500" dirty="0"/>
-          </a:p>
-        </p:txBody>
-      </p:sp>
-      <p:sp>
-        <p:nvSpPr>
-          <p:cNvPr id="10" name="Text 7"/>
-          <p:cNvSpPr/>
-          <p:nvPr/>
-        </p:nvSpPr>
-        <p:spPr>
-          <a:xfrm>
-            <a:off x="6995160" y="2834640"/>
-            <a:ext cx="4343400" cy="1828800"/>
-          </a:xfrm>
-          <a:prstGeom prst="rect">
-            <a:avLst/>
-          </a:prstGeom>
-          <a:noFill/>
-          <a:ln/>
-        </p:spPr>
-        <p:txBody>
-          <a:bodyPr wrap="square" rtlCol="0" anchor="t"/>
-          <a:lstStyle/>
-          <a:p>
-            <a:pPr marL="0" indent="0">
-              <a:buNone/>
-            </a:pPr>
-            <a:r>
-              <a:rPr lang="en-US" sz="1400" dirty="0">
-                <a:solidFill>
-                  <a:srgbClr val="1E293B"/>
-                </a:solidFill>
-                <a:latin typeface="Calibri" pitchFamily="34" charset="0"/>
-                <a:ea typeface="Calibri" pitchFamily="34" charset="-122"/>
-                <a:cs typeface="Calibri" pitchFamily="34" charset="-120"/>
-              </a:rPr>
-              <a:t>Found 1,178 DISEASE entities and 678 CHEMICAL entities - a much more clinically useful breakdown than spaCy's generic categories.</a:t>
-            </a:r>
-            <a:endParaRPr lang="en-US" sz="1400" dirty="0"/>
-          </a:p>
-        </p:txBody>
-      </p:sp>
-      <p:sp>
-        <p:nvSpPr>
-          <p:cNvPr id="11" name="Text 8"/>
-          <p:cNvSpPr/>
-          <p:nvPr/>
-        </p:nvSpPr>
-        <p:spPr>
-          <a:xfrm>
-            <a:off x="6995160" y="4709160"/>
-            <a:ext cx="4343400" cy="1097280"/>
-          </a:xfrm>
-          <a:prstGeom prst="rect">
-            <a:avLst/>
-          </a:prstGeom>
-          <a:noFill/>
-          <a:ln/>
-        </p:spPr>
-        <p:txBody>
-          <a:bodyPr wrap="square" rtlCol="0" anchor="t"/>
-          <a:lstStyle/>
-          <a:p>
-            <a:pPr marL="0" indent="0">
-              <a:buNone/>
-            </a:pPr>
-            <a:r>
-              <a:rPr lang="en-US" sz="1250" dirty="0">
-                <a:solidFill>
-                  <a:srgbClr val="64748B"/>
-                </a:solidFill>
-                <a:latin typeface="Calibri" pitchFamily="34" charset="0"/>
-                <a:ea typeface="Calibri" pitchFamily="34" charset="-122"/>
-                <a:cs typeface="Calibri" pitchFamily="34" charset="-120"/>
-              </a:rPr>
-              <a:t>Word2vec vocabulary size: 2,321 words</a:t>
-            </a:r>
-            <a:endParaRPr lang="en-US" sz="1250" dirty="0"/>
-          </a:p>
-        </p:txBody>
-      </p:sp>
-      <p:sp>
-        <p:nvSpPr>
-          <p:cNvPr id="12" name="Text 9"/>
-          <p:cNvSpPr/>
-          <p:nvPr/>
-        </p:nvSpPr>
-        <p:spPr>
-          <a:xfrm>
-            <a:off x="548640" y="6355080"/>
-            <a:ext cx="10972800" cy="320040"/>
-          </a:xfrm>
-          <a:prstGeom prst="rect">
-            <a:avLst/>
-          </a:prstGeom>
-          <a:noFill/>
-          <a:ln/>
-        </p:spPr>
-        <p:txBody>
-          <a:bodyPr wrap="square" rtlCol="0" anchor="ctr"/>
-          <a:lstStyle/>
-          <a:p>
-            <a:pPr marL="0" indent="0">
-              <a:buNone/>
-            </a:pPr>
-            <a:r>
-              <a:rPr lang="en-US" sz="1100" dirty="0">
-                <a:solidFill>
-                  <a:srgbClr val="64748B"/>
-                </a:solidFill>
-                <a:latin typeface="Calibri" pitchFamily="34" charset="0"/>
-                <a:ea typeface="Calibri" pitchFamily="34" charset="-122"/>
-                <a:cs typeface="Calibri" pitchFamily="34" charset="-120"/>
-              </a:rPr>
-              <a:t>Models: en_core_sci_sm, en_ner_bc5cdr_md  |  Output: entity counts, word2vec, tuned t-SNE plot</a:t>
-            </a:r>
-            <a:endParaRPr lang="en-US" sz="1100" dirty="0"/>
-          </a:p>
-        </p:txBody>
-      </p:sp>
-      <p:sp>
-        <p:nvSpPr>
-          <p:cNvPr id="13" name="Text 10"/>
-          <p:cNvSpPr/>
-          <p:nvPr/>
-        </p:nvSpPr>
-        <p:spPr>
-          <a:xfrm>
-            <a:off x="10058400" y="6446520"/>
-            <a:ext cx="1828800" cy="274320"/>
-          </a:xfrm>
-          <a:prstGeom prst="rect">
-            <a:avLst/>
-          </a:prstGeom>
-          <a:noFill/>
-          <a:ln/>
-        </p:spPr>
-        <p:txBody>
-          <a:bodyPr wrap="square" rtlCol="0" anchor="ctr"/>
-          <a:lstStyle/>
-          <a:p>
-            <a:pPr marL="0" indent="0" algn="r">
-              <a:buNone/>
-            </a:pPr>
-            <a:r>
-              <a:rPr lang="en-US" sz="1000" dirty="0">
-                <a:solidFill>
-                  <a:srgbClr val="64748B"/>
-                </a:solidFill>
-                <a:latin typeface="Calibri" pitchFamily="34" charset="0"/>
-                <a:ea typeface="Calibri" pitchFamily="34" charset="-122"/>
-                <a:cs typeface="Calibri" pitchFamily="34" charset="-120"/>
-              </a:rPr>
-              <a:t>5</a:t>
-            </a:r>
-            <a:endParaRPr lang="en-US" sz="1000" dirty="0"/>
-          </a:p>
-        </p:txBody>
-      </p:sp>
-    </p:spTree>
-  </p:cSld>
-  <p:clrMapOvr>
-    <a:masterClrMapping/>
-  </p:clrMapOvr>
-</p:sld>
-</file>
-
-<file path=ppt/slides/slide6.xml><?xml version="1.0" encoding="utf-8"?>
-<p:sld xmlns:a="http://schemas.openxmlformats.org/drawingml/2006/main" xmlns:r="http://schemas.openxmlformats.org/officeDocument/2006/relationships" xmlns:p="http://schemas.openxmlformats.org/presentationml/2006/main">
-  <p:cSld name="Slide 6">
-    <p:bg>
-      <p:bgPr>
-        <a:solidFill>
-          <a:srgbClr val="F4FAF9"/>
-        </a:solidFill>
-        <a:effectLst/>
-      </p:bgPr>
-    </p:bg>
-    <p:spTree>
-      <p:nvGrpSpPr>
-        <p:cNvPr id="1" name=""/>
-        <p:cNvGrpSpPr/>
-        <p:nvPr/>
-      </p:nvGrpSpPr>
-      <p:grpSpPr>
-        <a:xfrm>
-          <a:off x="0" y="0"/>
-          <a:ext cx="0" cy="0"/>
-          <a:chOff x="0" y="0"/>
-          <a:chExt cx="0" cy="0"/>
-        </a:xfrm>
-      </p:grpSpPr>
-      <p:sp>
-        <p:nvSpPr>
-          <p:cNvPr id="2" name="Text 0"/>
-          <p:cNvSpPr/>
-          <p:nvPr/>
-        </p:nvSpPr>
-        <p:spPr>
-          <a:xfrm>
-            <a:off x="548640" y="457200"/>
-            <a:ext cx="7315200" cy="365760"/>
-          </a:xfrm>
-          <a:prstGeom prst="rect">
-            <a:avLst/>
-          </a:prstGeom>
-          <a:noFill/>
-          <a:ln/>
-        </p:spPr>
-        <p:txBody>
-          <a:bodyPr wrap="square" rtlCol="0" anchor="ctr"/>
-          <a:lstStyle/>
-          <a:p>
-            <a:pPr marL="0" indent="0">
-              <a:buNone/>
-            </a:pPr>
-            <a:r>
-              <a:rPr lang="en-US" sz="1300" b="1" kern="0" spc="200" dirty="0">
-                <a:solidFill>
-                  <a:srgbClr val="00A896"/>
-                </a:solidFill>
-                <a:latin typeface="Calibri" pitchFamily="34" charset="0"/>
-                <a:ea typeface="Calibri" pitchFamily="34" charset="-122"/>
-                <a:cs typeface="Calibri" pitchFamily="34" charset="-120"/>
-              </a:rPr>
-              <a:t>TOOL 3 OF 3</a:t>
-            </a:r>
-            <a:endParaRPr lang="en-US" sz="1300" dirty="0"/>
-          </a:p>
-        </p:txBody>
-      </p:sp>
-      <p:sp>
-        <p:nvSpPr>
-          <p:cNvPr id="3" name="Text 1"/>
-          <p:cNvSpPr/>
-          <p:nvPr/>
-        </p:nvSpPr>
-        <p:spPr>
-          <a:xfrm>
-            <a:off x="548640" y="868680"/>
-            <a:ext cx="10972800" cy="548640"/>
-          </a:xfrm>
-          <a:prstGeom prst="rect">
-            <a:avLst/>
-          </a:prstGeom>
-          <a:noFill/>
-          <a:ln/>
-        </p:spPr>
-        <p:txBody>
-          <a:bodyPr wrap="square" rtlCol="0" anchor="ctr"/>
-          <a:lstStyle/>
-          <a:p>
-            <a:pPr marL="0" indent="0">
-              <a:buNone/>
-            </a:pPr>
-            <a:r>
-              <a:rPr lang="en-US" sz="2800" b="1" dirty="0">
-                <a:solidFill>
-                  <a:srgbClr val="1E293B"/>
-                </a:solidFill>
-                <a:latin typeface="Cambria" pitchFamily="34" charset="0"/>
-                <a:ea typeface="Cambria" pitchFamily="34" charset="-122"/>
-                <a:cs typeface="Cambria" pitchFamily="34" charset="-120"/>
-              </a:rPr>
-              <a:t>medspaCy — Clinical Context Detection</a:t>
-            </a:r>
-            <a:endParaRPr lang="en-US" sz="2800" dirty="0"/>
-          </a:p>
-        </p:txBody>
-      </p:sp>
-      <p:sp>
-        <p:nvSpPr>
-          <p:cNvPr id="4" name="Text 2"/>
-          <p:cNvSpPr/>
-          <p:nvPr/>
-        </p:nvSpPr>
-        <p:spPr>
-          <a:xfrm>
-            <a:off x="548640" y="1417320"/>
-            <a:ext cx="10972800" cy="365760"/>
-          </a:xfrm>
-          <a:prstGeom prst="rect">
-            <a:avLst/>
-          </a:prstGeom>
-          <a:noFill/>
-          <a:ln/>
-        </p:spPr>
-        <p:txBody>
-          <a:bodyPr wrap="square" rtlCol="0" anchor="ctr"/>
-          <a:lstStyle/>
-          <a:p>
-            <a:pPr marL="0" indent="0">
-              <a:buNone/>
-            </a:pPr>
-            <a:r>
-              <a:rPr lang="en-US" sz="1500" i="1" dirty="0">
-                <a:solidFill>
-                  <a:srgbClr val="64748B"/>
-                </a:solidFill>
-                <a:latin typeface="Calibri" pitchFamily="34" charset="0"/>
-                <a:ea typeface="Calibri" pitchFamily="34" charset="-122"/>
-                <a:cs typeface="Calibri" pitchFamily="34" charset="-120"/>
-              </a:rPr>
-              <a:t>Adds negation, family history, and hypothetical detection on top of entities</a:t>
-            </a:r>
-            <a:endParaRPr lang="en-US" sz="1500" dirty="0"/>
-          </a:p>
-        </p:txBody>
-      </p:sp>
-      <p:sp>
-        <p:nvSpPr>
-          <p:cNvPr id="5" name="Shape 3"/>
-          <p:cNvSpPr/>
-          <p:nvPr/>
-        </p:nvSpPr>
-        <p:spPr>
-          <a:xfrm>
-            <a:off x="548640" y="1965960"/>
-            <a:ext cx="5943600" cy="3977640"/>
-          </a:xfrm>
-          <a:prstGeom prst="roundRect">
-            <a:avLst>
-              <a:gd name="adj" fmla="val 1839"/>
-            </a:avLst>
-          </a:prstGeom>
-          <a:solidFill>
-            <a:srgbClr val="FFFFFF"/>
-          </a:solidFill>
-          <a:ln/>
-          <a:effectLst>
-            <a:outerShdw blurRad="101600" dist="38100" dir="5400000" algn="bl" rotWithShape="0">
-              <a:srgbClr val="000000">
-                <a:alpha val="10000"/>
-              </a:srgbClr>
-            </a:outerShdw>
-          </a:effectLst>
-        </p:spPr>
-      </p:sp>
-      <p:sp>
-        <p:nvSpPr>
-          <p:cNvPr id="6" name="Text 4"/>
-          <p:cNvSpPr/>
-          <p:nvPr/>
-        </p:nvSpPr>
-        <p:spPr>
-          <a:xfrm>
-            <a:off x="868680" y="2240280"/>
-            <a:ext cx="5349240" cy="3474720"/>
-          </a:xfrm>
-          <a:prstGeom prst="rect">
-            <a:avLst/>
-          </a:prstGeom>
-          <a:noFill/>
-          <a:ln/>
-        </p:spPr>
-        <p:txBody>
-          <a:bodyPr wrap="square" rtlCol="0" anchor="t"/>
-          <a:lstStyle/>
-          <a:p>
-            <a:pPr marL="0" indent="0">
-              <a:spcAft>
-                <a:spcPts val="600"/>
-              </a:spcAft>
-              <a:buNone/>
-            </a:pPr>
-            <a:r>
-              <a:rPr lang="en-US" sz="1400" b="1" dirty="0">
-                <a:solidFill>
-                  <a:srgbClr val="028090"/>
-                </a:solidFill>
-                <a:latin typeface="Calibri" pitchFamily="34" charset="0"/>
-                <a:ea typeface="Calibri" pitchFamily="34" charset="-122"/>
-                <a:cs typeface="Calibri" pitchFamily="34" charset="-120"/>
-              </a:rPr>
-              <a:t>What it does:</a:t>
-            </a:r>
-            <a:endParaRPr lang="en-US" sz="1400" dirty="0"/>
-          </a:p>
-          <a:p>
-            <a:pPr marL="0" indent="0">
-              <a:spcAft>
-                <a:spcPts val="600"/>
-              </a:spcAft>
-              <a:buNone/>
-            </a:pPr>
-            <a:r>
-              <a:rPr lang="en-US" sz="1400" dirty="0">
-                <a:solidFill>
-                  <a:srgbClr val="1E293B"/>
-                </a:solidFill>
-                <a:latin typeface="Calibri" pitchFamily="34" charset="0"/>
-                <a:ea typeface="Calibri" pitchFamily="34" charset="-122"/>
-                <a:cs typeface="Calibri" pitchFamily="34" charset="-120"/>
-              </a:rPr>
-              <a:t>Flags whether a clinical concept is negated, historical, hypothetical, or about a family member - not just whether it's mentioned.</a:t>
-            </a:r>
-            <a:endParaRPr lang="en-US" sz="1400" dirty="0"/>
-          </a:p>
-          <a:p>
-            <a:pPr marL="0" indent="0">
-              <a:spcAft>
-                <a:spcPts val="600"/>
-              </a:spcAft>
-              <a:buNone/>
-            </a:pPr>
-            <a:r>
-              <a:rPr lang="en-US" sz="400" dirty="0">
-                <a:solidFill>
-                  <a:srgbClr val="000000"/>
-                </a:solidFill>
-                <a:latin typeface="Calibri" pitchFamily="34" charset="0"/>
-                <a:ea typeface="Calibri" pitchFamily="34" charset="-122"/>
-                <a:cs typeface="Calibri" pitchFamily="34" charset="-120"/>
-              </a:rPr>
-              <a:t> </a:t>
-            </a:r>
-            <a:endParaRPr lang="en-US" sz="1400" dirty="0"/>
-          </a:p>
-          <a:p>
-            <a:pPr marL="0" indent="0">
-              <a:spcAft>
-                <a:spcPts val="600"/>
-              </a:spcAft>
-              <a:buNone/>
-            </a:pPr>
-            <a:r>
-              <a:rPr lang="en-US" sz="1400" b="1" dirty="0">
-                <a:solidFill>
-                  <a:srgbClr val="028090"/>
-                </a:solidFill>
-                <a:latin typeface="Calibri" pitchFamily="34" charset="0"/>
-                <a:ea typeface="Calibri" pitchFamily="34" charset="-122"/>
-                <a:cs typeface="Calibri" pitchFamily="34" charset="-120"/>
-              </a:rPr>
-              <a:t>Why it matters:</a:t>
-            </a:r>
-            <a:endParaRPr lang="en-US" sz="1400" dirty="0"/>
-          </a:p>
-          <a:p>
-            <a:pPr marL="0" indent="0">
-              <a:spcAft>
-                <a:spcPts val="600"/>
-              </a:spcAft>
-              <a:buNone/>
-            </a:pPr>
-            <a:r>
-              <a:rPr lang="en-US" sz="1400" dirty="0">
-                <a:solidFill>
-                  <a:srgbClr val="1E293B"/>
-                </a:solidFill>
-                <a:latin typeface="Calibri" pitchFamily="34" charset="0"/>
-                <a:ea typeface="Calibri" pitchFamily="34" charset="-122"/>
-                <a:cs typeface="Calibri" pitchFamily="34" charset="-120"/>
-              </a:rPr>
-              <a:t>'Denies chest pain' and 'has chest pain' are opposite findings. Only medspaCy tells them apart.</a:t>
-            </a:r>
-            <a:endParaRPr lang="en-US" sz="1400" dirty="0"/>
-          </a:p>
-          <a:p>
-            <a:pPr marL="0" indent="0">
-              <a:spcAft>
-                <a:spcPts val="600"/>
-              </a:spcAft>
-              <a:buNone/>
-            </a:pPr>
-            <a:r>
-              <a:rPr lang="en-US" sz="400" dirty="0">
-                <a:solidFill>
-                  <a:srgbClr val="000000"/>
-                </a:solidFill>
-                <a:latin typeface="Calibri" pitchFamily="34" charset="0"/>
-                <a:ea typeface="Calibri" pitchFamily="34" charset="-122"/>
-                <a:cs typeface="Calibri" pitchFamily="34" charset="-120"/>
-              </a:rPr>
-              <a:t> </a:t>
-            </a:r>
-            <a:endParaRPr lang="en-US" sz="1400" dirty="0"/>
-          </a:p>
-          <a:p>
-            <a:pPr marL="0" indent="0">
-              <a:spcAft>
-                <a:spcPts val="600"/>
-              </a:spcAft>
-              <a:buNone/>
-            </a:pPr>
-            <a:r>
-              <a:rPr lang="en-US" sz="1400" b="1" dirty="0">
-                <a:solidFill>
-                  <a:srgbClr val="028090"/>
-                </a:solidFill>
-                <a:latin typeface="Calibri" pitchFamily="34" charset="0"/>
-                <a:ea typeface="Calibri" pitchFamily="34" charset="-122"/>
-                <a:cs typeface="Calibri" pitchFamily="34" charset="-120"/>
-              </a:rPr>
-              <a:t>How we ran it:</a:t>
-            </a:r>
-            <a:endParaRPr lang="en-US" sz="1400" dirty="0"/>
-          </a:p>
-          <a:p>
-            <a:pPr marL="0" indent="0">
-              <a:spcAft>
-                <a:spcPts val="600"/>
-              </a:spcAft>
-              <a:buNone/>
-            </a:pPr>
-            <a:r>
-              <a:rPr lang="en-US" sz="1400" dirty="0">
-                <a:solidFill>
-                  <a:srgbClr val="1E293B"/>
-                </a:solidFill>
-                <a:latin typeface="Calibri" pitchFamily="34" charset="0"/>
-                <a:ea typeface="Calibri" pitchFamily="34" charset="-122"/>
-                <a:cs typeface="Calibri" pitchFamily="34" charset="-120"/>
-              </a:rPr>
-              <a:t>Load medspaCy, add target rules for SAH-related concepts, run context detection over the sample.</a:t>
-            </a:r>
-            <a:endParaRPr lang="en-US" sz="1400" dirty="0"/>
-          </a:p>
-        </p:txBody>
-      </p:sp>
-      <p:sp>
-        <p:nvSpPr>
-          <p:cNvPr id="7" name="Shape 5"/>
-          <p:cNvSpPr/>
-          <p:nvPr/>
-        </p:nvSpPr>
-        <p:spPr>
-          <a:xfrm>
-            <a:off x="6720840" y="1965960"/>
-            <a:ext cx="4892040" cy="3977640"/>
-          </a:xfrm>
-          <a:prstGeom prst="roundRect">
-            <a:avLst>
-              <a:gd name="adj" fmla="val 1839"/>
-            </a:avLst>
-          </a:prstGeom>
-          <a:solidFill>
-            <a:srgbClr val="FEF7EC"/>
-          </a:solidFill>
-          <a:ln/>
-          <a:effectLst>
-            <a:outerShdw blurRad="101600" dist="38100" dir="5400000" algn="bl" rotWithShape="0">
-              <a:srgbClr val="000000">
-                <a:alpha val="10000"/>
-              </a:srgbClr>
-            </a:outerShdw>
-          </a:effectLst>
-        </p:spPr>
-      </p:sp>
-      <p:sp>
-        <p:nvSpPr>
-          <p:cNvPr id="9" name="Text 6"/>
-          <p:cNvSpPr/>
-          <p:nvPr/>
-        </p:nvSpPr>
-        <p:spPr>
-          <a:xfrm>
-            <a:off x="7589520" y="2258568"/>
-            <a:ext cx="3840480" cy="457200"/>
-          </a:xfrm>
-          <a:prstGeom prst="rect">
-            <a:avLst/>
-          </a:prstGeom>
-          <a:noFill/>
-          <a:ln/>
-        </p:spPr>
-        <p:txBody>
-          <a:bodyPr wrap="square" lIns="91440" tIns="45720" rIns="91440" bIns="45720" rtlCol="0" anchor="ctr"/>
-          <a:lstStyle/>
-          <a:p>
-            <a:pPr marL="0" indent="0">
-              <a:buNone/>
-            </a:pPr>
-            <a:r>
-              <a:rPr lang="en-US" sz="1500" b="1">
-                <a:solidFill>
-                  <a:srgbClr val="B45309"/>
-                </a:solidFill>
-                <a:latin typeface="Calibri"/>
-                <a:ea typeface="Calibri"/>
-                <a:cs typeface="Calibri"/>
-              </a:rPr>
-              <a:t>Important finding</a:t>
-            </a:r>
-            <a:endParaRPr lang="en-US" sz="1500" dirty="0"/>
-          </a:p>
-        </p:txBody>
-      </p:sp>
-      <p:sp>
-        <p:nvSpPr>
-          <p:cNvPr id="10" name="Text 7"/>
-          <p:cNvSpPr/>
-          <p:nvPr/>
-        </p:nvSpPr>
-        <p:spPr>
-          <a:xfrm>
-            <a:off x="6995160" y="2834640"/>
-            <a:ext cx="4343400" cy="1828800"/>
-          </a:xfrm>
-          <a:prstGeom prst="rect">
-            <a:avLst/>
-          </a:prstGeom>
-          <a:noFill/>
-          <a:ln/>
-        </p:spPr>
-        <p:txBody>
-          <a:bodyPr wrap="square" rtlCol="0" anchor="t"/>
-          <a:lstStyle/>
-          <a:p>
-            <a:pPr marL="0" indent="0">
-              <a:buNone/>
-            </a:pPr>
-            <a:r>
-              <a:rPr lang="en-US" sz="1400" dirty="0">
-                <a:solidFill>
-                  <a:srgbClr val="1E293B"/>
-                </a:solidFill>
-                <a:latin typeface="Calibri" pitchFamily="34" charset="0"/>
-                <a:ea typeface="Calibri" pitchFamily="34" charset="-122"/>
-                <a:cs typeface="Calibri" pitchFamily="34" charset="-120"/>
-              </a:rPr>
-              <a:t>Unlike spaCy and scispaCy, medspaCy's entity finder is rule-based and starts empty - it only finds concepts we explicitly define with target rules.</a:t>
-            </a:r>
-            <a:endParaRPr lang="en-US" sz="1400" dirty="0"/>
-          </a:p>
-        </p:txBody>
-      </p:sp>
-      <p:sp>
-        <p:nvSpPr>
-          <p:cNvPr id="11" name="Text 8"/>
-          <p:cNvSpPr/>
-          <p:nvPr/>
-        </p:nvSpPr>
-        <p:spPr>
-          <a:xfrm>
-            <a:off x="6995160" y="4709160"/>
-            <a:ext cx="4343400" cy="1097280"/>
-          </a:xfrm>
-          <a:prstGeom prst="rect">
-            <a:avLst/>
-          </a:prstGeom>
-          <a:noFill/>
-          <a:ln/>
-        </p:spPr>
-        <p:txBody>
-          <a:bodyPr wrap="square" rtlCol="0" anchor="t"/>
-          <a:lstStyle/>
-          <a:p>
-            <a:pPr marL="0" indent="0">
-              <a:buNone/>
-            </a:pPr>
-            <a:r>
-              <a:rPr lang="en-US" sz="1250" dirty="0">
-                <a:solidFill>
-                  <a:srgbClr val="64748B"/>
-                </a:solidFill>
-                <a:latin typeface="Calibri" pitchFamily="34" charset="0"/>
-                <a:ea typeface="Calibri" pitchFamily="34" charset="-122"/>
-                <a:cs typeface="Calibri" pitchFamily="34" charset="-120"/>
-              </a:rPr>
-              <a:t>Word2vec vocabulary size: 2,223 words</a:t>
-            </a:r>
-            <a:endParaRPr lang="en-US" sz="1250" dirty="0"/>
-          </a:p>
-        </p:txBody>
-      </p:sp>
-      <p:sp>
-        <p:nvSpPr>
-          <p:cNvPr id="12" name="Text 9"/>
-          <p:cNvSpPr/>
-          <p:nvPr/>
-        </p:nvSpPr>
-        <p:spPr>
-          <a:xfrm>
-            <a:off x="548640" y="6355080"/>
-            <a:ext cx="10972800" cy="320040"/>
-          </a:xfrm>
-          <a:prstGeom prst="rect">
-            <a:avLst/>
-          </a:prstGeom>
-          <a:noFill/>
-          <a:ln/>
-        </p:spPr>
-        <p:txBody>
-          <a:bodyPr wrap="square" rtlCol="0" anchor="ctr"/>
-          <a:lstStyle/>
-          <a:p>
-            <a:pPr marL="0" indent="0">
-              <a:buNone/>
-            </a:pPr>
-            <a:r>
-              <a:rPr lang="en-US" sz="1100" dirty="0">
-                <a:solidFill>
-                  <a:srgbClr val="64748B"/>
-                </a:solidFill>
-                <a:latin typeface="Calibri" pitchFamily="34" charset="0"/>
-                <a:ea typeface="Calibri" pitchFamily="34" charset="-122"/>
-                <a:cs typeface="Calibri" pitchFamily="34" charset="-120"/>
-              </a:rPr>
-              <a:t>Package: medspaCy  |  Output: entity + negation/context flags, word2vec, tuned t-SNE plot</a:t>
-            </a:r>
-            <a:endParaRPr lang="en-US" sz="1100" dirty="0"/>
-          </a:p>
-        </p:txBody>
-      </p:sp>
-      <p:sp>
-        <p:nvSpPr>
-          <p:cNvPr id="13" name="Text 10"/>
-          <p:cNvSpPr/>
-          <p:nvPr/>
-        </p:nvSpPr>
-        <p:spPr>
-          <a:xfrm>
-            <a:off x="10058400" y="6446520"/>
-            <a:ext cx="1828800" cy="274320"/>
-          </a:xfrm>
-          <a:prstGeom prst="rect">
-            <a:avLst/>
-          </a:prstGeom>
-          <a:noFill/>
-          <a:ln/>
-        </p:spPr>
-        <p:txBody>
-          <a:bodyPr wrap="square" rtlCol="0" anchor="ctr"/>
-          <a:lstStyle/>
-          <a:p>
-            <a:pPr marL="0" indent="0" algn="r">
-              <a:buNone/>
-            </a:pPr>
-            <a:r>
-              <a:rPr lang="en-US" sz="1000" dirty="0">
-                <a:solidFill>
-                  <a:srgbClr val="64748B"/>
-                </a:solidFill>
-                <a:latin typeface="Calibri" pitchFamily="34" charset="0"/>
-                <a:ea typeface="Calibri" pitchFamily="34" charset="-122"/>
-                <a:cs typeface="Calibri" pitchFamily="34" charset="-120"/>
-              </a:rPr>
-              <a:t>6</a:t>
-            </a:r>
-            <a:endParaRPr lang="en-US" sz="1000" dirty="0"/>
-          </a:p>
-        </p:txBody>
-      </p:sp>
-    </p:spTree>
-  </p:cSld>
-  <p:clrMapOvr>
-    <a:masterClrMapping/>
-  </p:clrMapOvr>
-</p:sld>
-</file>
-
-<file path=ppt/slides/slide7.xml><?xml version="1.0" encoding="utf-8"?>
-<p:sld xmlns:a="http://schemas.openxmlformats.org/drawingml/2006/main" xmlns:r="http://schemas.openxmlformats.org/officeDocument/2006/relationships" xmlns:p="http://schemas.openxmlformats.org/presentationml/2006/main">
-  <p:cSld name="Slide 7">
-    <p:bg>
-      <p:bgPr>
-        <a:solidFill>
-          <a:srgbClr val="F4FAF9"/>
-        </a:solidFill>
-        <a:effectLst/>
-      </p:bgPr>
-    </p:bg>
-    <p:spTree>
-      <p:nvGrpSpPr>
-        <p:cNvPr id="1" name=""/>
-        <p:cNvGrpSpPr/>
-        <p:nvPr/>
-      </p:nvGrpSpPr>
-      <p:grpSpPr>
-        <a:xfrm>
-          <a:off x="0" y="0"/>
-          <a:ext cx="0" cy="0"/>
-          <a:chOff x="0" y="0"/>
-          <a:chExt cx="0" cy="0"/>
-        </a:xfrm>
-      </p:grpSpPr>
-      <p:sp>
-        <p:nvSpPr>
-          <p:cNvPr id="2" name="Text 0"/>
-          <p:cNvSpPr/>
-          <p:nvPr/>
-        </p:nvSpPr>
-        <p:spPr>
-          <a:xfrm>
-            <a:off x="548640" y="457200"/>
-            <a:ext cx="7315200" cy="365760"/>
-          </a:xfrm>
-          <a:prstGeom prst="rect">
-            <a:avLst/>
-          </a:prstGeom>
-          <a:noFill/>
-          <a:ln/>
-        </p:spPr>
-        <p:txBody>
-          <a:bodyPr wrap="square" rtlCol="0" anchor="ctr"/>
-          <a:lstStyle/>
-          <a:p>
-            <a:pPr marL="0" indent="0">
-              <a:buNone/>
-            </a:pPr>
-            <a:r>
-              <a:rPr lang="en-US" sz="1300" b="1" kern="0" spc="200" dirty="0">
-                <a:solidFill>
-                  <a:srgbClr val="00A896"/>
-                </a:solidFill>
-                <a:latin typeface="Calibri" pitchFamily="34" charset="0"/>
-                <a:ea typeface="Calibri" pitchFamily="34" charset="-122"/>
-                <a:cs typeface="Calibri" pitchFamily="34" charset="-120"/>
-              </a:rPr>
-              <a:t>RESULTS</a:t>
-            </a:r>
-            <a:endParaRPr lang="en-US" sz="1300" dirty="0"/>
-          </a:p>
-        </p:txBody>
-      </p:sp>
-      <p:sp>
-        <p:nvSpPr>
-          <p:cNvPr id="3" name="Text 1"/>
-          <p:cNvSpPr/>
-          <p:nvPr/>
-        </p:nvSpPr>
-        <p:spPr>
-          <a:xfrm>
-            <a:off x="548640" y="868680"/>
-            <a:ext cx="10972800" cy="640080"/>
-          </a:xfrm>
-          <a:prstGeom prst="rect">
-            <a:avLst/>
-          </a:prstGeom>
-          <a:noFill/>
-          <a:ln/>
-        </p:spPr>
-        <p:txBody>
-          <a:bodyPr wrap="square" rtlCol="0" anchor="ctr"/>
-          <a:lstStyle/>
-          <a:p>
-            <a:pPr marL="0" indent="0">
-              <a:buNone/>
-            </a:pPr>
-            <a:r>
-              <a:rPr lang="en-US" sz="3000" b="1" dirty="0">
-                <a:solidFill>
-                  <a:srgbClr val="1E293B"/>
-                </a:solidFill>
-                <a:latin typeface="Cambria" pitchFamily="34" charset="0"/>
-                <a:ea typeface="Cambria" pitchFamily="34" charset="-122"/>
-                <a:cs typeface="Cambria" pitchFamily="34" charset="-120"/>
-              </a:rPr>
               <a:t>Side-by-Side Comparison</a:t>
             </a:r>
             <a:endParaRPr lang="en-US" sz="3000" dirty="0"/>
@@ -4349,7 +4483,7 @@
       </p:sp>
       <p:graphicFrame>
         <p:nvGraphicFramePr>
-          <p:cNvPr id="8" name="Table 0"/>
+          <p:cNvPr id="14" name="Table 0"/>
           <p:cNvGraphicFramePr>
             <a:graphicFrameLocks noGrp="1"/>
           </p:cNvGraphicFramePr>
@@ -4362,8 +4496,8 @@
           </p:nvPr>
         </p:nvGraphicFramePr>
         <p:xfrm>
-          <a:off x="548640" y="1828800"/>
-          <a:ext cx="11064240" cy="4206240"/>
+          <a:off x="548640" y="1600200"/>
+          <a:ext cx="11064240" cy="4709160"/>
         </p:xfrm>
         <a:graphic>
           <a:graphicData uri="http://schemas.openxmlformats.org/drawingml/2006/table">
@@ -4399,7 +4533,7 @@
                   </a:extLst>
                 </a:gridCol>
               </a:tblGrid>
-              <a:tr h="822960">
+              <a:tr h="585216">
                 <a:tc>
                   <a:txBody>
                     <a:bodyPr/>
@@ -4408,7 +4542,7 @@
                       <a:pPr marL="0" indent="0">
                         <a:buNone/>
                       </a:pPr>
-                      <a:endParaRPr lang="en-US" sz="1350" dirty="0">
+                      <a:endParaRPr lang="en-US" sz="1250" dirty="0">
                         <a:latin typeface="Calibri" charset="0"/>
                         <a:ea typeface="Calibri" charset="0"/>
                         <a:cs typeface="Calibri" charset="0"/>
@@ -4466,7 +4600,7 @@
                         <a:buNone/>
                       </a:pPr>
                       <a:r>
-                        <a:rPr lang="en-US" sz="1350" b="1" dirty="0">
+                        <a:rPr lang="en-US" sz="1250" b="1" dirty="0">
                           <a:solidFill>
                             <a:srgbClr val="FFFFFF"/>
                           </a:solidFill>
@@ -4476,7 +4610,7 @@
                         </a:rPr>
                         <a:t>spaCy</a:t>
                       </a:r>
-                      <a:endParaRPr lang="en-US" sz="1350" dirty="0">
+                      <a:endParaRPr lang="en-US" sz="1250" dirty="0">
                         <a:latin typeface="Calibri" charset="0"/>
                         <a:ea typeface="Calibri" charset="0"/>
                         <a:cs typeface="Calibri" charset="0"/>
@@ -4534,7 +4668,7 @@
                         <a:buNone/>
                       </a:pPr>
                       <a:r>
-                        <a:rPr lang="en-US" sz="1350" b="1" dirty="0">
+                        <a:rPr lang="en-US" sz="1250" b="1" dirty="0">
                           <a:solidFill>
                             <a:srgbClr val="FFFFFF"/>
                           </a:solidFill>
@@ -4544,7 +4678,7 @@
                         </a:rPr>
                         <a:t>scispaCy</a:t>
                       </a:r>
-                      <a:endParaRPr lang="en-US" sz="1350" dirty="0">
+                      <a:endParaRPr lang="en-US" sz="1250" dirty="0">
                         <a:latin typeface="Calibri" charset="0"/>
                         <a:ea typeface="Calibri" charset="0"/>
                         <a:cs typeface="Calibri" charset="0"/>
@@ -4602,7 +4736,7 @@
                         <a:buNone/>
                       </a:pPr>
                       <a:r>
-                        <a:rPr lang="en-US" sz="1350" b="1" dirty="0">
+                        <a:rPr lang="en-US" sz="1250" b="1" dirty="0">
                           <a:solidFill>
                             <a:srgbClr val="FFFFFF"/>
                           </a:solidFill>
@@ -4612,7 +4746,7 @@
                         </a:rPr>
                         <a:t>medspaCy</a:t>
                       </a:r>
-                      <a:endParaRPr lang="en-US" sz="1350" dirty="0">
+                      <a:endParaRPr lang="en-US" sz="1250" dirty="0">
                         <a:latin typeface="Calibri" charset="0"/>
                         <a:ea typeface="Calibri" charset="0"/>
                         <a:cs typeface="Calibri" charset="0"/>
@@ -4667,7 +4801,7 @@
                   </a:ext>
                 </a:extLst>
               </a:tr>
-              <a:tr h="822960">
+              <a:tr h="585216">
                 <a:tc>
                   <a:txBody>
                     <a:bodyPr/>
@@ -4677,7 +4811,7 @@
                         <a:buNone/>
                       </a:pPr>
                       <a:r>
-                        <a:rPr lang="en-US" sz="1350" b="1" dirty="0">
+                        <a:rPr lang="en-US" sz="1250" b="1" dirty="0">
                           <a:solidFill>
                             <a:srgbClr val="1E293B"/>
                           </a:solidFill>
@@ -4685,9 +4819,9 @@
                           <a:ea typeface="Calibri" pitchFamily="34" charset="-122"/>
                           <a:cs typeface="Calibri" pitchFamily="34" charset="-120"/>
                         </a:rPr>
-                        <a:t>Entity focus</a:t>
+                        <a:t>Total entities found</a:t>
                       </a:r>
-                      <a:endParaRPr lang="en-US" sz="1350" dirty="0">
+                      <a:endParaRPr lang="en-US" sz="1250" dirty="0">
                         <a:latin typeface="Calibri" charset="0"/>
                         <a:ea typeface="Calibri" charset="0"/>
                         <a:cs typeface="Calibri" charset="0"/>
@@ -4745,7 +4879,7 @@
                         <a:buNone/>
                       </a:pPr>
                       <a:r>
-                        <a:rPr lang="en-US" sz="1350" dirty="0">
+                        <a:rPr lang="en-US" sz="1250" dirty="0">
                           <a:solidFill>
                             <a:srgbClr val="1E293B"/>
                           </a:solidFill>
@@ -4753,9 +4887,9 @@
                           <a:ea typeface="Calibri" pitchFamily="34" charset="-122"/>
                           <a:cs typeface="Calibri" pitchFamily="34" charset="-120"/>
                         </a:rPr>
-                        <a:t>General (people, orgs, dates)</a:t>
+                        <a:t>3,104</a:t>
                       </a:r>
-                      <a:endParaRPr lang="en-US" sz="1350" dirty="0">
+                      <a:endParaRPr lang="en-US" sz="1250" dirty="0">
                         <a:latin typeface="Calibri" charset="0"/>
                         <a:ea typeface="Calibri" charset="0"/>
                         <a:cs typeface="Calibri" charset="0"/>
@@ -4813,7 +4947,7 @@
                         <a:buNone/>
                       </a:pPr>
                       <a:r>
-                        <a:rPr lang="en-US" sz="1350" dirty="0">
+                        <a:rPr lang="en-US" sz="1250" dirty="0">
                           <a:solidFill>
                             <a:srgbClr val="1E293B"/>
                           </a:solidFill>
@@ -4821,9 +4955,9 @@
                           <a:ea typeface="Calibri" pitchFamily="34" charset="-122"/>
                           <a:cs typeface="Calibri" pitchFamily="34" charset="-120"/>
                         </a:rPr>
-                        <a:t>Biomedical (disease, chemical)</a:t>
+                        <a:t>1,986</a:t>
                       </a:r>
-                      <a:endParaRPr lang="en-US" sz="1350" dirty="0">
+                      <a:endParaRPr lang="en-US" sz="1250" dirty="0">
                         <a:latin typeface="Calibri" charset="0"/>
                         <a:ea typeface="Calibri" charset="0"/>
                         <a:cs typeface="Calibri" charset="0"/>
@@ -4881,7 +5015,7 @@
                         <a:buNone/>
                       </a:pPr>
                       <a:r>
-                        <a:rPr lang="en-US" sz="1350" dirty="0">
+                        <a:rPr lang="en-US" sz="1250" dirty="0">
                           <a:solidFill>
                             <a:srgbClr val="1E293B"/>
                           </a:solidFill>
@@ -4889,9 +5023,9 @@
                           <a:ea typeface="Calibri" pitchFamily="34" charset="-122"/>
                           <a:cs typeface="Calibri" pitchFamily="34" charset="-120"/>
                         </a:rPr>
-                        <a:t>Clinical context (negation, etc.)</a:t>
+                        <a:t>254</a:t>
                       </a:r>
-                      <a:endParaRPr lang="en-US" sz="1350" dirty="0">
+                      <a:endParaRPr lang="en-US" sz="1250" dirty="0">
                         <a:latin typeface="Calibri" charset="0"/>
                         <a:ea typeface="Calibri" charset="0"/>
                         <a:cs typeface="Calibri" charset="0"/>
@@ -4946,7 +5080,7 @@
                   </a:ext>
                 </a:extLst>
               </a:tr>
-              <a:tr h="822960">
+              <a:tr h="585216">
                 <a:tc>
                   <a:txBody>
                     <a:bodyPr/>
@@ -4956,7 +5090,7 @@
                         <a:buNone/>
                       </a:pPr>
                       <a:r>
-                        <a:rPr lang="en-US" sz="1350" b="1" dirty="0">
+                        <a:rPr lang="en-US" sz="1250" b="1" dirty="0">
                           <a:solidFill>
                             <a:srgbClr val="1E293B"/>
                           </a:solidFill>
@@ -4964,9 +5098,9 @@
                           <a:ea typeface="Calibri" pitchFamily="34" charset="-122"/>
                           <a:cs typeface="Calibri" pitchFamily="34" charset="-120"/>
                         </a:rPr>
-                        <a:t>Top categories found</a:t>
+                        <a:t>Entity focus</a:t>
                       </a:r>
-                      <a:endParaRPr lang="en-US" sz="1350" dirty="0">
+                      <a:endParaRPr lang="en-US" sz="1250" dirty="0">
                         <a:latin typeface="Calibri" charset="0"/>
                         <a:ea typeface="Calibri" charset="0"/>
                         <a:cs typeface="Calibri" charset="0"/>
@@ -5024,7 +5158,7 @@
                         <a:buNone/>
                       </a:pPr>
                       <a:r>
-                        <a:rPr lang="en-US" sz="1350" dirty="0">
+                        <a:rPr lang="en-US" sz="1250" dirty="0">
                           <a:solidFill>
                             <a:srgbClr val="1E293B"/>
                           </a:solidFill>
@@ -5032,9 +5166,9 @@
                           <a:ea typeface="Calibri" pitchFamily="34" charset="-122"/>
                           <a:cs typeface="Calibri" pitchFamily="34" charset="-120"/>
                         </a:rPr>
-                        <a:t>CARDINAL, ORG, PERSON</a:t>
+                        <a:t>General (people, orgs, dates)</a:t>
                       </a:r>
-                      <a:endParaRPr lang="en-US" sz="1350" dirty="0">
+                      <a:endParaRPr lang="en-US" sz="1250" dirty="0">
                         <a:latin typeface="Calibri" charset="0"/>
                         <a:ea typeface="Calibri" charset="0"/>
                         <a:cs typeface="Calibri" charset="0"/>
@@ -5092,7 +5226,7 @@
                         <a:buNone/>
                       </a:pPr>
                       <a:r>
-                        <a:rPr lang="en-US" sz="1350" dirty="0">
+                        <a:rPr lang="en-US" sz="1250" dirty="0">
                           <a:solidFill>
                             <a:srgbClr val="1E293B"/>
                           </a:solidFill>
@@ -5100,9 +5234,9 @@
                           <a:ea typeface="Calibri" pitchFamily="34" charset="-122"/>
                           <a:cs typeface="Calibri" pitchFamily="34" charset="-120"/>
                         </a:rPr>
-                        <a:t>DISEASE, CHEMICAL</a:t>
+                        <a:t>Biomedical (disease, chemical)</a:t>
                       </a:r>
-                      <a:endParaRPr lang="en-US" sz="1350" dirty="0">
+                      <a:endParaRPr lang="en-US" sz="1250" dirty="0">
                         <a:latin typeface="Calibri" charset="0"/>
                         <a:ea typeface="Calibri" charset="0"/>
                         <a:cs typeface="Calibri" charset="0"/>
@@ -5160,7 +5294,7 @@
                         <a:buNone/>
                       </a:pPr>
                       <a:r>
-                        <a:rPr lang="en-US" sz="1350" dirty="0">
+                        <a:rPr lang="en-US" sz="1250" dirty="0">
                           <a:solidFill>
                             <a:srgbClr val="1E293B"/>
                           </a:solidFill>
@@ -5168,9 +5302,9 @@
                           <a:ea typeface="Calibri" pitchFamily="34" charset="-122"/>
                           <a:cs typeface="Calibri" pitchFamily="34" charset="-120"/>
                         </a:rPr>
-                        <a:t>Rule-defined only</a:t>
+                        <a:t>Clinical context (negation, etc.)</a:t>
                       </a:r>
-                      <a:endParaRPr lang="en-US" sz="1350" dirty="0">
+                      <a:endParaRPr lang="en-US" sz="1250" dirty="0">
                         <a:latin typeface="Calibri" charset="0"/>
                         <a:ea typeface="Calibri" charset="0"/>
                         <a:cs typeface="Calibri" charset="0"/>
@@ -5225,7 +5359,7 @@
                   </a:ext>
                 </a:extLst>
               </a:tr>
-              <a:tr h="822960">
+              <a:tr h="585216">
                 <a:tc>
                   <a:txBody>
                     <a:bodyPr/>
@@ -5235,7 +5369,7 @@
                         <a:buNone/>
                       </a:pPr>
                       <a:r>
-                        <a:rPr lang="en-US" sz="1350" b="1" dirty="0">
+                        <a:rPr lang="en-US" sz="1250" b="1" dirty="0">
                           <a:solidFill>
                             <a:srgbClr val="1E293B"/>
                           </a:solidFill>
@@ -5243,9 +5377,9 @@
                           <a:ea typeface="Calibri" pitchFamily="34" charset="-122"/>
                           <a:cs typeface="Calibri" pitchFamily="34" charset="-120"/>
                         </a:rPr>
-                        <a:t>Needs custom setup?</a:t>
+                        <a:t>Top categories found</a:t>
                       </a:r>
-                      <a:endParaRPr lang="en-US" sz="1350" dirty="0">
+                      <a:endParaRPr lang="en-US" sz="1250" dirty="0">
                         <a:latin typeface="Calibri" charset="0"/>
                         <a:ea typeface="Calibri" charset="0"/>
                         <a:cs typeface="Calibri" charset="0"/>
@@ -5303,7 +5437,7 @@
                         <a:buNone/>
                       </a:pPr>
                       <a:r>
-                        <a:rPr lang="en-US" sz="1350" dirty="0">
+                        <a:rPr lang="en-US" sz="1250" dirty="0">
                           <a:solidFill>
                             <a:srgbClr val="1E293B"/>
                           </a:solidFill>
@@ -5311,9 +5445,9 @@
                           <a:ea typeface="Calibri" pitchFamily="34" charset="-122"/>
                           <a:cs typeface="Calibri" pitchFamily="34" charset="-120"/>
                         </a:rPr>
-                        <a:t>No</a:t>
+                        <a:t>CARDINAL, ORG, PERSON</a:t>
                       </a:r>
-                      <a:endParaRPr lang="en-US" sz="1350" dirty="0">
+                      <a:endParaRPr lang="en-US" sz="1250" dirty="0">
                         <a:latin typeface="Calibri" charset="0"/>
                         <a:ea typeface="Calibri" charset="0"/>
                         <a:cs typeface="Calibri" charset="0"/>
@@ -5371,7 +5505,7 @@
                         <a:buNone/>
                       </a:pPr>
                       <a:r>
-                        <a:rPr lang="en-US" sz="1350" dirty="0">
+                        <a:rPr lang="en-US" sz="1250" dirty="0">
                           <a:solidFill>
                             <a:srgbClr val="1E293B"/>
                           </a:solidFill>
@@ -5379,9 +5513,9 @@
                           <a:ea typeface="Calibri" pitchFamily="34" charset="-122"/>
                           <a:cs typeface="Calibri" pitchFamily="34" charset="-120"/>
                         </a:rPr>
-                        <a:t>No</a:t>
+                        <a:t>DISEASE, CHEMICAL</a:t>
                       </a:r>
-                      <a:endParaRPr lang="en-US" sz="1350" dirty="0">
+                      <a:endParaRPr lang="en-US" sz="1250" dirty="0">
                         <a:latin typeface="Calibri" charset="0"/>
                         <a:ea typeface="Calibri" charset="0"/>
                         <a:cs typeface="Calibri" charset="0"/>
@@ -5439,7 +5573,7 @@
                         <a:buNone/>
                       </a:pPr>
                       <a:r>
-                        <a:rPr lang="en-US" sz="1350" dirty="0">
+                        <a:rPr lang="en-US" sz="1250" dirty="0">
                           <a:solidFill>
                             <a:srgbClr val="1E293B"/>
                           </a:solidFill>
@@ -5447,9 +5581,9 @@
                           <a:ea typeface="Calibri" pitchFamily="34" charset="-122"/>
                           <a:cs typeface="Calibri" pitchFamily="34" charset="-120"/>
                         </a:rPr>
-                        <a:t>Yes - target rules required</a:t>
+                        <a:t>CONDITION, SYMPTOM</a:t>
                       </a:r>
-                      <a:endParaRPr lang="en-US" sz="1350" dirty="0">
+                      <a:endParaRPr lang="en-US" sz="1250" dirty="0">
                         <a:latin typeface="Calibri" charset="0"/>
                         <a:ea typeface="Calibri" charset="0"/>
                         <a:cs typeface="Calibri" charset="0"/>
@@ -5504,7 +5638,7 @@
                   </a:ext>
                 </a:extLst>
               </a:tr>
-              <a:tr h="822960">
+              <a:tr h="585216">
                 <a:tc>
                   <a:txBody>
                     <a:bodyPr/>
@@ -5514,7 +5648,7 @@
                         <a:buNone/>
                       </a:pPr>
                       <a:r>
-                        <a:rPr lang="en-US" sz="1350" b="1" dirty="0">
+                        <a:rPr lang="en-US" sz="1250" b="1" dirty="0">
                           <a:solidFill>
                             <a:srgbClr val="1E293B"/>
                           </a:solidFill>
@@ -5522,9 +5656,9 @@
                           <a:ea typeface="Calibri" pitchFamily="34" charset="-122"/>
                           <a:cs typeface="Calibri" pitchFamily="34" charset="-120"/>
                         </a:rPr>
-                        <a:t>word2vec vocab size</a:t>
+                        <a:t>Needs custom setup?</a:t>
                       </a:r>
-                      <a:endParaRPr lang="en-US" sz="1350" dirty="0">
+                      <a:endParaRPr lang="en-US" sz="1250" dirty="0">
                         <a:latin typeface="Calibri" charset="0"/>
                         <a:ea typeface="Calibri" charset="0"/>
                         <a:cs typeface="Calibri" charset="0"/>
@@ -5582,7 +5716,7 @@
                         <a:buNone/>
                       </a:pPr>
                       <a:r>
-                        <a:rPr lang="en-US" sz="1350" dirty="0">
+                        <a:rPr lang="en-US" sz="1250" dirty="0">
                           <a:solidFill>
                             <a:srgbClr val="1E293B"/>
                           </a:solidFill>
@@ -5590,9 +5724,9 @@
                           <a:ea typeface="Calibri" pitchFamily="34" charset="-122"/>
                           <a:cs typeface="Calibri" pitchFamily="34" charset="-120"/>
                         </a:rPr>
-                        <a:t>2,166</a:t>
+                        <a:t>No</a:t>
                       </a:r>
-                      <a:endParaRPr lang="en-US" sz="1350" dirty="0">
+                      <a:endParaRPr lang="en-US" sz="1250" dirty="0">
                         <a:latin typeface="Calibri" charset="0"/>
                         <a:ea typeface="Calibri" charset="0"/>
                         <a:cs typeface="Calibri" charset="0"/>
@@ -5650,7 +5784,7 @@
                         <a:buNone/>
                       </a:pPr>
                       <a:r>
-                        <a:rPr lang="en-US" sz="1350" dirty="0">
+                        <a:rPr lang="en-US" sz="1250" dirty="0">
                           <a:solidFill>
                             <a:srgbClr val="1E293B"/>
                           </a:solidFill>
@@ -5658,9 +5792,9 @@
                           <a:ea typeface="Calibri" pitchFamily="34" charset="-122"/>
                           <a:cs typeface="Calibri" pitchFamily="34" charset="-120"/>
                         </a:rPr>
-                        <a:t>2,321</a:t>
+                        <a:t>No</a:t>
                       </a:r>
-                      <a:endParaRPr lang="en-US" sz="1350" dirty="0">
+                      <a:endParaRPr lang="en-US" sz="1250" dirty="0">
                         <a:latin typeface="Calibri" charset="0"/>
                         <a:ea typeface="Calibri" charset="0"/>
                         <a:cs typeface="Calibri" charset="0"/>
@@ -5718,7 +5852,7 @@
                         <a:buNone/>
                       </a:pPr>
                       <a:r>
-                        <a:rPr lang="en-US" sz="1350" dirty="0">
+                        <a:rPr lang="en-US" sz="1250" dirty="0">
                           <a:solidFill>
                             <a:srgbClr val="1E293B"/>
                           </a:solidFill>
@@ -5726,9 +5860,9 @@
                           <a:ea typeface="Calibri" pitchFamily="34" charset="-122"/>
                           <a:cs typeface="Calibri" pitchFamily="34" charset="-120"/>
                         </a:rPr>
-                        <a:t>2,223</a:t>
+                        <a:t>Yes - target rules required</a:t>
                       </a:r>
-                      <a:endParaRPr lang="en-US" sz="1350" dirty="0">
+                      <a:endParaRPr lang="en-US" sz="1250" dirty="0">
                         <a:latin typeface="Calibri" charset="0"/>
                         <a:ea typeface="Calibri" charset="0"/>
                         <a:cs typeface="Calibri" charset="0"/>
@@ -5783,7 +5917,7 @@
                   </a:ext>
                 </a:extLst>
               </a:tr>
-              <a:tr h="822960">
+              <a:tr h="585216">
                 <a:tc>
                   <a:txBody>
                     <a:bodyPr/>
@@ -5793,7 +5927,7 @@
                         <a:buNone/>
                       </a:pPr>
                       <a:r>
-                        <a:rPr lang="en-US" sz="1350" b="1" dirty="0">
+                        <a:rPr lang="en-US" sz="1250" b="1" dirty="0">
                           <a:solidFill>
                             <a:srgbClr val="1E293B"/>
                           </a:solidFill>
@@ -5801,9 +5935,9 @@
                           <a:ea typeface="Calibri" pitchFamily="34" charset="-122"/>
                           <a:cs typeface="Calibri" pitchFamily="34" charset="-120"/>
                         </a:rPr>
-                        <a:t>Best for</a:t>
+                        <a:t>Negation detection</a:t>
                       </a:r>
-                      <a:endParaRPr lang="en-US" sz="1350" dirty="0">
+                      <a:endParaRPr lang="en-US" sz="1250" dirty="0">
                         <a:latin typeface="Calibri" charset="0"/>
                         <a:ea typeface="Calibri" charset="0"/>
                         <a:cs typeface="Calibri" charset="0"/>
@@ -5861,7 +5995,7 @@
                         <a:buNone/>
                       </a:pPr>
                       <a:r>
-                        <a:rPr lang="en-US" sz="1350" dirty="0">
+                        <a:rPr lang="en-US" sz="1250" dirty="0">
                           <a:solidFill>
                             <a:srgbClr val="1E293B"/>
                           </a:solidFill>
@@ -5869,9 +6003,9 @@
                           <a:ea typeface="Calibri" pitchFamily="34" charset="-122"/>
                           <a:cs typeface="Calibri" pitchFamily="34" charset="-120"/>
                         </a:rPr>
-                        <a:t>Quick, general text</a:t>
+                        <a:t>Not supported</a:t>
                       </a:r>
-                      <a:endParaRPr lang="en-US" sz="1350" dirty="0">
+                      <a:endParaRPr lang="en-US" sz="1250" dirty="0">
                         <a:latin typeface="Calibri" charset="0"/>
                         <a:ea typeface="Calibri" charset="0"/>
                         <a:cs typeface="Calibri" charset="0"/>
@@ -5929,7 +6063,7 @@
                         <a:buNone/>
                       </a:pPr>
                       <a:r>
-                        <a:rPr lang="en-US" sz="1350" dirty="0">
+                        <a:rPr lang="en-US" sz="1250" dirty="0">
                           <a:solidFill>
                             <a:srgbClr val="1E293B"/>
                           </a:solidFill>
@@ -5937,9 +6071,9 @@
                           <a:ea typeface="Calibri" pitchFamily="34" charset="-122"/>
                           <a:cs typeface="Calibri" pitchFamily="34" charset="-120"/>
                         </a:rPr>
-                        <a:t>Clinical concept extraction</a:t>
+                        <a:t>Not supported</a:t>
                       </a:r>
-                      <a:endParaRPr lang="en-US" sz="1350" dirty="0">
+                      <a:endParaRPr lang="en-US" sz="1250" dirty="0">
                         <a:latin typeface="Calibri" charset="0"/>
                         <a:ea typeface="Calibri" charset="0"/>
                         <a:cs typeface="Calibri" charset="0"/>
@@ -5997,7 +6131,7 @@
                         <a:buNone/>
                       </a:pPr>
                       <a:r>
-                        <a:rPr lang="en-US" sz="1350" dirty="0">
+                        <a:rPr lang="en-US" sz="1250" dirty="0">
                           <a:solidFill>
                             <a:srgbClr val="1E293B"/>
                           </a:solidFill>
@@ -6005,9 +6139,9 @@
                           <a:ea typeface="Calibri" pitchFamily="34" charset="-122"/>
                           <a:cs typeface="Calibri" pitchFamily="34" charset="-120"/>
                         </a:rPr>
-                        <a:t>Negation &amp; context accuracy</a:t>
+                        <a:t>58 negations found</a:t>
                       </a:r>
-                      <a:endParaRPr lang="en-US" sz="1350" dirty="0">
+                      <a:endParaRPr lang="en-US" sz="1250" dirty="0">
                         <a:latin typeface="Calibri" charset="0"/>
                         <a:ea typeface="Calibri" charset="0"/>
                         <a:cs typeface="Calibri" charset="0"/>
@@ -6062,6 +6196,564 @@
                   </a:ext>
                 </a:extLst>
               </a:tr>
+              <a:tr h="585216">
+                <a:tc>
+                  <a:txBody>
+                    <a:bodyPr/>
+                    <a:lstStyle/>
+                    <a:p>
+                      <a:pPr marL="0" indent="0">
+                        <a:buNone/>
+                      </a:pPr>
+                      <a:r>
+                        <a:rPr lang="en-US" sz="1250" b="1" dirty="0">
+                          <a:solidFill>
+                            <a:srgbClr val="1E293B"/>
+                          </a:solidFill>
+                          <a:latin typeface="Calibri" pitchFamily="34" charset="0"/>
+                          <a:ea typeface="Calibri" pitchFamily="34" charset="-122"/>
+                          <a:cs typeface="Calibri" pitchFamily="34" charset="-120"/>
+                        </a:rPr>
+                        <a:t>word2vec vocab size</a:t>
+                      </a:r>
+                      <a:endParaRPr lang="en-US" sz="1250" dirty="0">
+                        <a:latin typeface="Calibri" charset="0"/>
+                        <a:ea typeface="Calibri" charset="0"/>
+                        <a:cs typeface="Calibri" charset="0"/>
+                      </a:endParaRPr>
+                    </a:p>
+                  </a:txBody>
+                  <a:tcPr anchor="ctr">
+                    <a:lnL w="9525" cap="flat" cmpd="sng" algn="ctr">
+                      <a:solidFill>
+                        <a:srgbClr val="E2E8F0"/>
+                      </a:solidFill>
+                      <a:prstDash val="solid"/>
+                      <a:round/>
+                      <a:headEnd type="none" w="med" len="med"/>
+                      <a:tailEnd type="none" w="med" len="med"/>
+                    </a:lnL>
+                    <a:lnR w="9525" cap="flat" cmpd="sng" algn="ctr">
+                      <a:solidFill>
+                        <a:srgbClr val="E2E8F0"/>
+                      </a:solidFill>
+                      <a:prstDash val="solid"/>
+                      <a:round/>
+                      <a:headEnd type="none" w="med" len="med"/>
+                      <a:tailEnd type="none" w="med" len="med"/>
+                    </a:lnR>
+                    <a:lnT w="9525" cap="flat" cmpd="sng" algn="ctr">
+                      <a:solidFill>
+                        <a:srgbClr val="E2E8F0"/>
+                      </a:solidFill>
+                      <a:prstDash val="solid"/>
+                      <a:round/>
+                      <a:headEnd type="none" w="med" len="med"/>
+                      <a:tailEnd type="none" w="med" len="med"/>
+                    </a:lnT>
+                    <a:lnB w="9525" cap="flat" cmpd="sng" algn="ctr">
+                      <a:solidFill>
+                        <a:srgbClr val="E2E8F0"/>
+                      </a:solidFill>
+                      <a:prstDash val="solid"/>
+                      <a:round/>
+                      <a:headEnd type="none" w="med" len="med"/>
+                      <a:tailEnd type="none" w="med" len="med"/>
+                    </a:lnB>
+                    <a:solidFill>
+                      <a:srgbClr val="F1F8F7"/>
+                    </a:solidFill>
+                  </a:tcPr>
+                </a:tc>
+                <a:tc>
+                  <a:txBody>
+                    <a:bodyPr/>
+                    <a:lstStyle/>
+                    <a:p>
+                      <a:pPr marL="0" indent="0" algn="ctr">
+                        <a:buNone/>
+                      </a:pPr>
+                      <a:r>
+                        <a:rPr lang="en-US" sz="1250" dirty="0">
+                          <a:solidFill>
+                            <a:srgbClr val="1E293B"/>
+                          </a:solidFill>
+                          <a:latin typeface="Calibri" pitchFamily="34" charset="0"/>
+                          <a:ea typeface="Calibri" pitchFamily="34" charset="-122"/>
+                          <a:cs typeface="Calibri" pitchFamily="34" charset="-120"/>
+                        </a:rPr>
+                        <a:t>2,306</a:t>
+                      </a:r>
+                      <a:endParaRPr lang="en-US" sz="1250" dirty="0">
+                        <a:latin typeface="Calibri" charset="0"/>
+                        <a:ea typeface="Calibri" charset="0"/>
+                        <a:cs typeface="Calibri" charset="0"/>
+                      </a:endParaRPr>
+                    </a:p>
+                  </a:txBody>
+                  <a:tcPr anchor="ctr">
+                    <a:lnL w="9525" cap="flat" cmpd="sng" algn="ctr">
+                      <a:solidFill>
+                        <a:srgbClr val="E2E8F0"/>
+                      </a:solidFill>
+                      <a:prstDash val="solid"/>
+                      <a:round/>
+                      <a:headEnd type="none" w="med" len="med"/>
+                      <a:tailEnd type="none" w="med" len="med"/>
+                    </a:lnL>
+                    <a:lnR w="9525" cap="flat" cmpd="sng" algn="ctr">
+                      <a:solidFill>
+                        <a:srgbClr val="E2E8F0"/>
+                      </a:solidFill>
+                      <a:prstDash val="solid"/>
+                      <a:round/>
+                      <a:headEnd type="none" w="med" len="med"/>
+                      <a:tailEnd type="none" w="med" len="med"/>
+                    </a:lnR>
+                    <a:lnT w="9525" cap="flat" cmpd="sng" algn="ctr">
+                      <a:solidFill>
+                        <a:srgbClr val="E2E8F0"/>
+                      </a:solidFill>
+                      <a:prstDash val="solid"/>
+                      <a:round/>
+                      <a:headEnd type="none" w="med" len="med"/>
+                      <a:tailEnd type="none" w="med" len="med"/>
+                    </a:lnT>
+                    <a:lnB w="9525" cap="flat" cmpd="sng" algn="ctr">
+                      <a:solidFill>
+                        <a:srgbClr val="E2E8F0"/>
+                      </a:solidFill>
+                      <a:prstDash val="solid"/>
+                      <a:round/>
+                      <a:headEnd type="none" w="med" len="med"/>
+                      <a:tailEnd type="none" w="med" len="med"/>
+                    </a:lnB>
+                    <a:solidFill>
+                      <a:srgbClr val="F1F8F7"/>
+                    </a:solidFill>
+                  </a:tcPr>
+                </a:tc>
+                <a:tc>
+                  <a:txBody>
+                    <a:bodyPr/>
+                    <a:lstStyle/>
+                    <a:p>
+                      <a:pPr marL="0" indent="0" algn="ctr">
+                        <a:buNone/>
+                      </a:pPr>
+                      <a:r>
+                        <a:rPr lang="en-US" sz="1250" dirty="0">
+                          <a:solidFill>
+                            <a:srgbClr val="1E293B"/>
+                          </a:solidFill>
+                          <a:latin typeface="Calibri" pitchFamily="34" charset="0"/>
+                          <a:ea typeface="Calibri" pitchFamily="34" charset="-122"/>
+                          <a:cs typeface="Calibri" pitchFamily="34" charset="-120"/>
+                        </a:rPr>
+                        <a:t>2,455</a:t>
+                      </a:r>
+                      <a:endParaRPr lang="en-US" sz="1250" dirty="0">
+                        <a:latin typeface="Calibri" charset="0"/>
+                        <a:ea typeface="Calibri" charset="0"/>
+                        <a:cs typeface="Calibri" charset="0"/>
+                      </a:endParaRPr>
+                    </a:p>
+                  </a:txBody>
+                  <a:tcPr anchor="ctr">
+                    <a:lnL w="9525" cap="flat" cmpd="sng" algn="ctr">
+                      <a:solidFill>
+                        <a:srgbClr val="E2E8F0"/>
+                      </a:solidFill>
+                      <a:prstDash val="solid"/>
+                      <a:round/>
+                      <a:headEnd type="none" w="med" len="med"/>
+                      <a:tailEnd type="none" w="med" len="med"/>
+                    </a:lnL>
+                    <a:lnR w="9525" cap="flat" cmpd="sng" algn="ctr">
+                      <a:solidFill>
+                        <a:srgbClr val="E2E8F0"/>
+                      </a:solidFill>
+                      <a:prstDash val="solid"/>
+                      <a:round/>
+                      <a:headEnd type="none" w="med" len="med"/>
+                      <a:tailEnd type="none" w="med" len="med"/>
+                    </a:lnR>
+                    <a:lnT w="9525" cap="flat" cmpd="sng" algn="ctr">
+                      <a:solidFill>
+                        <a:srgbClr val="E2E8F0"/>
+                      </a:solidFill>
+                      <a:prstDash val="solid"/>
+                      <a:round/>
+                      <a:headEnd type="none" w="med" len="med"/>
+                      <a:tailEnd type="none" w="med" len="med"/>
+                    </a:lnT>
+                    <a:lnB w="9525" cap="flat" cmpd="sng" algn="ctr">
+                      <a:solidFill>
+                        <a:srgbClr val="E2E8F0"/>
+                      </a:solidFill>
+                      <a:prstDash val="solid"/>
+                      <a:round/>
+                      <a:headEnd type="none" w="med" len="med"/>
+                      <a:tailEnd type="none" w="med" len="med"/>
+                    </a:lnB>
+                    <a:solidFill>
+                      <a:srgbClr val="F1F8F7"/>
+                    </a:solidFill>
+                  </a:tcPr>
+                </a:tc>
+                <a:tc>
+                  <a:txBody>
+                    <a:bodyPr/>
+                    <a:lstStyle/>
+                    <a:p>
+                      <a:pPr marL="0" indent="0" algn="ctr">
+                        <a:buNone/>
+                      </a:pPr>
+                      <a:r>
+                        <a:rPr lang="en-US" sz="1250" dirty="0">
+                          <a:solidFill>
+                            <a:srgbClr val="1E293B"/>
+                          </a:solidFill>
+                          <a:latin typeface="Calibri" pitchFamily="34" charset="0"/>
+                          <a:ea typeface="Calibri" pitchFamily="34" charset="-122"/>
+                          <a:cs typeface="Calibri" pitchFamily="34" charset="-120"/>
+                        </a:rPr>
+                        <a:t>2,386</a:t>
+                      </a:r>
+                      <a:endParaRPr lang="en-US" sz="1250" dirty="0">
+                        <a:latin typeface="Calibri" charset="0"/>
+                        <a:ea typeface="Calibri" charset="0"/>
+                        <a:cs typeface="Calibri" charset="0"/>
+                      </a:endParaRPr>
+                    </a:p>
+                  </a:txBody>
+                  <a:tcPr anchor="ctr">
+                    <a:lnL w="9525" cap="flat" cmpd="sng" algn="ctr">
+                      <a:solidFill>
+                        <a:srgbClr val="E2E8F0"/>
+                      </a:solidFill>
+                      <a:prstDash val="solid"/>
+                      <a:round/>
+                      <a:headEnd type="none" w="med" len="med"/>
+                      <a:tailEnd type="none" w="med" len="med"/>
+                    </a:lnL>
+                    <a:lnR w="9525" cap="flat" cmpd="sng" algn="ctr">
+                      <a:solidFill>
+                        <a:srgbClr val="E2E8F0"/>
+                      </a:solidFill>
+                      <a:prstDash val="solid"/>
+                      <a:round/>
+                      <a:headEnd type="none" w="med" len="med"/>
+                      <a:tailEnd type="none" w="med" len="med"/>
+                    </a:lnR>
+                    <a:lnT w="9525" cap="flat" cmpd="sng" algn="ctr">
+                      <a:solidFill>
+                        <a:srgbClr val="E2E8F0"/>
+                      </a:solidFill>
+                      <a:prstDash val="solid"/>
+                      <a:round/>
+                      <a:headEnd type="none" w="med" len="med"/>
+                      <a:tailEnd type="none" w="med" len="med"/>
+                    </a:lnT>
+                    <a:lnB w="9525" cap="flat" cmpd="sng" algn="ctr">
+                      <a:solidFill>
+                        <a:srgbClr val="E2E8F0"/>
+                      </a:solidFill>
+                      <a:prstDash val="solid"/>
+                      <a:round/>
+                      <a:headEnd type="none" w="med" len="med"/>
+                      <a:tailEnd type="none" w="med" len="med"/>
+                    </a:lnB>
+                    <a:solidFill>
+                      <a:srgbClr val="F1F8F7"/>
+                    </a:solidFill>
+                  </a:tcPr>
+                </a:tc>
+                <a:extLst>
+                  <a:ext uri="{0D108BD9-81ED-4DB2-BD59-A6C34878D82A}">
+                    <a16:rowId xmlns:a16="http://schemas.microsoft.com/office/drawing/2014/main" val="10006"/>
+                  </a:ext>
+                </a:extLst>
+              </a:tr>
+              <a:tr h="585216">
+                <a:tc>
+                  <a:txBody>
+                    <a:bodyPr/>
+                    <a:lstStyle/>
+                    <a:p>
+                      <a:pPr marL="0" indent="0">
+                        <a:buNone/>
+                      </a:pPr>
+                      <a:r>
+                        <a:rPr lang="en-US" sz="1250" b="1" dirty="0">
+                          <a:solidFill>
+                            <a:srgbClr val="1E293B"/>
+                          </a:solidFill>
+                          <a:latin typeface="Calibri" pitchFamily="34" charset="0"/>
+                          <a:ea typeface="Calibri" pitchFamily="34" charset="-122"/>
+                          <a:cs typeface="Calibri" pitchFamily="34" charset="-120"/>
+                        </a:rPr>
+                        <a:t>Best for</a:t>
+                      </a:r>
+                      <a:endParaRPr lang="en-US" sz="1250" dirty="0">
+                        <a:latin typeface="Calibri" charset="0"/>
+                        <a:ea typeface="Calibri" charset="0"/>
+                        <a:cs typeface="Calibri" charset="0"/>
+                      </a:endParaRPr>
+                    </a:p>
+                  </a:txBody>
+                  <a:tcPr anchor="ctr">
+                    <a:lnL w="9525" cap="flat" cmpd="sng" algn="ctr">
+                      <a:solidFill>
+                        <a:srgbClr val="E2E8F0"/>
+                      </a:solidFill>
+                      <a:prstDash val="solid"/>
+                      <a:round/>
+                      <a:headEnd type="none" w="med" len="med"/>
+                      <a:tailEnd type="none" w="med" len="med"/>
+                    </a:lnL>
+                    <a:lnR w="9525" cap="flat" cmpd="sng" algn="ctr">
+                      <a:solidFill>
+                        <a:srgbClr val="E2E8F0"/>
+                      </a:solidFill>
+                      <a:prstDash val="solid"/>
+                      <a:round/>
+                      <a:headEnd type="none" w="med" len="med"/>
+                      <a:tailEnd type="none" w="med" len="med"/>
+                    </a:lnR>
+                    <a:lnT w="9525" cap="flat" cmpd="sng" algn="ctr">
+                      <a:solidFill>
+                        <a:srgbClr val="E2E8F0"/>
+                      </a:solidFill>
+                      <a:prstDash val="solid"/>
+                      <a:round/>
+                      <a:headEnd type="none" w="med" len="med"/>
+                      <a:tailEnd type="none" w="med" len="med"/>
+                    </a:lnT>
+                    <a:lnB w="9525" cap="flat" cmpd="sng" algn="ctr">
+                      <a:solidFill>
+                        <a:srgbClr val="E2E8F0"/>
+                      </a:solidFill>
+                      <a:prstDash val="solid"/>
+                      <a:round/>
+                      <a:headEnd type="none" w="med" len="med"/>
+                      <a:tailEnd type="none" w="med" len="med"/>
+                    </a:lnB>
+                    <a:solidFill>
+                      <a:srgbClr val="FFFFFF"/>
+                    </a:solidFill>
+                  </a:tcPr>
+                </a:tc>
+                <a:tc>
+                  <a:txBody>
+                    <a:bodyPr/>
+                    <a:lstStyle/>
+                    <a:p>
+                      <a:pPr marL="0" indent="0" algn="ctr">
+                        <a:buNone/>
+                      </a:pPr>
+                      <a:r>
+                        <a:rPr lang="en-US" sz="1250" dirty="0">
+                          <a:solidFill>
+                            <a:srgbClr val="1E293B"/>
+                          </a:solidFill>
+                          <a:latin typeface="Calibri" pitchFamily="34" charset="0"/>
+                          <a:ea typeface="Calibri" pitchFamily="34" charset="-122"/>
+                          <a:cs typeface="Calibri" pitchFamily="34" charset="-120"/>
+                        </a:rPr>
+                        <a:t>Quick, general text</a:t>
+                      </a:r>
+                      <a:endParaRPr lang="en-US" sz="1250" dirty="0">
+                        <a:latin typeface="Calibri" charset="0"/>
+                        <a:ea typeface="Calibri" charset="0"/>
+                        <a:cs typeface="Calibri" charset="0"/>
+                      </a:endParaRPr>
+                    </a:p>
+                  </a:txBody>
+                  <a:tcPr anchor="ctr">
+                    <a:lnL w="9525" cap="flat" cmpd="sng" algn="ctr">
+                      <a:solidFill>
+                        <a:srgbClr val="E2E8F0"/>
+                      </a:solidFill>
+                      <a:prstDash val="solid"/>
+                      <a:round/>
+                      <a:headEnd type="none" w="med" len="med"/>
+                      <a:tailEnd type="none" w="med" len="med"/>
+                    </a:lnL>
+                    <a:lnR w="9525" cap="flat" cmpd="sng" algn="ctr">
+                      <a:solidFill>
+                        <a:srgbClr val="E2E8F0"/>
+                      </a:solidFill>
+                      <a:prstDash val="solid"/>
+                      <a:round/>
+                      <a:headEnd type="none" w="med" len="med"/>
+                      <a:tailEnd type="none" w="med" len="med"/>
+                    </a:lnR>
+                    <a:lnT w="9525" cap="flat" cmpd="sng" algn="ctr">
+                      <a:solidFill>
+                        <a:srgbClr val="E2E8F0"/>
+                      </a:solidFill>
+                      <a:prstDash val="solid"/>
+                      <a:round/>
+                      <a:headEnd type="none" w="med" len="med"/>
+                      <a:tailEnd type="none" w="med" len="med"/>
+                    </a:lnT>
+                    <a:lnB w="9525" cap="flat" cmpd="sng" algn="ctr">
+                      <a:solidFill>
+                        <a:srgbClr val="E2E8F0"/>
+                      </a:solidFill>
+                      <a:prstDash val="solid"/>
+                      <a:round/>
+                      <a:headEnd type="none" w="med" len="med"/>
+                      <a:tailEnd type="none" w="med" len="med"/>
+                    </a:lnB>
+                    <a:solidFill>
+                      <a:srgbClr val="FFFFFF"/>
+                    </a:solidFill>
+                  </a:tcPr>
+                </a:tc>
+                <a:tc>
+                  <a:txBody>
+                    <a:bodyPr/>
+                    <a:lstStyle/>
+                    <a:p>
+                      <a:pPr marL="0" indent="0" algn="ctr">
+                        <a:buNone/>
+                      </a:pPr>
+                      <a:r>
+                        <a:rPr lang="en-US" sz="1250" dirty="0">
+                          <a:solidFill>
+                            <a:srgbClr val="1E293B"/>
+                          </a:solidFill>
+                          <a:latin typeface="Calibri" pitchFamily="34" charset="0"/>
+                          <a:ea typeface="Calibri" pitchFamily="34" charset="-122"/>
+                          <a:cs typeface="Calibri" pitchFamily="34" charset="-120"/>
+                        </a:rPr>
+                        <a:t>Clinical concept extraction</a:t>
+                      </a:r>
+                      <a:endParaRPr lang="en-US" sz="1250" dirty="0">
+                        <a:latin typeface="Calibri" charset="0"/>
+                        <a:ea typeface="Calibri" charset="0"/>
+                        <a:cs typeface="Calibri" charset="0"/>
+                      </a:endParaRPr>
+                    </a:p>
+                  </a:txBody>
+                  <a:tcPr anchor="ctr">
+                    <a:lnL w="9525" cap="flat" cmpd="sng" algn="ctr">
+                      <a:solidFill>
+                        <a:srgbClr val="E2E8F0"/>
+                      </a:solidFill>
+                      <a:prstDash val="solid"/>
+                      <a:round/>
+                      <a:headEnd type="none" w="med" len="med"/>
+                      <a:tailEnd type="none" w="med" len="med"/>
+                    </a:lnL>
+                    <a:lnR w="9525" cap="flat" cmpd="sng" algn="ctr">
+                      <a:solidFill>
+                        <a:srgbClr val="E2E8F0"/>
+                      </a:solidFill>
+                      <a:prstDash val="solid"/>
+                      <a:round/>
+                      <a:headEnd type="none" w="med" len="med"/>
+                      <a:tailEnd type="none" w="med" len="med"/>
+                    </a:lnR>
+                    <a:lnT w="9525" cap="flat" cmpd="sng" algn="ctr">
+                      <a:solidFill>
+                        <a:srgbClr val="E2E8F0"/>
+                      </a:solidFill>
+                      <a:prstDash val="solid"/>
+                      <a:round/>
+                      <a:headEnd type="none" w="med" len="med"/>
+                      <a:tailEnd type="none" w="med" len="med"/>
+                    </a:lnT>
+                    <a:lnB w="9525" cap="flat" cmpd="sng" algn="ctr">
+                      <a:solidFill>
+                        <a:srgbClr val="E2E8F0"/>
+                      </a:solidFill>
+                      <a:prstDash val="solid"/>
+                      <a:round/>
+                      <a:headEnd type="none" w="med" len="med"/>
+                      <a:tailEnd type="none" w="med" len="med"/>
+                    </a:lnB>
+                    <a:solidFill>
+                      <a:srgbClr val="FFFFFF"/>
+                    </a:solidFill>
+                  </a:tcPr>
+                </a:tc>
+                <a:tc>
+                  <a:txBody>
+                    <a:bodyPr/>
+                    <a:lstStyle/>
+                    <a:p>
+                      <a:pPr marL="0" indent="0" algn="ctr">
+                        <a:buNone/>
+                      </a:pPr>
+                      <a:r>
+                        <a:rPr lang="en-US" sz="1250" dirty="0">
+                          <a:solidFill>
+                            <a:srgbClr val="1E293B"/>
+                          </a:solidFill>
+                          <a:latin typeface="Calibri" pitchFamily="34" charset="0"/>
+                          <a:ea typeface="Calibri" pitchFamily="34" charset="-122"/>
+                          <a:cs typeface="Calibri" pitchFamily="34" charset="-120"/>
+                        </a:rPr>
+                        <a:t>Negation &amp; context accuracy</a:t>
+                      </a:r>
+                      <a:endParaRPr lang="en-US" sz="1250" dirty="0">
+                        <a:latin typeface="Calibri" charset="0"/>
+                        <a:ea typeface="Calibri" charset="0"/>
+                        <a:cs typeface="Calibri" charset="0"/>
+                      </a:endParaRPr>
+                    </a:p>
+                  </a:txBody>
+                  <a:tcPr anchor="ctr">
+                    <a:lnL w="9525" cap="flat" cmpd="sng" algn="ctr">
+                      <a:solidFill>
+                        <a:srgbClr val="E2E8F0"/>
+                      </a:solidFill>
+                      <a:prstDash val="solid"/>
+                      <a:round/>
+                      <a:headEnd type="none" w="med" len="med"/>
+                      <a:tailEnd type="none" w="med" len="med"/>
+                    </a:lnL>
+                    <a:lnR w="9525" cap="flat" cmpd="sng" algn="ctr">
+                      <a:solidFill>
+                        <a:srgbClr val="E2E8F0"/>
+                      </a:solidFill>
+                      <a:prstDash val="solid"/>
+                      <a:round/>
+                      <a:headEnd type="none" w="med" len="med"/>
+                      <a:tailEnd type="none" w="med" len="med"/>
+                    </a:lnR>
+                    <a:lnT w="9525" cap="flat" cmpd="sng" algn="ctr">
+                      <a:solidFill>
+                        <a:srgbClr val="E2E8F0"/>
+                      </a:solidFill>
+                      <a:prstDash val="solid"/>
+                      <a:round/>
+                      <a:headEnd type="none" w="med" len="med"/>
+                      <a:tailEnd type="none" w="med" len="med"/>
+                    </a:lnT>
+                    <a:lnB w="9525" cap="flat" cmpd="sng" algn="ctr">
+                      <a:solidFill>
+                        <a:srgbClr val="E2E8F0"/>
+                      </a:solidFill>
+                      <a:prstDash val="solid"/>
+                      <a:round/>
+                      <a:headEnd type="none" w="med" len="med"/>
+                      <a:tailEnd type="none" w="med" len="med"/>
+                    </a:lnB>
+                    <a:solidFill>
+                      <a:srgbClr val="FFFFFF"/>
+                    </a:solidFill>
+                  </a:tcPr>
+                </a:tc>
+                <a:extLst>
+                  <a:ext uri="{0D108BD9-81ED-4DB2-BD59-A6C34878D82A}">
+                    <a16:rowId xmlns:a16="http://schemas.microsoft.com/office/drawing/2014/main" val="10007"/>
+                  </a:ext>
+                </a:extLst>
+              </a:tr>
             </a:tbl>
           </a:graphicData>
         </a:graphic>
@@ -6099,7 +6791,7 @@
                 <a:ea typeface="Calibri" pitchFamily="34" charset="-122"/>
                 <a:cs typeface="Calibri" pitchFamily="34" charset="-120"/>
               </a:rPr>
-              <a:t>7</a:t>
+              <a:t>13</a:t>
             </a:r>
             <a:endParaRPr lang="en-US" sz="1000" dirty="0"/>
           </a:p>
@@ -6113,9 +6805,9 @@
 </p:sld>
 </file>
 
-<file path=ppt/slides/slide8.xml><?xml version="1.0" encoding="utf-8"?>
+<file path=ppt/slides/slide14.xml><?xml version="1.0" encoding="utf-8"?>
 <p:sld xmlns:a="http://schemas.openxmlformats.org/drawingml/2006/main" xmlns:r="http://schemas.openxmlformats.org/officeDocument/2006/relationships" xmlns:p="http://schemas.openxmlformats.org/presentationml/2006/main">
-  <p:cSld name="Slide 8">
+  <p:cSld name="Slide 14">
     <p:bg>
       <p:bgPr>
         <a:solidFill>
@@ -6521,7 +7213,4002 @@
                 <a:ea typeface="Calibri" pitchFamily="34" charset="-122"/>
                 <a:cs typeface="Calibri" pitchFamily="34" charset="-120"/>
               </a:rPr>
+              <a:t>14</a:t>
+            </a:r>
+            <a:endParaRPr lang="en-US" sz="1000" dirty="0"/>
+          </a:p>
+        </p:txBody>
+      </p:sp>
+    </p:spTree>
+  </p:cSld>
+  <p:clrMapOvr>
+    <a:masterClrMapping/>
+  </p:clrMapOvr>
+</p:sld>
+</file>
+
+<file path=ppt/slides/slide2.xml><?xml version="1.0" encoding="utf-8"?>
+<p:sld xmlns:a="http://schemas.openxmlformats.org/drawingml/2006/main" xmlns:r="http://schemas.openxmlformats.org/officeDocument/2006/relationships" xmlns:p="http://schemas.openxmlformats.org/presentationml/2006/main">
+  <p:cSld name="Slide 2">
+    <p:bg>
+      <p:bgPr>
+        <a:solidFill>
+          <a:srgbClr val="F4FAF9"/>
+        </a:solidFill>
+        <a:effectLst/>
+      </p:bgPr>
+    </p:bg>
+    <p:spTree>
+      <p:nvGrpSpPr>
+        <p:cNvPr id="1" name=""/>
+        <p:cNvGrpSpPr/>
+        <p:nvPr/>
+      </p:nvGrpSpPr>
+      <p:grpSpPr>
+        <a:xfrm>
+          <a:off x="0" y="0"/>
+          <a:ext cx="0" cy="0"/>
+          <a:chOff x="0" y="0"/>
+          <a:chExt cx="0" cy="0"/>
+        </a:xfrm>
+      </p:grpSpPr>
+      <p:sp>
+        <p:nvSpPr>
+          <p:cNvPr id="2" name="Text 0"/>
+          <p:cNvSpPr/>
+          <p:nvPr/>
+        </p:nvSpPr>
+        <p:spPr>
+          <a:xfrm>
+            <a:off x="548640" y="457200"/>
+            <a:ext cx="7315200" cy="365760"/>
+          </a:xfrm>
+          <a:prstGeom prst="rect">
+            <a:avLst/>
+          </a:prstGeom>
+          <a:noFill/>
+          <a:ln/>
+        </p:spPr>
+        <p:txBody>
+          <a:bodyPr wrap="square" rtlCol="0" anchor="ctr"/>
+          <a:lstStyle/>
+          <a:p>
+            <a:pPr marL="0" indent="0">
+              <a:buNone/>
+            </a:pPr>
+            <a:r>
+              <a:rPr lang="en-US" sz="1300" b="1" kern="0" spc="200" dirty="0">
+                <a:solidFill>
+                  <a:srgbClr val="00A896"/>
+                </a:solidFill>
+                <a:latin typeface="Calibri" pitchFamily="34" charset="0"/>
+                <a:ea typeface="Calibri" pitchFamily="34" charset="-122"/>
+                <a:cs typeface="Calibri" pitchFamily="34" charset="-120"/>
+              </a:rPr>
+              <a:t>BACKGROUND</a:t>
+            </a:r>
+            <a:endParaRPr lang="en-US" sz="1300" dirty="0"/>
+          </a:p>
+        </p:txBody>
+      </p:sp>
+      <p:sp>
+        <p:nvSpPr>
+          <p:cNvPr id="3" name="Text 1"/>
+          <p:cNvSpPr/>
+          <p:nvPr/>
+        </p:nvSpPr>
+        <p:spPr>
+          <a:xfrm>
+            <a:off x="548640" y="868680"/>
+            <a:ext cx="10972800" cy="640080"/>
+          </a:xfrm>
+          <a:prstGeom prst="rect">
+            <a:avLst/>
+          </a:prstGeom>
+          <a:noFill/>
+          <a:ln/>
+        </p:spPr>
+        <p:txBody>
+          <a:bodyPr wrap="square" rtlCol="0" anchor="ctr"/>
+          <a:lstStyle/>
+          <a:p>
+            <a:pPr marL="0" indent="0">
+              <a:buNone/>
+            </a:pPr>
+            <a:r>
+              <a:rPr lang="en-US" sz="3000" b="1" dirty="0">
+                <a:solidFill>
+                  <a:srgbClr val="1E293B"/>
+                </a:solidFill>
+                <a:latin typeface="Cambria" pitchFamily="34" charset="0"/>
+                <a:ea typeface="Cambria" pitchFamily="34" charset="-122"/>
+                <a:cs typeface="Cambria" pitchFamily="34" charset="-120"/>
+              </a:rPr>
+              <a:t>Why Compare Three NLP Tools on Clinical Text?</a:t>
+            </a:r>
+            <a:endParaRPr lang="en-US" sz="3000" dirty="0"/>
+          </a:p>
+        </p:txBody>
+      </p:sp>
+      <p:sp>
+        <p:nvSpPr>
+          <p:cNvPr id="4" name="Shape 2"/>
+          <p:cNvSpPr/>
+          <p:nvPr/>
+        </p:nvSpPr>
+        <p:spPr>
+          <a:xfrm>
+            <a:off x="548640" y="1874520"/>
+            <a:ext cx="3520440" cy="3200400"/>
+          </a:xfrm>
+          <a:prstGeom prst="roundRect">
+            <a:avLst>
+              <a:gd name="adj" fmla="val 2286"/>
+            </a:avLst>
+          </a:prstGeom>
+          <a:solidFill>
+            <a:srgbClr val="FFFFFF"/>
+          </a:solidFill>
+          <a:ln/>
+          <a:effectLst>
+            <a:outerShdw blurRad="101600" dist="38100" dir="5400000" algn="bl" rotWithShape="0">
+              <a:srgbClr val="000000">
+                <a:alpha val="10000"/>
+              </a:srgbClr>
+            </a:outerShdw>
+          </a:effectLst>
+        </p:spPr>
+      </p:sp>
+      <p:sp>
+        <p:nvSpPr>
+          <p:cNvPr id="6" name="Text 3"/>
+          <p:cNvSpPr/>
+          <p:nvPr/>
+        </p:nvSpPr>
+        <p:spPr>
+          <a:xfrm>
+            <a:off x="822960" y="2788920"/>
+            <a:ext cx="2971800" cy="548640"/>
+          </a:xfrm>
+          <a:prstGeom prst="rect">
+            <a:avLst/>
+          </a:prstGeom>
+          <a:noFill/>
+          <a:ln/>
+        </p:spPr>
+        <p:txBody>
+          <a:bodyPr wrap="square" rtlCol="0" anchor="ctr"/>
+          <a:lstStyle/>
+          <a:p>
+            <a:pPr marL="0" indent="0">
+              <a:buNone/>
+            </a:pPr>
+            <a:r>
+              <a:rPr lang="en-US" sz="1600" b="1" dirty="0">
+                <a:solidFill>
+                  <a:srgbClr val="028090"/>
+                </a:solidFill>
+                <a:latin typeface="Calibri" pitchFamily="34" charset="0"/>
+                <a:ea typeface="Calibri" pitchFamily="34" charset="-122"/>
+                <a:cs typeface="Calibri" pitchFamily="34" charset="-120"/>
+              </a:rPr>
+              <a:t>The Problem It Solves</a:t>
+            </a:r>
+            <a:endParaRPr lang="en-US" sz="1600" dirty="0"/>
+          </a:p>
+        </p:txBody>
+      </p:sp>
+      <p:sp>
+        <p:nvSpPr>
+          <p:cNvPr id="7" name="Text 4"/>
+          <p:cNvSpPr/>
+          <p:nvPr/>
+        </p:nvSpPr>
+        <p:spPr>
+          <a:xfrm>
+            <a:off x="822960" y="3337560"/>
+            <a:ext cx="2971800" cy="1463040"/>
+          </a:xfrm>
+          <a:prstGeom prst="rect">
+            <a:avLst/>
+          </a:prstGeom>
+          <a:noFill/>
+          <a:ln/>
+        </p:spPr>
+        <p:txBody>
+          <a:bodyPr wrap="square" rtlCol="0" anchor="t"/>
+          <a:lstStyle/>
+          <a:p>
+            <a:pPr marL="0" indent="0">
+              <a:buNone/>
+            </a:pPr>
+            <a:r>
+              <a:rPr lang="en-US" sz="1350" dirty="0">
+                <a:solidFill>
+                  <a:srgbClr val="1E293B"/>
+                </a:solidFill>
+                <a:latin typeface="Calibri" pitchFamily="34" charset="0"/>
+                <a:ea typeface="Calibri" pitchFamily="34" charset="-122"/>
+                <a:cs typeface="Calibri" pitchFamily="34" charset="-120"/>
+              </a:rPr>
+              <a:t>General NLP tools miss a lot of clinical meaning - they don't know 'MI' means heart attack, or that 'denies pain' is a negative finding.</a:t>
+            </a:r>
+            <a:endParaRPr lang="en-US" sz="1350" dirty="0"/>
+          </a:p>
+        </p:txBody>
+      </p:sp>
+      <p:sp>
+        <p:nvSpPr>
+          <p:cNvPr id="8" name="Shape 5"/>
+          <p:cNvSpPr/>
+          <p:nvPr/>
+        </p:nvSpPr>
+        <p:spPr>
+          <a:xfrm>
+            <a:off x="4389120" y="1874520"/>
+            <a:ext cx="3520440" cy="3200400"/>
+          </a:xfrm>
+          <a:prstGeom prst="roundRect">
+            <a:avLst>
+              <a:gd name="adj" fmla="val 2286"/>
+            </a:avLst>
+          </a:prstGeom>
+          <a:solidFill>
+            <a:srgbClr val="FFFFFF"/>
+          </a:solidFill>
+          <a:ln/>
+          <a:effectLst>
+            <a:outerShdw blurRad="101600" dist="38100" dir="5400000" algn="bl" rotWithShape="0">
+              <a:srgbClr val="000000">
+                <a:alpha val="10000"/>
+              </a:srgbClr>
+            </a:outerShdw>
+          </a:effectLst>
+        </p:spPr>
+      </p:sp>
+      <p:sp>
+        <p:nvSpPr>
+          <p:cNvPr id="10" name="Text 6"/>
+          <p:cNvSpPr/>
+          <p:nvPr/>
+        </p:nvSpPr>
+        <p:spPr>
+          <a:xfrm>
+            <a:off x="4663440" y="2788920"/>
+            <a:ext cx="2971800" cy="548640"/>
+          </a:xfrm>
+          <a:prstGeom prst="rect">
+            <a:avLst/>
+          </a:prstGeom>
+          <a:noFill/>
+          <a:ln/>
+        </p:spPr>
+        <p:txBody>
+          <a:bodyPr wrap="square" rtlCol="0" anchor="ctr"/>
+          <a:lstStyle/>
+          <a:p>
+            <a:pPr marL="0" indent="0">
+              <a:buNone/>
+            </a:pPr>
+            <a:r>
+              <a:rPr lang="en-US" sz="1600" b="1" dirty="0">
+                <a:solidFill>
+                  <a:srgbClr val="028090"/>
+                </a:solidFill>
+                <a:latin typeface="Calibri" pitchFamily="34" charset="0"/>
+                <a:ea typeface="Calibri" pitchFamily="34" charset="-122"/>
+                <a:cs typeface="Calibri" pitchFamily="34" charset="-120"/>
+              </a:rPr>
+              <a:t>What Makes It Different</a:t>
+            </a:r>
+            <a:endParaRPr lang="en-US" sz="1600" dirty="0"/>
+          </a:p>
+        </p:txBody>
+      </p:sp>
+      <p:sp>
+        <p:nvSpPr>
+          <p:cNvPr id="11" name="Text 7"/>
+          <p:cNvSpPr/>
+          <p:nvPr/>
+        </p:nvSpPr>
+        <p:spPr>
+          <a:xfrm>
+            <a:off x="4663440" y="3337560"/>
+            <a:ext cx="2971800" cy="1463040"/>
+          </a:xfrm>
+          <a:prstGeom prst="rect">
+            <a:avLst/>
+          </a:prstGeom>
+          <a:noFill/>
+          <a:ln/>
+        </p:spPr>
+        <p:txBody>
+          <a:bodyPr wrap="square" rtlCol="0" anchor="t"/>
+          <a:lstStyle/>
+          <a:p>
+            <a:pPr marL="0" indent="0">
+              <a:buNone/>
+            </a:pPr>
+            <a:r>
+              <a:rPr lang="en-US" sz="1350" dirty="0">
+                <a:solidFill>
+                  <a:srgbClr val="1E293B"/>
+                </a:solidFill>
+                <a:latin typeface="Calibri" pitchFamily="34" charset="0"/>
+                <a:ea typeface="Calibri" pitchFamily="34" charset="-122"/>
+                <a:cs typeface="Calibri" pitchFamily="34" charset="-120"/>
+              </a:rPr>
+              <a:t>spaCy is general-purpose. scispaCy adds biomedical training. medspaCy adds clinical context - negation, family history, hypothetical statements.</a:t>
+            </a:r>
+            <a:endParaRPr lang="en-US" sz="1350" dirty="0"/>
+          </a:p>
+        </p:txBody>
+      </p:sp>
+      <p:sp>
+        <p:nvSpPr>
+          <p:cNvPr id="12" name="Shape 8"/>
+          <p:cNvSpPr/>
+          <p:nvPr/>
+        </p:nvSpPr>
+        <p:spPr>
+          <a:xfrm>
+            <a:off x="8229600" y="1874520"/>
+            <a:ext cx="3520440" cy="3200400"/>
+          </a:xfrm>
+          <a:prstGeom prst="roundRect">
+            <a:avLst>
+              <a:gd name="adj" fmla="val 2286"/>
+            </a:avLst>
+          </a:prstGeom>
+          <a:solidFill>
+            <a:srgbClr val="FFFFFF"/>
+          </a:solidFill>
+          <a:ln/>
+          <a:effectLst>
+            <a:outerShdw blurRad="101600" dist="38100" dir="5400000" algn="bl" rotWithShape="0">
+              <a:srgbClr val="000000">
+                <a:alpha val="10000"/>
+              </a:srgbClr>
+            </a:outerShdw>
+          </a:effectLst>
+        </p:spPr>
+      </p:sp>
+      <p:sp>
+        <p:nvSpPr>
+          <p:cNvPr id="14" name="Text 9"/>
+          <p:cNvSpPr/>
+          <p:nvPr/>
+        </p:nvSpPr>
+        <p:spPr>
+          <a:xfrm>
+            <a:off x="8503920" y="2788920"/>
+            <a:ext cx="2971800" cy="548640"/>
+          </a:xfrm>
+          <a:prstGeom prst="rect">
+            <a:avLst/>
+          </a:prstGeom>
+          <a:noFill/>
+          <a:ln/>
+        </p:spPr>
+        <p:txBody>
+          <a:bodyPr wrap="square" rtlCol="0" anchor="ctr"/>
+          <a:lstStyle/>
+          <a:p>
+            <a:pPr marL="0" indent="0">
+              <a:buNone/>
+            </a:pPr>
+            <a:r>
+              <a:rPr lang="en-US" sz="1600" b="1" dirty="0">
+                <a:solidFill>
+                  <a:srgbClr val="028090"/>
+                </a:solidFill>
+                <a:latin typeface="Calibri" pitchFamily="34" charset="0"/>
+                <a:ea typeface="Calibri" pitchFamily="34" charset="-122"/>
+                <a:cs typeface="Calibri" pitchFamily="34" charset="-120"/>
+              </a:rPr>
+              <a:t>Why This Matters</a:t>
+            </a:r>
+            <a:endParaRPr lang="en-US" sz="1600" dirty="0"/>
+          </a:p>
+        </p:txBody>
+      </p:sp>
+      <p:sp>
+        <p:nvSpPr>
+          <p:cNvPr id="15" name="Text 10"/>
+          <p:cNvSpPr/>
+          <p:nvPr/>
+        </p:nvSpPr>
+        <p:spPr>
+          <a:xfrm>
+            <a:off x="8503920" y="3337560"/>
+            <a:ext cx="2971800" cy="1463040"/>
+          </a:xfrm>
+          <a:prstGeom prst="rect">
+            <a:avLst/>
+          </a:prstGeom>
+          <a:noFill/>
+          <a:ln/>
+        </p:spPr>
+        <p:txBody>
+          <a:bodyPr wrap="square" rtlCol="0" anchor="t"/>
+          <a:lstStyle/>
+          <a:p>
+            <a:pPr marL="0" indent="0">
+              <a:buNone/>
+            </a:pPr>
+            <a:r>
+              <a:rPr lang="en-US" sz="1350" dirty="0">
+                <a:solidFill>
+                  <a:srgbClr val="1E293B"/>
+                </a:solidFill>
+                <a:latin typeface="Calibri" pitchFamily="34" charset="0"/>
+                <a:ea typeface="Calibri" pitchFamily="34" charset="-122"/>
+                <a:cs typeface="Calibri" pitchFamily="34" charset="-120"/>
+              </a:rPr>
+              <a:t>Choosing the right NLP tool changes what information you can reliably pull out of real patient notes.</a:t>
+            </a:r>
+            <a:endParaRPr lang="en-US" sz="1350" dirty="0"/>
+          </a:p>
+        </p:txBody>
+      </p:sp>
+      <p:sp>
+        <p:nvSpPr>
+          <p:cNvPr id="16" name="Text 11"/>
+          <p:cNvSpPr/>
+          <p:nvPr/>
+        </p:nvSpPr>
+        <p:spPr>
+          <a:xfrm>
+            <a:off x="548640" y="6355080"/>
+            <a:ext cx="10972800" cy="320040"/>
+          </a:xfrm>
+          <a:prstGeom prst="rect">
+            <a:avLst/>
+          </a:prstGeom>
+          <a:noFill/>
+          <a:ln/>
+        </p:spPr>
+        <p:txBody>
+          <a:bodyPr wrap="square" rtlCol="0" anchor="ctr"/>
+          <a:lstStyle/>
+          <a:p>
+            <a:pPr marL="0" indent="0">
+              <a:buNone/>
+            </a:pPr>
+            <a:r>
+              <a:rPr lang="en-US" sz="1100" i="1" dirty="0">
+                <a:solidFill>
+                  <a:srgbClr val="64748B"/>
+                </a:solidFill>
+                <a:latin typeface="Calibri" pitchFamily="34" charset="0"/>
+                <a:ea typeface="Calibri" pitchFamily="34" charset="-122"/>
+                <a:cs typeface="Calibri" pitchFamily="34" charset="-120"/>
+              </a:rPr>
+              <a:t>Cohort: MIMIC-III discharge summaries, patients diagnosed with subarachnoid hemorrhage (ICD-9 430)</a:t>
+            </a:r>
+            <a:endParaRPr lang="en-US" sz="1100" dirty="0"/>
+          </a:p>
+        </p:txBody>
+      </p:sp>
+      <p:sp>
+        <p:nvSpPr>
+          <p:cNvPr id="17" name="Text 12"/>
+          <p:cNvSpPr/>
+          <p:nvPr/>
+        </p:nvSpPr>
+        <p:spPr>
+          <a:xfrm>
+            <a:off x="10058400" y="6446520"/>
+            <a:ext cx="1828800" cy="274320"/>
+          </a:xfrm>
+          <a:prstGeom prst="rect">
+            <a:avLst/>
+          </a:prstGeom>
+          <a:noFill/>
+          <a:ln/>
+        </p:spPr>
+        <p:txBody>
+          <a:bodyPr wrap="square" rtlCol="0" anchor="ctr"/>
+          <a:lstStyle/>
+          <a:p>
+            <a:pPr marL="0" indent="0" algn="r">
+              <a:buNone/>
+            </a:pPr>
+            <a:r>
+              <a:rPr lang="en-US" sz="1000" dirty="0">
+                <a:solidFill>
+                  <a:srgbClr val="64748B"/>
+                </a:solidFill>
+                <a:latin typeface="Calibri" pitchFamily="34" charset="0"/>
+                <a:ea typeface="Calibri" pitchFamily="34" charset="-122"/>
+                <a:cs typeface="Calibri" pitchFamily="34" charset="-120"/>
+              </a:rPr>
+              <a:t>2</a:t>
+            </a:r>
+            <a:endParaRPr lang="en-US" sz="1000" dirty="0"/>
+          </a:p>
+        </p:txBody>
+      </p:sp>
+    </p:spTree>
+  </p:cSld>
+  <p:clrMapOvr>
+    <a:masterClrMapping/>
+  </p:clrMapOvr>
+</p:sld>
+</file>
+
+<file path=ppt/slides/slide3.xml><?xml version="1.0" encoding="utf-8"?>
+<p:sld xmlns:a="http://schemas.openxmlformats.org/drawingml/2006/main" xmlns:r="http://schemas.openxmlformats.org/officeDocument/2006/relationships" xmlns:p="http://schemas.openxmlformats.org/presentationml/2006/main">
+  <p:cSld name="Slide 3">
+    <p:bg>
+      <p:bgPr>
+        <a:solidFill>
+          <a:srgbClr val="F4FAF9"/>
+        </a:solidFill>
+        <a:effectLst/>
+      </p:bgPr>
+    </p:bg>
+    <p:spTree>
+      <p:nvGrpSpPr>
+        <p:cNvPr id="1" name=""/>
+        <p:cNvGrpSpPr/>
+        <p:nvPr/>
+      </p:nvGrpSpPr>
+      <p:grpSpPr>
+        <a:xfrm>
+          <a:off x="0" y="0"/>
+          <a:ext cx="0" cy="0"/>
+          <a:chOff x="0" y="0"/>
+          <a:chExt cx="0" cy="0"/>
+        </a:xfrm>
+      </p:grpSpPr>
+      <p:sp>
+        <p:nvSpPr>
+          <p:cNvPr id="2" name="Text 0"/>
+          <p:cNvSpPr/>
+          <p:nvPr/>
+        </p:nvSpPr>
+        <p:spPr>
+          <a:xfrm>
+            <a:off x="548640" y="457200"/>
+            <a:ext cx="7315200" cy="365760"/>
+          </a:xfrm>
+          <a:prstGeom prst="rect">
+            <a:avLst/>
+          </a:prstGeom>
+          <a:noFill/>
+          <a:ln/>
+        </p:spPr>
+        <p:txBody>
+          <a:bodyPr wrap="square" rtlCol="0" anchor="ctr"/>
+          <a:lstStyle/>
+          <a:p>
+            <a:pPr marL="0" indent="0">
+              <a:buNone/>
+            </a:pPr>
+            <a:r>
+              <a:rPr lang="en-US" sz="1300" b="1" kern="0" spc="200" dirty="0">
+                <a:solidFill>
+                  <a:srgbClr val="00A896"/>
+                </a:solidFill>
+                <a:latin typeface="Calibri" pitchFamily="34" charset="0"/>
+                <a:ea typeface="Calibri" pitchFamily="34" charset="-122"/>
+                <a:cs typeface="Calibri" pitchFamily="34" charset="-120"/>
+              </a:rPr>
+              <a:t>SETUP</a:t>
+            </a:r>
+            <a:endParaRPr lang="en-US" sz="1300" dirty="0"/>
+          </a:p>
+        </p:txBody>
+      </p:sp>
+      <p:sp>
+        <p:nvSpPr>
+          <p:cNvPr id="3" name="Text 1"/>
+          <p:cNvSpPr/>
+          <p:nvPr/>
+        </p:nvSpPr>
+        <p:spPr>
+          <a:xfrm>
+            <a:off x="548640" y="868680"/>
+            <a:ext cx="10972800" cy="640080"/>
+          </a:xfrm>
+          <a:prstGeom prst="rect">
+            <a:avLst/>
+          </a:prstGeom>
+          <a:noFill/>
+          <a:ln/>
+        </p:spPr>
+        <p:txBody>
+          <a:bodyPr wrap="square" rtlCol="0" anchor="ctr"/>
+          <a:lstStyle/>
+          <a:p>
+            <a:pPr marL="0" indent="0">
+              <a:buNone/>
+            </a:pPr>
+            <a:r>
+              <a:rPr lang="en-US" sz="3000" b="1" dirty="0">
+                <a:solidFill>
+                  <a:srgbClr val="1E293B"/>
+                </a:solidFill>
+                <a:latin typeface="Cambria" pitchFamily="34" charset="0"/>
+                <a:ea typeface="Cambria" pitchFamily="34" charset="-122"/>
+                <a:cs typeface="Cambria" pitchFamily="34" charset="-120"/>
+              </a:rPr>
+              <a:t>How the Pipeline Is Structured</a:t>
+            </a:r>
+            <a:endParaRPr lang="en-US" sz="3000" dirty="0"/>
+          </a:p>
+        </p:txBody>
+      </p:sp>
+      <p:sp>
+        <p:nvSpPr>
+          <p:cNvPr id="4" name="Shape 2"/>
+          <p:cNvSpPr/>
+          <p:nvPr/>
+        </p:nvSpPr>
+        <p:spPr>
+          <a:xfrm>
+            <a:off x="548640" y="1828800"/>
+            <a:ext cx="5394960" cy="4160520"/>
+          </a:xfrm>
+          <a:prstGeom prst="roundRect">
+            <a:avLst>
+              <a:gd name="adj" fmla="val 1758"/>
+            </a:avLst>
+          </a:prstGeom>
+          <a:solidFill>
+            <a:srgbClr val="FFFFFF"/>
+          </a:solidFill>
+          <a:ln/>
+          <a:effectLst>
+            <a:outerShdw blurRad="101600" dist="38100" dir="5400000" algn="bl" rotWithShape="0">
+              <a:srgbClr val="000000">
+                <a:alpha val="10000"/>
+              </a:srgbClr>
+            </a:outerShdw>
+          </a:effectLst>
+        </p:spPr>
+      </p:sp>
+      <p:sp>
+        <p:nvSpPr>
+          <p:cNvPr id="6" name="Text 3"/>
+          <p:cNvSpPr/>
+          <p:nvPr/>
+        </p:nvSpPr>
+        <p:spPr>
+          <a:xfrm>
+            <a:off x="1463040" y="2121408"/>
+            <a:ext cx="4206240" cy="457200"/>
+          </a:xfrm>
+          <a:prstGeom prst="rect">
+            <a:avLst/>
+          </a:prstGeom>
+          <a:noFill/>
+          <a:ln/>
+        </p:spPr>
+        <p:txBody>
+          <a:bodyPr wrap="square" rtlCol="0" anchor="ctr"/>
+          <a:lstStyle/>
+          <a:p>
+            <a:pPr marL="0" indent="0">
+              <a:buNone/>
+            </a:pPr>
+            <a:r>
+              <a:rPr lang="en-US" sz="1700" b="1" dirty="0">
+                <a:solidFill>
+                  <a:srgbClr val="028090"/>
+                </a:solidFill>
+                <a:latin typeface="Calibri" pitchFamily="34" charset="0"/>
+                <a:ea typeface="Calibri" pitchFamily="34" charset="-122"/>
+                <a:cs typeface="Calibri" pitchFamily="34" charset="-120"/>
+              </a:rPr>
+              <a:t>Cohort &amp; Data Source</a:t>
+            </a:r>
+            <a:endParaRPr lang="en-US" sz="1700" dirty="0"/>
+          </a:p>
+        </p:txBody>
+      </p:sp>
+      <p:sp>
+        <p:nvSpPr>
+          <p:cNvPr id="7" name="Text 4"/>
+          <p:cNvSpPr/>
+          <p:nvPr/>
+        </p:nvSpPr>
+        <p:spPr>
+          <a:xfrm>
+            <a:off x="868680" y="2743200"/>
+            <a:ext cx="4754880" cy="3108960"/>
+          </a:xfrm>
+          <a:prstGeom prst="rect">
+            <a:avLst/>
+          </a:prstGeom>
+          <a:noFill/>
+          <a:ln/>
+        </p:spPr>
+        <p:txBody>
+          <a:bodyPr wrap="square" rtlCol="0" anchor="t"/>
+          <a:lstStyle/>
+          <a:p>
+            <a:pPr marL="342900" indent="-342900">
+              <a:spcAft>
+                <a:spcPts val="1000"/>
+              </a:spcAft>
+              <a:buSzPct val="100000"/>
+              <a:buChar char="•"/>
+            </a:pPr>
+            <a:r>
+              <a:rPr lang="en-US" sz="1400" dirty="0">
+                <a:solidFill>
+                  <a:srgbClr val="1E293B"/>
+                </a:solidFill>
+                <a:latin typeface="Calibri" pitchFamily="34" charset="0"/>
+                <a:ea typeface="Calibri" pitchFamily="34" charset="-122"/>
+                <a:cs typeface="Calibri" pitchFamily="34" charset="-120"/>
+              </a:rPr>
+              <a:t>Data pulled from Google BigQuery (MIMIC-III public dataset)</a:t>
+            </a:r>
+            <a:endParaRPr lang="en-US" sz="1400" dirty="0"/>
+          </a:p>
+          <a:p>
+            <a:pPr marL="342900" indent="-342900">
+              <a:spcAft>
+                <a:spcPts val="1000"/>
+              </a:spcAft>
+              <a:buSzPct val="100000"/>
+              <a:buChar char="•"/>
+            </a:pPr>
+            <a:r>
+              <a:rPr lang="en-US" sz="1400" dirty="0">
+                <a:solidFill>
+                  <a:srgbClr val="1E293B"/>
+                </a:solidFill>
+                <a:latin typeface="Calibri" pitchFamily="34" charset="0"/>
+                <a:ea typeface="Calibri" pitchFamily="34" charset="-122"/>
+                <a:cs typeface="Calibri" pitchFamily="34" charset="-120"/>
+              </a:rPr>
+              <a:t>Cohort: patients with ICD-9 code 430 (subarachnoid hemorrhage)</a:t>
+            </a:r>
+            <a:endParaRPr lang="en-US" sz="1400" dirty="0"/>
+          </a:p>
+          <a:p>
+            <a:pPr marL="342900" indent="-342900">
+              <a:spcAft>
+                <a:spcPts val="1000"/>
+              </a:spcAft>
+              <a:buSzPct val="100000"/>
+              <a:buChar char="•"/>
+            </a:pPr>
+            <a:r>
+              <a:rPr lang="en-US" sz="1400" dirty="0">
+                <a:solidFill>
+                  <a:srgbClr val="1E293B"/>
+                </a:solidFill>
+                <a:latin typeface="Calibri" pitchFamily="34" charset="0"/>
+                <a:ea typeface="Calibri" pitchFamily="34" charset="-122"/>
+                <a:cs typeface="Calibri" pitchFamily="34" charset="-120"/>
+              </a:rPr>
+              <a:t>Note type: Discharge summaries only</a:t>
+            </a:r>
+            <a:endParaRPr lang="en-US" sz="1400" dirty="0"/>
+          </a:p>
+          <a:p>
+            <a:pPr marL="342900" indent="-342900">
+              <a:spcAft>
+                <a:spcPts val="1000"/>
+              </a:spcAft>
+              <a:buSzPct val="100000"/>
+              <a:buChar char="•"/>
+            </a:pPr>
+            <a:r>
+              <a:rPr lang="en-US" sz="1400" dirty="0">
+                <a:solidFill>
+                  <a:srgbClr val="1E293B"/>
+                </a:solidFill>
+                <a:latin typeface="Calibri" pitchFamily="34" charset="0"/>
+                <a:ea typeface="Calibri" pitchFamily="34" charset="-122"/>
+                <a:cs typeface="Calibri" pitchFamily="34" charset="-120"/>
+              </a:rPr>
+              <a:t>888 matching notes found; a smaller sample used for processing speed</a:t>
+            </a:r>
+            <a:endParaRPr lang="en-US" sz="1400" dirty="0"/>
+          </a:p>
+          <a:p>
+            <a:pPr marL="342900" indent="-342900">
+              <a:spcAft>
+                <a:spcPts val="1000"/>
+              </a:spcAft>
+              <a:buSzPct val="100000"/>
+              <a:buChar char="•"/>
+            </a:pPr>
+            <a:r>
+              <a:rPr lang="en-US" sz="1400" dirty="0">
+                <a:solidFill>
+                  <a:srgbClr val="1E293B"/>
+                </a:solidFill>
+                <a:latin typeface="Calibri" pitchFamily="34" charset="0"/>
+                <a:ea typeface="Calibri" pitchFamily="34" charset="-122"/>
+                <a:cs typeface="Calibri" pitchFamily="34" charset="-120"/>
+              </a:rPr>
+              <a:t>De-identification brackets and extra whitespace cleaned before NLP</a:t>
+            </a:r>
+            <a:endParaRPr lang="en-US" sz="1400" dirty="0"/>
+          </a:p>
+        </p:txBody>
+      </p:sp>
+      <p:sp>
+        <p:nvSpPr>
+          <p:cNvPr id="8" name="Shape 5"/>
+          <p:cNvSpPr/>
+          <p:nvPr/>
+        </p:nvSpPr>
+        <p:spPr>
+          <a:xfrm>
+            <a:off x="6217920" y="1828800"/>
+            <a:ext cx="5394960" cy="4160520"/>
+          </a:xfrm>
+          <a:prstGeom prst="roundRect">
+            <a:avLst>
+              <a:gd name="adj" fmla="val 1758"/>
+            </a:avLst>
+          </a:prstGeom>
+          <a:solidFill>
+            <a:srgbClr val="FFFFFF"/>
+          </a:solidFill>
+          <a:ln/>
+          <a:effectLst>
+            <a:outerShdw blurRad="101600" dist="38100" dir="5400000" algn="bl" rotWithShape="0">
+              <a:srgbClr val="000000">
+                <a:alpha val="10000"/>
+              </a:srgbClr>
+            </a:outerShdw>
+          </a:effectLst>
+        </p:spPr>
+      </p:sp>
+      <p:sp>
+        <p:nvSpPr>
+          <p:cNvPr id="10" name="Text 6"/>
+          <p:cNvSpPr/>
+          <p:nvPr/>
+        </p:nvSpPr>
+        <p:spPr>
+          <a:xfrm>
+            <a:off x="7132320" y="2121408"/>
+            <a:ext cx="4206240" cy="457200"/>
+          </a:xfrm>
+          <a:prstGeom prst="rect">
+            <a:avLst/>
+          </a:prstGeom>
+          <a:noFill/>
+          <a:ln/>
+        </p:spPr>
+        <p:txBody>
+          <a:bodyPr wrap="square" rtlCol="0" anchor="ctr"/>
+          <a:lstStyle/>
+          <a:p>
+            <a:pPr marL="0" indent="0">
+              <a:buNone/>
+            </a:pPr>
+            <a:r>
+              <a:rPr lang="en-US" sz="1700" b="1" dirty="0">
+                <a:solidFill>
+                  <a:srgbClr val="028090"/>
+                </a:solidFill>
+                <a:latin typeface="Calibri" pitchFamily="34" charset="0"/>
+                <a:ea typeface="Calibri" pitchFamily="34" charset="-122"/>
+                <a:cs typeface="Calibri" pitchFamily="34" charset="-120"/>
+              </a:rPr>
+              <a:t>What Each Tool Does</a:t>
+            </a:r>
+            <a:endParaRPr lang="en-US" sz="1700" dirty="0"/>
+          </a:p>
+        </p:txBody>
+      </p:sp>
+      <p:sp>
+        <p:nvSpPr>
+          <p:cNvPr id="11" name="Text 7"/>
+          <p:cNvSpPr/>
+          <p:nvPr/>
+        </p:nvSpPr>
+        <p:spPr>
+          <a:xfrm>
+            <a:off x="6537960" y="2743200"/>
+            <a:ext cx="4754880" cy="3108960"/>
+          </a:xfrm>
+          <a:prstGeom prst="rect">
+            <a:avLst/>
+          </a:prstGeom>
+          <a:noFill/>
+          <a:ln/>
+        </p:spPr>
+        <p:txBody>
+          <a:bodyPr wrap="square" rtlCol="0" anchor="t"/>
+          <a:lstStyle/>
+          <a:p>
+            <a:pPr marL="342900" indent="-342900">
+              <a:spcAft>
+                <a:spcPts val="1000"/>
+              </a:spcAft>
+              <a:buSzPct val="100000"/>
+              <a:buChar char="•"/>
+            </a:pPr>
+            <a:r>
+              <a:rPr lang="en-US" sz="1400" dirty="0">
+                <a:solidFill>
+                  <a:srgbClr val="1E293B"/>
+                </a:solidFill>
+                <a:latin typeface="Calibri" pitchFamily="34" charset="0"/>
+                <a:ea typeface="Calibri" pitchFamily="34" charset="-122"/>
+                <a:cs typeface="Calibri" pitchFamily="34" charset="-120"/>
+              </a:rPr>
+              <a:t>Entity extraction: find clinical terms in the text</a:t>
+            </a:r>
+            <a:endParaRPr lang="en-US" sz="1400" dirty="0"/>
+          </a:p>
+          <a:p>
+            <a:pPr marL="342900" indent="-342900">
+              <a:spcAft>
+                <a:spcPts val="1000"/>
+              </a:spcAft>
+              <a:buSzPct val="100000"/>
+              <a:buChar char="•"/>
+            </a:pPr>
+            <a:r>
+              <a:rPr lang="en-US" sz="1400" dirty="0">
+                <a:solidFill>
+                  <a:srgbClr val="1E293B"/>
+                </a:solidFill>
+                <a:latin typeface="Calibri" pitchFamily="34" charset="0"/>
+                <a:ea typeface="Calibri" pitchFamily="34" charset="-122"/>
+                <a:cs typeface="Calibri" pitchFamily="34" charset="-120"/>
+              </a:rPr>
+              <a:t>word2vec: turn words into number vectors based on context</a:t>
+            </a:r>
+            <a:endParaRPr lang="en-US" sz="1400" dirty="0"/>
+          </a:p>
+          <a:p>
+            <a:pPr marL="342900" indent="-342900">
+              <a:spcAft>
+                <a:spcPts val="1000"/>
+              </a:spcAft>
+              <a:buSzPct val="100000"/>
+              <a:buChar char="•"/>
+            </a:pPr>
+            <a:r>
+              <a:rPr lang="en-US" sz="1400" dirty="0">
+                <a:solidFill>
+                  <a:srgbClr val="1E293B"/>
+                </a:solidFill>
+                <a:latin typeface="Calibri" pitchFamily="34" charset="0"/>
+                <a:ea typeface="Calibri" pitchFamily="34" charset="-122"/>
+                <a:cs typeface="Calibri" pitchFamily="34" charset="-120"/>
+              </a:rPr>
+              <a:t>t-SNE: compress those vectors down to 2D so we can plot and compare them</a:t>
+            </a:r>
+            <a:endParaRPr lang="en-US" sz="1400" dirty="0"/>
+          </a:p>
+          <a:p>
+            <a:pPr marL="342900" indent="-342900">
+              <a:spcAft>
+                <a:spcPts val="1000"/>
+              </a:spcAft>
+              <a:buSzPct val="100000"/>
+              <a:buChar char="•"/>
+            </a:pPr>
+            <a:r>
+              <a:rPr lang="en-US" sz="1400" dirty="0">
+                <a:solidFill>
+                  <a:srgbClr val="1E293B"/>
+                </a:solidFill>
+                <a:latin typeface="Calibri" pitchFamily="34" charset="0"/>
+                <a:ea typeface="Calibri" pitchFamily="34" charset="-122"/>
+                <a:cs typeface="Calibri" pitchFamily="34" charset="-120"/>
+              </a:rPr>
+              <a:t>Same steps run for spaCy, scispaCy, and medspaCy on the same notes</a:t>
+            </a:r>
+            <a:endParaRPr lang="en-US" sz="1400" dirty="0"/>
+          </a:p>
+        </p:txBody>
+      </p:sp>
+      <p:sp>
+        <p:nvSpPr>
+          <p:cNvPr id="12" name="Text 8"/>
+          <p:cNvSpPr/>
+          <p:nvPr/>
+        </p:nvSpPr>
+        <p:spPr>
+          <a:xfrm>
+            <a:off x="10058400" y="6446520"/>
+            <a:ext cx="1828800" cy="274320"/>
+          </a:xfrm>
+          <a:prstGeom prst="rect">
+            <a:avLst/>
+          </a:prstGeom>
+          <a:noFill/>
+          <a:ln/>
+        </p:spPr>
+        <p:txBody>
+          <a:bodyPr wrap="square" rtlCol="0" anchor="ctr"/>
+          <a:lstStyle/>
+          <a:p>
+            <a:pPr marL="0" indent="0" algn="r">
+              <a:buNone/>
+            </a:pPr>
+            <a:r>
+              <a:rPr lang="en-US" sz="1000" dirty="0">
+                <a:solidFill>
+                  <a:srgbClr val="64748B"/>
+                </a:solidFill>
+                <a:latin typeface="Calibri" pitchFamily="34" charset="0"/>
+                <a:ea typeface="Calibri" pitchFamily="34" charset="-122"/>
+                <a:cs typeface="Calibri" pitchFamily="34" charset="-120"/>
+              </a:rPr>
+              <a:t>3</a:t>
+            </a:r>
+            <a:endParaRPr lang="en-US" sz="1000" dirty="0"/>
+          </a:p>
+        </p:txBody>
+      </p:sp>
+    </p:spTree>
+  </p:cSld>
+  <p:clrMapOvr>
+    <a:masterClrMapping/>
+  </p:clrMapOvr>
+</p:sld>
+</file>
+
+<file path=ppt/slides/slide4.xml><?xml version="1.0" encoding="utf-8"?>
+<p:sld xmlns:a="http://schemas.openxmlformats.org/drawingml/2006/main" xmlns:r="http://schemas.openxmlformats.org/officeDocument/2006/relationships" xmlns:p="http://schemas.openxmlformats.org/presentationml/2006/main">
+  <p:cSld name="Slide 4">
+    <p:bg>
+      <p:bgPr>
+        <a:solidFill>
+          <a:srgbClr val="F4FAF9"/>
+        </a:solidFill>
+        <a:effectLst/>
+      </p:bgPr>
+    </p:bg>
+    <p:spTree>
+      <p:nvGrpSpPr>
+        <p:cNvPr id="1" name=""/>
+        <p:cNvGrpSpPr/>
+        <p:nvPr/>
+      </p:nvGrpSpPr>
+      <p:grpSpPr>
+        <a:xfrm>
+          <a:off x="0" y="0"/>
+          <a:ext cx="0" cy="0"/>
+          <a:chOff x="0" y="0"/>
+          <a:chExt cx="0" cy="0"/>
+        </a:xfrm>
+      </p:grpSpPr>
+      <p:sp>
+        <p:nvSpPr>
+          <p:cNvPr id="2" name="Text 0"/>
+          <p:cNvSpPr/>
+          <p:nvPr/>
+        </p:nvSpPr>
+        <p:spPr>
+          <a:xfrm>
+            <a:off x="548640" y="457200"/>
+            <a:ext cx="7315200" cy="365760"/>
+          </a:xfrm>
+          <a:prstGeom prst="rect">
+            <a:avLst/>
+          </a:prstGeom>
+          <a:noFill/>
+          <a:ln/>
+        </p:spPr>
+        <p:txBody>
+          <a:bodyPr wrap="square" rtlCol="0" anchor="ctr"/>
+          <a:lstStyle/>
+          <a:p>
+            <a:pPr marL="0" indent="0">
+              <a:buNone/>
+            </a:pPr>
+            <a:r>
+              <a:rPr lang="en-US" sz="1300" b="1" kern="0" spc="200" dirty="0">
+                <a:solidFill>
+                  <a:srgbClr val="00A896"/>
+                </a:solidFill>
+                <a:latin typeface="Calibri" pitchFamily="34" charset="0"/>
+                <a:ea typeface="Calibri" pitchFamily="34" charset="-122"/>
+                <a:cs typeface="Calibri" pitchFamily="34" charset="-120"/>
+              </a:rPr>
+              <a:t>TOOL 1 OF 3</a:t>
+            </a:r>
+            <a:endParaRPr lang="en-US" sz="1300" dirty="0"/>
+          </a:p>
+        </p:txBody>
+      </p:sp>
+      <p:sp>
+        <p:nvSpPr>
+          <p:cNvPr id="3" name="Text 1"/>
+          <p:cNvSpPr/>
+          <p:nvPr/>
+        </p:nvSpPr>
+        <p:spPr>
+          <a:xfrm>
+            <a:off x="548640" y="868680"/>
+            <a:ext cx="10972800" cy="548640"/>
+          </a:xfrm>
+          <a:prstGeom prst="rect">
+            <a:avLst/>
+          </a:prstGeom>
+          <a:noFill/>
+          <a:ln/>
+        </p:spPr>
+        <p:txBody>
+          <a:bodyPr wrap="square" rtlCol="0" anchor="ctr"/>
+          <a:lstStyle/>
+          <a:p>
+            <a:pPr marL="0" indent="0">
+              <a:buNone/>
+            </a:pPr>
+            <a:r>
+              <a:rPr lang="en-US" sz="2800" b="1" dirty="0">
+                <a:solidFill>
+                  <a:srgbClr val="1E293B"/>
+                </a:solidFill>
+                <a:latin typeface="Cambria" pitchFamily="34" charset="0"/>
+                <a:ea typeface="Cambria" pitchFamily="34" charset="-122"/>
+                <a:cs typeface="Cambria" pitchFamily="34" charset="-120"/>
+              </a:rPr>
+              <a:t>spaCy — General-Purpose NLP</a:t>
+            </a:r>
+            <a:endParaRPr lang="en-US" sz="2800" dirty="0"/>
+          </a:p>
+        </p:txBody>
+      </p:sp>
+      <p:sp>
+        <p:nvSpPr>
+          <p:cNvPr id="4" name="Text 2"/>
+          <p:cNvSpPr/>
+          <p:nvPr/>
+        </p:nvSpPr>
+        <p:spPr>
+          <a:xfrm>
+            <a:off x="548640" y="1417320"/>
+            <a:ext cx="10972800" cy="365760"/>
+          </a:xfrm>
+          <a:prstGeom prst="rect">
+            <a:avLst/>
+          </a:prstGeom>
+          <a:noFill/>
+          <a:ln/>
+        </p:spPr>
+        <p:txBody>
+          <a:bodyPr wrap="square" rtlCol="0" anchor="ctr"/>
+          <a:lstStyle/>
+          <a:p>
+            <a:pPr marL="0" indent="0">
+              <a:buNone/>
+            </a:pPr>
+            <a:r>
+              <a:rPr lang="en-US" sz="1500" i="1" dirty="0">
+                <a:solidFill>
+                  <a:srgbClr val="64748B"/>
+                </a:solidFill>
+                <a:latin typeface="Calibri" pitchFamily="34" charset="0"/>
+                <a:ea typeface="Calibri" pitchFamily="34" charset="-122"/>
+                <a:cs typeface="Calibri" pitchFamily="34" charset="-120"/>
+              </a:rPr>
+              <a:t>The everyday baseline: fast, well-tested, not trained on medical text</a:t>
+            </a:r>
+            <a:endParaRPr lang="en-US" sz="1500" dirty="0"/>
+          </a:p>
+        </p:txBody>
+      </p:sp>
+      <p:sp>
+        <p:nvSpPr>
+          <p:cNvPr id="5" name="Shape 3"/>
+          <p:cNvSpPr/>
+          <p:nvPr/>
+        </p:nvSpPr>
+        <p:spPr>
+          <a:xfrm>
+            <a:off x="548640" y="1965960"/>
+            <a:ext cx="5943600" cy="3977640"/>
+          </a:xfrm>
+          <a:prstGeom prst="roundRect">
+            <a:avLst>
+              <a:gd name="adj" fmla="val 1839"/>
+            </a:avLst>
+          </a:prstGeom>
+          <a:solidFill>
+            <a:srgbClr val="FFFFFF"/>
+          </a:solidFill>
+          <a:ln/>
+          <a:effectLst>
+            <a:outerShdw blurRad="101600" dist="38100" dir="5400000" algn="bl" rotWithShape="0">
+              <a:srgbClr val="000000">
+                <a:alpha val="10000"/>
+              </a:srgbClr>
+            </a:outerShdw>
+          </a:effectLst>
+        </p:spPr>
+      </p:sp>
+      <p:sp>
+        <p:nvSpPr>
+          <p:cNvPr id="6" name="Text 4"/>
+          <p:cNvSpPr/>
+          <p:nvPr/>
+        </p:nvSpPr>
+        <p:spPr>
+          <a:xfrm>
+            <a:off x="868680" y="2240280"/>
+            <a:ext cx="5349240" cy="3474720"/>
+          </a:xfrm>
+          <a:prstGeom prst="rect">
+            <a:avLst/>
+          </a:prstGeom>
+          <a:noFill/>
+          <a:ln/>
+        </p:spPr>
+        <p:txBody>
+          <a:bodyPr wrap="square" lIns="91440" tIns="45720" rIns="91440" bIns="45720" rtlCol="0" anchor="t"/>
+          <a:lstStyle/>
+          <a:p>
+            <a:pPr marL="0" indent="0">
+              <a:spcAft>
+                <a:spcPts val="600"/>
+              </a:spcAft>
+              <a:buNone/>
+            </a:pPr>
+            <a:r>
+              <a:rPr lang="en-US" sz="1400" b="1" dirty="0">
+                <a:solidFill>
+                  <a:srgbClr val="028090"/>
+                </a:solidFill>
+                <a:latin typeface="Calibri" pitchFamily="34" charset="0"/>
+                <a:ea typeface="Calibri" pitchFamily="34" charset="-122"/>
+                <a:cs typeface="Calibri" pitchFamily="34" charset="-120"/>
+              </a:rPr>
+              <a:t>What it does:</a:t>
+            </a:r>
+            <a:endParaRPr lang="en-US" sz="1400" dirty="0"/>
+          </a:p>
+          <a:p>
+            <a:pPr marL="0" indent="0">
+              <a:spcAft>
+                <a:spcPts val="600"/>
+              </a:spcAft>
+              <a:buNone/>
+            </a:pPr>
+            <a:r>
+              <a:rPr lang="en-US" sz="1400" dirty="0">
+                <a:solidFill>
+                  <a:srgbClr val="1E293B"/>
+                </a:solidFill>
+                <a:latin typeface="Calibri" pitchFamily="34" charset="0"/>
+                <a:ea typeface="Calibri" pitchFamily="34" charset="-122"/>
+                <a:cs typeface="Calibri" pitchFamily="34" charset="-120"/>
+              </a:rPr>
+              <a:t>Runs standard named entity recognition (people, places, dates, numbers) plus word2vec and t-SNE on the same notes.</a:t>
+            </a:r>
+            <a:endParaRPr lang="en-US" sz="1400" dirty="0"/>
+          </a:p>
+          <a:p>
+            <a:pPr marL="0" indent="0">
+              <a:spcAft>
+                <a:spcPts val="600"/>
+              </a:spcAft>
+              <a:buNone/>
+            </a:pPr>
+            <a:r>
+              <a:rPr lang="en-US" sz="400" dirty="0">
+                <a:solidFill>
+                  <a:srgbClr val="000000"/>
+                </a:solidFill>
+                <a:latin typeface="Calibri" pitchFamily="34" charset="0"/>
+                <a:ea typeface="Calibri" pitchFamily="34" charset="-122"/>
+                <a:cs typeface="Calibri" pitchFamily="34" charset="-120"/>
+              </a:rPr>
+              <a:t> </a:t>
+            </a:r>
+            <a:endParaRPr lang="en-US" sz="1400" dirty="0"/>
+          </a:p>
+          <a:p>
+            <a:pPr marL="0" indent="0">
+              <a:spcAft>
+                <a:spcPts val="600"/>
+              </a:spcAft>
+              <a:buNone/>
+            </a:pPr>
+            <a:r>
+              <a:rPr lang="en-US" sz="1400" b="1" dirty="0">
+                <a:solidFill>
+                  <a:srgbClr val="028090"/>
+                </a:solidFill>
+                <a:latin typeface="Calibri" pitchFamily="34" charset="0"/>
+                <a:ea typeface="Calibri" pitchFamily="34" charset="-122"/>
+                <a:cs typeface="Calibri" pitchFamily="34" charset="-120"/>
+              </a:rPr>
+              <a:t>Why it matters:</a:t>
+            </a:r>
+            <a:endParaRPr lang="en-US" sz="1400" dirty="0"/>
+          </a:p>
+          <a:p>
+            <a:pPr marL="0" indent="0">
+              <a:spcAft>
+                <a:spcPts val="600"/>
+              </a:spcAft>
+              <a:buNone/>
+            </a:pPr>
+            <a:r>
+              <a:rPr lang="en-US" sz="1400" dirty="0">
+                <a:solidFill>
+                  <a:srgbClr val="1E293B"/>
+                </a:solidFill>
+                <a:latin typeface="Calibri" pitchFamily="34" charset="0"/>
+                <a:ea typeface="Calibri" pitchFamily="34" charset="-122"/>
+                <a:cs typeface="Calibri" pitchFamily="34" charset="-120"/>
+              </a:rPr>
+              <a:t>It's a fair baseline to measure the other two tools against - free of any medical training.</a:t>
+            </a:r>
+            <a:endParaRPr lang="en-US" sz="1400" dirty="0"/>
+          </a:p>
+          <a:p>
+            <a:pPr marL="0" indent="0">
+              <a:spcAft>
+                <a:spcPts val="600"/>
+              </a:spcAft>
+              <a:buNone/>
+            </a:pPr>
+            <a:r>
+              <a:rPr lang="en-US" sz="400" dirty="0">
+                <a:solidFill>
+                  <a:srgbClr val="000000"/>
+                </a:solidFill>
+                <a:latin typeface="Calibri" pitchFamily="34" charset="0"/>
+                <a:ea typeface="Calibri" pitchFamily="34" charset="-122"/>
+                <a:cs typeface="Calibri" pitchFamily="34" charset="-120"/>
+              </a:rPr>
+              <a:t> </a:t>
+            </a:r>
+            <a:endParaRPr lang="en-US" sz="1400" dirty="0"/>
+          </a:p>
+          <a:p>
+            <a:pPr>
+              <a:spcAft>
+                <a:spcPts val="600"/>
+              </a:spcAft>
+            </a:pPr>
+            <a:r>
+              <a:rPr lang="en-US" sz="1400" b="1">
+                <a:solidFill>
+                  <a:srgbClr val="028090"/>
+                </a:solidFill>
+                <a:latin typeface="Calibri"/>
+                <a:ea typeface="Calibri"/>
+                <a:cs typeface="Calibri"/>
+              </a:rPr>
+              <a:t>How it was run:</a:t>
+            </a:r>
+            <a:endParaRPr lang="en-US" sz="1400">
+              <a:latin typeface="Calibri"/>
+              <a:ea typeface="Calibri"/>
+              <a:cs typeface="Calibri"/>
+            </a:endParaRPr>
+          </a:p>
+          <a:p>
+            <a:pPr marL="0" indent="0">
+              <a:spcAft>
+                <a:spcPts val="600"/>
+              </a:spcAft>
+              <a:buNone/>
+            </a:pPr>
+            <a:r>
+              <a:rPr lang="en-US" sz="1400" dirty="0">
+                <a:solidFill>
+                  <a:srgbClr val="1E293B"/>
+                </a:solidFill>
+                <a:latin typeface="Calibri"/>
+                <a:ea typeface="Calibri"/>
+                <a:cs typeface="Calibri"/>
+              </a:rPr>
+              <a:t>Load </a:t>
+            </a:r>
+            <a:r>
+              <a:rPr lang="en-US" sz="1400" dirty="0" err="1">
+                <a:solidFill>
+                  <a:srgbClr val="1E293B"/>
+                </a:solidFill>
+                <a:latin typeface="Calibri"/>
+                <a:ea typeface="Calibri"/>
+                <a:cs typeface="Calibri"/>
+              </a:rPr>
+              <a:t>en_core_web_sm</a:t>
+            </a:r>
+            <a:r>
+              <a:rPr lang="en-US" sz="1400" dirty="0">
+                <a:solidFill>
+                  <a:srgbClr val="1E293B"/>
+                </a:solidFill>
+                <a:latin typeface="Calibri"/>
+                <a:ea typeface="Calibri"/>
+                <a:cs typeface="Calibri"/>
+              </a:rPr>
+              <a:t>, extract entities, tokenize, train word2vec, plot tuned t-SNE.</a:t>
+            </a:r>
+            <a:endParaRPr lang="en-US" sz="1400" dirty="0">
+              <a:latin typeface="Calibri"/>
+              <a:ea typeface="Calibri"/>
+              <a:cs typeface="Calibri"/>
+            </a:endParaRPr>
+          </a:p>
+        </p:txBody>
+      </p:sp>
+      <p:sp>
+        <p:nvSpPr>
+          <p:cNvPr id="7" name="Shape 5"/>
+          <p:cNvSpPr/>
+          <p:nvPr/>
+        </p:nvSpPr>
+        <p:spPr>
+          <a:xfrm>
+            <a:off x="6720840" y="1965960"/>
+            <a:ext cx="4892040" cy="3977640"/>
+          </a:xfrm>
+          <a:prstGeom prst="roundRect">
+            <a:avLst>
+              <a:gd name="adj" fmla="val 1839"/>
+            </a:avLst>
+          </a:prstGeom>
+          <a:solidFill>
+            <a:srgbClr val="FEF7EC"/>
+          </a:solidFill>
+          <a:ln/>
+          <a:effectLst>
+            <a:outerShdw blurRad="101600" dist="38100" dir="5400000" algn="bl" rotWithShape="0">
+              <a:srgbClr val="000000">
+                <a:alpha val="10000"/>
+              </a:srgbClr>
+            </a:outerShdw>
+          </a:effectLst>
+        </p:spPr>
+      </p:sp>
+      <p:sp>
+        <p:nvSpPr>
+          <p:cNvPr id="9" name="Text 6"/>
+          <p:cNvSpPr/>
+          <p:nvPr/>
+        </p:nvSpPr>
+        <p:spPr>
+          <a:xfrm>
+            <a:off x="7589520" y="2258568"/>
+            <a:ext cx="3840480" cy="457200"/>
+          </a:xfrm>
+          <a:prstGeom prst="rect">
+            <a:avLst/>
+          </a:prstGeom>
+          <a:noFill/>
+          <a:ln/>
+        </p:spPr>
+        <p:txBody>
+          <a:bodyPr wrap="square" rtlCol="0" anchor="ctr"/>
+          <a:lstStyle/>
+          <a:p>
+            <a:pPr marL="0" indent="0">
+              <a:buNone/>
+            </a:pPr>
+            <a:r>
+              <a:rPr lang="en-US" sz="1500" b="1" dirty="0">
+                <a:solidFill>
+                  <a:srgbClr val="B45309"/>
+                </a:solidFill>
+                <a:latin typeface="Calibri" pitchFamily="34" charset="0"/>
+                <a:ea typeface="Calibri" pitchFamily="34" charset="-122"/>
+                <a:cs typeface="Calibri" pitchFamily="34" charset="-120"/>
+              </a:rPr>
+              <a:t>Finding</a:t>
+            </a:r>
+            <a:endParaRPr lang="en-US" sz="1500" dirty="0"/>
+          </a:p>
+        </p:txBody>
+      </p:sp>
+      <p:sp>
+        <p:nvSpPr>
+          <p:cNvPr id="10" name="Text 7"/>
+          <p:cNvSpPr/>
+          <p:nvPr/>
+        </p:nvSpPr>
+        <p:spPr>
+          <a:xfrm>
+            <a:off x="6995160" y="2834640"/>
+            <a:ext cx="4343400" cy="1828800"/>
+          </a:xfrm>
+          <a:prstGeom prst="rect">
+            <a:avLst/>
+          </a:prstGeom>
+          <a:noFill/>
+          <a:ln/>
+        </p:spPr>
+        <p:txBody>
+          <a:bodyPr wrap="square" rtlCol="0" anchor="t"/>
+          <a:lstStyle/>
+          <a:p>
+            <a:pPr marL="0" indent="0">
+              <a:buNone/>
+            </a:pPr>
+            <a:r>
+              <a:rPr lang="en-US" sz="1400" dirty="0">
+                <a:solidFill>
+                  <a:srgbClr val="1E293B"/>
+                </a:solidFill>
+                <a:latin typeface="Calibri" pitchFamily="34" charset="0"/>
+                <a:ea typeface="Calibri" pitchFamily="34" charset="-122"/>
+                <a:cs typeface="Calibri" pitchFamily="34" charset="-120"/>
+              </a:rPr>
+              <a:t>3,104 entities found across 17 label types, but the top ones were CARDINAL, ORG, and PERSON - mostly noise like numbers and section headers, not clinical concepts.</a:t>
+            </a:r>
+            <a:endParaRPr lang="en-US" sz="1400" dirty="0"/>
+          </a:p>
+        </p:txBody>
+      </p:sp>
+      <p:sp>
+        <p:nvSpPr>
+          <p:cNvPr id="11" name="Text 8"/>
+          <p:cNvSpPr/>
+          <p:nvPr/>
+        </p:nvSpPr>
+        <p:spPr>
+          <a:xfrm>
+            <a:off x="6995160" y="4709160"/>
+            <a:ext cx="4343400" cy="1097280"/>
+          </a:xfrm>
+          <a:prstGeom prst="rect">
+            <a:avLst/>
+          </a:prstGeom>
+          <a:noFill/>
+          <a:ln/>
+        </p:spPr>
+        <p:txBody>
+          <a:bodyPr wrap="square" rtlCol="0" anchor="t"/>
+          <a:lstStyle/>
+          <a:p>
+            <a:pPr marL="0" indent="0">
+              <a:buNone/>
+            </a:pPr>
+            <a:r>
+              <a:rPr lang="en-US" sz="1250" dirty="0">
+                <a:solidFill>
+                  <a:srgbClr val="64748B"/>
+                </a:solidFill>
+                <a:latin typeface="Calibri" pitchFamily="34" charset="0"/>
+                <a:ea typeface="Calibri" pitchFamily="34" charset="-122"/>
+                <a:cs typeface="Calibri" pitchFamily="34" charset="-120"/>
+              </a:rPr>
+              <a:t>Word2vec vocabulary size: 2,306 words</a:t>
+            </a:r>
+            <a:endParaRPr lang="en-US" sz="1250" dirty="0"/>
+          </a:p>
+        </p:txBody>
+      </p:sp>
+      <p:sp>
+        <p:nvSpPr>
+          <p:cNvPr id="12" name="Text 9"/>
+          <p:cNvSpPr/>
+          <p:nvPr/>
+        </p:nvSpPr>
+        <p:spPr>
+          <a:xfrm>
+            <a:off x="548640" y="6355080"/>
+            <a:ext cx="10972800" cy="320040"/>
+          </a:xfrm>
+          <a:prstGeom prst="rect">
+            <a:avLst/>
+          </a:prstGeom>
+          <a:noFill/>
+          <a:ln/>
+        </p:spPr>
+        <p:txBody>
+          <a:bodyPr wrap="square" rtlCol="0" anchor="ctr"/>
+          <a:lstStyle/>
+          <a:p>
+            <a:pPr marL="0" indent="0">
+              <a:buNone/>
+            </a:pPr>
+            <a:r>
+              <a:rPr lang="en-US" sz="1100" dirty="0">
+                <a:solidFill>
+                  <a:srgbClr val="64748B"/>
+                </a:solidFill>
+                <a:latin typeface="Calibri" pitchFamily="34" charset="0"/>
+                <a:ea typeface="Calibri" pitchFamily="34" charset="-122"/>
+                <a:cs typeface="Calibri" pitchFamily="34" charset="-120"/>
+              </a:rPr>
+              <a:t>Model: en_core_web_sm  |  Output: entity counts, word2vec, tuned t-SNE plot</a:t>
+            </a:r>
+            <a:endParaRPr lang="en-US" sz="1100" dirty="0"/>
+          </a:p>
+        </p:txBody>
+      </p:sp>
+      <p:sp>
+        <p:nvSpPr>
+          <p:cNvPr id="13" name="Text 10"/>
+          <p:cNvSpPr/>
+          <p:nvPr/>
+        </p:nvSpPr>
+        <p:spPr>
+          <a:xfrm>
+            <a:off x="10058400" y="6446520"/>
+            <a:ext cx="1828800" cy="274320"/>
+          </a:xfrm>
+          <a:prstGeom prst="rect">
+            <a:avLst/>
+          </a:prstGeom>
+          <a:noFill/>
+          <a:ln/>
+        </p:spPr>
+        <p:txBody>
+          <a:bodyPr wrap="square" rtlCol="0" anchor="ctr"/>
+          <a:lstStyle/>
+          <a:p>
+            <a:pPr marL="0" indent="0" algn="r">
+              <a:buNone/>
+            </a:pPr>
+            <a:r>
+              <a:rPr lang="en-US" sz="1000" dirty="0">
+                <a:solidFill>
+                  <a:srgbClr val="64748B"/>
+                </a:solidFill>
+                <a:latin typeface="Calibri" pitchFamily="34" charset="0"/>
+                <a:ea typeface="Calibri" pitchFamily="34" charset="-122"/>
+                <a:cs typeface="Calibri" pitchFamily="34" charset="-120"/>
+              </a:rPr>
+              <a:t>4</a:t>
+            </a:r>
+            <a:endParaRPr lang="en-US" sz="1000" dirty="0"/>
+          </a:p>
+        </p:txBody>
+      </p:sp>
+    </p:spTree>
+  </p:cSld>
+  <p:clrMapOvr>
+    <a:masterClrMapping/>
+  </p:clrMapOvr>
+</p:sld>
+</file>
+
+<file path=ppt/slides/slide5.xml><?xml version="1.0" encoding="utf-8"?>
+<p:sld xmlns:a="http://schemas.openxmlformats.org/drawingml/2006/main" xmlns:r="http://schemas.openxmlformats.org/officeDocument/2006/relationships" xmlns:p="http://schemas.openxmlformats.org/presentationml/2006/main">
+  <p:cSld name="Slide 5">
+    <p:bg>
+      <p:bgPr>
+        <a:solidFill>
+          <a:srgbClr val="F4FAF9"/>
+        </a:solidFill>
+        <a:effectLst/>
+      </p:bgPr>
+    </p:bg>
+    <p:spTree>
+      <p:nvGrpSpPr>
+        <p:cNvPr id="1" name=""/>
+        <p:cNvGrpSpPr/>
+        <p:nvPr/>
+      </p:nvGrpSpPr>
+      <p:grpSpPr>
+        <a:xfrm>
+          <a:off x="0" y="0"/>
+          <a:ext cx="0" cy="0"/>
+          <a:chOff x="0" y="0"/>
+          <a:chExt cx="0" cy="0"/>
+        </a:xfrm>
+      </p:grpSpPr>
+      <p:sp>
+        <p:nvSpPr>
+          <p:cNvPr id="2" name="Text 0"/>
+          <p:cNvSpPr/>
+          <p:nvPr/>
+        </p:nvSpPr>
+        <p:spPr>
+          <a:xfrm>
+            <a:off x="548640" y="457200"/>
+            <a:ext cx="7315200" cy="365760"/>
+          </a:xfrm>
+          <a:prstGeom prst="rect">
+            <a:avLst/>
+          </a:prstGeom>
+          <a:noFill/>
+          <a:ln/>
+        </p:spPr>
+        <p:txBody>
+          <a:bodyPr wrap="square" rtlCol="0" anchor="ctr"/>
+          <a:lstStyle/>
+          <a:p>
+            <a:pPr marL="0" indent="0">
+              <a:buNone/>
+            </a:pPr>
+            <a:r>
+              <a:rPr lang="en-US" sz="1300" b="1" kern="0" spc="200" dirty="0">
+                <a:solidFill>
+                  <a:srgbClr val="00A896"/>
+                </a:solidFill>
+                <a:latin typeface="Calibri" pitchFamily="34" charset="0"/>
+                <a:ea typeface="Calibri" pitchFamily="34" charset="-122"/>
+                <a:cs typeface="Calibri" pitchFamily="34" charset="-120"/>
+              </a:rPr>
+              <a:t>TOOL 1 OF 3</a:t>
+            </a:r>
+            <a:endParaRPr lang="en-US" sz="1300" dirty="0"/>
+          </a:p>
+        </p:txBody>
+      </p:sp>
+      <p:sp>
+        <p:nvSpPr>
+          <p:cNvPr id="3" name="Text 1"/>
+          <p:cNvSpPr/>
+          <p:nvPr/>
+        </p:nvSpPr>
+        <p:spPr>
+          <a:xfrm>
+            <a:off x="548640" y="457200"/>
+            <a:ext cx="10972800" cy="548640"/>
+          </a:xfrm>
+          <a:prstGeom prst="rect">
+            <a:avLst/>
+          </a:prstGeom>
+          <a:noFill/>
+          <a:ln/>
+        </p:spPr>
+        <p:txBody>
+          <a:bodyPr wrap="square" lIns="91440" tIns="45720" rIns="91440" bIns="45720" rtlCol="0" anchor="ctr"/>
+          <a:lstStyle/>
+          <a:p>
+            <a:r>
+              <a:rPr lang="en-US" sz="2600" b="1" dirty="0">
+                <a:solidFill>
+                  <a:srgbClr val="1E293B"/>
+                </a:solidFill>
+                <a:latin typeface="Cambria"/>
+                <a:ea typeface="Cambria"/>
+                <a:cs typeface="Cambria" pitchFamily="34" charset="-120"/>
+              </a:rPr>
+              <a:t>                    </a:t>
+            </a:r>
+            <a:r>
+              <a:rPr lang="en-US" sz="2600" b="1" dirty="0" err="1">
+                <a:solidFill>
+                  <a:srgbClr val="1E293B"/>
+                </a:solidFill>
+                <a:latin typeface="Cambria"/>
+                <a:ea typeface="Cambria"/>
+                <a:cs typeface="Cambria" pitchFamily="34" charset="-120"/>
+              </a:rPr>
+              <a:t>spaCy</a:t>
+            </a:r>
+            <a:r>
+              <a:rPr lang="en-US" sz="2600" b="1" dirty="0">
+                <a:solidFill>
+                  <a:srgbClr val="1E293B"/>
+                </a:solidFill>
+                <a:latin typeface="Cambria"/>
+                <a:ea typeface="Cambria"/>
+                <a:cs typeface="Cambria" pitchFamily="34" charset="-120"/>
+              </a:rPr>
+              <a:t> — Extracted Entities &amp; word2vec</a:t>
+            </a:r>
+            <a:endParaRPr lang="en-US" sz="2600" dirty="0">
+              <a:latin typeface="Calibri" panose="020F0502020204030204"/>
+              <a:ea typeface="Calibri" panose="020F0502020204030204"/>
+              <a:cs typeface="Calibri" panose="020F0502020204030204"/>
+            </a:endParaRPr>
+          </a:p>
+        </p:txBody>
+      </p:sp>
+      <p:sp>
+        <p:nvSpPr>
+          <p:cNvPr id="4" name="Shape 2"/>
+          <p:cNvSpPr/>
+          <p:nvPr/>
+        </p:nvSpPr>
+        <p:spPr>
+          <a:xfrm>
+            <a:off x="548640" y="1234440"/>
+            <a:ext cx="6949440" cy="5074920"/>
+          </a:xfrm>
+          <a:prstGeom prst="roundRect">
+            <a:avLst>
+              <a:gd name="adj" fmla="val 1441"/>
+            </a:avLst>
+          </a:prstGeom>
+          <a:solidFill>
+            <a:srgbClr val="FFFFFF"/>
+          </a:solidFill>
+          <a:ln/>
+          <a:effectLst>
+            <a:outerShdw blurRad="101600" dist="38100" dir="5400000" algn="bl" rotWithShape="0">
+              <a:srgbClr val="000000">
+                <a:alpha val="10000"/>
+              </a:srgbClr>
+            </a:outerShdw>
+          </a:effectLst>
+        </p:spPr>
+      </p:sp>
+      <p:sp>
+        <p:nvSpPr>
+          <p:cNvPr id="5" name="Text 3"/>
+          <p:cNvSpPr/>
+          <p:nvPr/>
+        </p:nvSpPr>
+        <p:spPr>
+          <a:xfrm>
+            <a:off x="868680" y="1417320"/>
+            <a:ext cx="6400800" cy="365760"/>
+          </a:xfrm>
+          <a:prstGeom prst="rect">
+            <a:avLst/>
+          </a:prstGeom>
+          <a:noFill/>
+          <a:ln/>
+        </p:spPr>
+        <p:txBody>
+          <a:bodyPr wrap="square" rtlCol="0" anchor="ctr"/>
+          <a:lstStyle/>
+          <a:p>
+            <a:pPr marL="0" indent="0">
+              <a:buNone/>
+            </a:pPr>
+            <a:r>
+              <a:rPr lang="en-US" sz="1500" b="1" dirty="0">
+                <a:solidFill>
+                  <a:srgbClr val="028090"/>
+                </a:solidFill>
+                <a:latin typeface="Calibri" pitchFamily="34" charset="0"/>
+                <a:ea typeface="Calibri" pitchFamily="34" charset="-122"/>
+                <a:cs typeface="Calibri" pitchFamily="34" charset="-120"/>
+              </a:rPr>
+              <a:t>Extracted Entities (by label)</a:t>
+            </a:r>
+            <a:endParaRPr lang="en-US" sz="1500" dirty="0"/>
+          </a:p>
+        </p:txBody>
+      </p:sp>
+      <p:sp>
+        <p:nvSpPr>
+          <p:cNvPr id="6" name="Text 4"/>
+          <p:cNvSpPr/>
+          <p:nvPr/>
+        </p:nvSpPr>
+        <p:spPr>
+          <a:xfrm>
+            <a:off x="868680" y="1755648"/>
+            <a:ext cx="6400800" cy="274320"/>
+          </a:xfrm>
+          <a:prstGeom prst="rect">
+            <a:avLst/>
+          </a:prstGeom>
+          <a:noFill/>
+          <a:ln/>
+        </p:spPr>
+        <p:txBody>
+          <a:bodyPr wrap="square" rtlCol="0" anchor="ctr"/>
+          <a:lstStyle/>
+          <a:p>
+            <a:pPr marL="0" indent="0">
+              <a:buNone/>
+            </a:pPr>
+            <a:r>
+              <a:rPr lang="en-US" sz="1150" i="1" dirty="0">
+                <a:solidFill>
+                  <a:srgbClr val="64748B"/>
+                </a:solidFill>
+                <a:latin typeface="Calibri" pitchFamily="34" charset="0"/>
+                <a:ea typeface="Calibri" pitchFamily="34" charset="-122"/>
+                <a:cs typeface="Calibri" pitchFamily="34" charset="-120"/>
+              </a:rPr>
+              <a:t>Examples: "Addendum" -&gt; PERSON, "PO" -&gt; ORG, "30" -&gt; CARDINAL (mostly noise)</a:t>
+            </a:r>
+            <a:endParaRPr lang="en-US" sz="1150" dirty="0"/>
+          </a:p>
+        </p:txBody>
+      </p:sp>
+      <p:graphicFrame>
+        <p:nvGraphicFramePr>
+          <p:cNvPr id="7" name="Chart 0"/>
+          <p:cNvGraphicFramePr/>
+          <p:nvPr/>
+        </p:nvGraphicFramePr>
+        <p:xfrm>
+          <a:off x="777240" y="2103120"/>
+          <a:ext cx="6400800" cy="4023360"/>
+        </p:xfrm>
+        <a:graphic>
+          <a:graphicData uri="http://schemas.openxmlformats.org/drawingml/2006/chart">
+            <c:chart xmlns:c="http://schemas.openxmlformats.org/drawingml/2006/chart" xmlns:r="http://schemas.openxmlformats.org/officeDocument/2006/relationships" r:id="rId3"/>
+          </a:graphicData>
+        </a:graphic>
+      </p:graphicFrame>
+      <p:sp>
+        <p:nvSpPr>
+          <p:cNvPr id="8" name="Shape 5"/>
+          <p:cNvSpPr/>
+          <p:nvPr/>
+        </p:nvSpPr>
+        <p:spPr>
+          <a:xfrm>
+            <a:off x="7680960" y="1234440"/>
+            <a:ext cx="3931920" cy="5074920"/>
+          </a:xfrm>
+          <a:prstGeom prst="roundRect">
+            <a:avLst>
+              <a:gd name="adj" fmla="val 1860"/>
+            </a:avLst>
+          </a:prstGeom>
+          <a:solidFill>
+            <a:srgbClr val="EAFBF6"/>
+          </a:solidFill>
+          <a:ln/>
+          <a:effectLst>
+            <a:outerShdw blurRad="101600" dist="38100" dir="5400000" algn="bl" rotWithShape="0">
+              <a:srgbClr val="000000">
+                <a:alpha val="10000"/>
+              </a:srgbClr>
+            </a:outerShdw>
+          </a:effectLst>
+        </p:spPr>
+      </p:sp>
+      <p:sp>
+        <p:nvSpPr>
+          <p:cNvPr id="9" name="Text 6"/>
+          <p:cNvSpPr/>
+          <p:nvPr/>
+        </p:nvSpPr>
+        <p:spPr>
+          <a:xfrm>
+            <a:off x="7955280" y="1417320"/>
+            <a:ext cx="3383280" cy="365760"/>
+          </a:xfrm>
+          <a:prstGeom prst="rect">
+            <a:avLst/>
+          </a:prstGeom>
+          <a:noFill/>
+          <a:ln/>
+        </p:spPr>
+        <p:txBody>
+          <a:bodyPr wrap="square" rtlCol="0" anchor="ctr"/>
+          <a:lstStyle/>
+          <a:p>
+            <a:pPr marL="0" indent="0">
+              <a:buNone/>
+            </a:pPr>
+            <a:r>
+              <a:rPr lang="en-US" sz="1500" b="1" dirty="0">
+                <a:solidFill>
+                  <a:srgbClr val="028090"/>
+                </a:solidFill>
+                <a:latin typeface="Calibri" pitchFamily="34" charset="0"/>
+                <a:ea typeface="Calibri" pitchFamily="34" charset="-122"/>
+                <a:cs typeface="Calibri" pitchFamily="34" charset="-120"/>
+              </a:rPr>
+              <a:t>word2vec Embeddings</a:t>
+            </a:r>
+            <a:endParaRPr lang="en-US" sz="1500" dirty="0"/>
+          </a:p>
+        </p:txBody>
+      </p:sp>
+      <p:sp>
+        <p:nvSpPr>
+          <p:cNvPr id="10" name="Text 7"/>
+          <p:cNvSpPr/>
+          <p:nvPr/>
+        </p:nvSpPr>
+        <p:spPr>
+          <a:xfrm>
+            <a:off x="7955280" y="2011680"/>
+            <a:ext cx="3383280" cy="914400"/>
+          </a:xfrm>
+          <a:prstGeom prst="rect">
+            <a:avLst/>
+          </a:prstGeom>
+          <a:noFill/>
+          <a:ln/>
+        </p:spPr>
+        <p:txBody>
+          <a:bodyPr wrap="square" rtlCol="0" anchor="ctr"/>
+          <a:lstStyle/>
+          <a:p>
+            <a:pPr marL="0" indent="0">
+              <a:buNone/>
+            </a:pPr>
+            <a:r>
+              <a:rPr lang="en-US" sz="5600" b="1" dirty="0">
+                <a:solidFill>
+                  <a:srgbClr val="0F766E"/>
+                </a:solidFill>
+                <a:latin typeface="Calibri" pitchFamily="34" charset="0"/>
+                <a:ea typeface="Calibri" pitchFamily="34" charset="-122"/>
+                <a:cs typeface="Calibri" pitchFamily="34" charset="-120"/>
+              </a:rPr>
+              <a:t>2,306</a:t>
+            </a:r>
+            <a:endParaRPr lang="en-US" sz="5600" dirty="0"/>
+          </a:p>
+        </p:txBody>
+      </p:sp>
+      <p:sp>
+        <p:nvSpPr>
+          <p:cNvPr id="11" name="Text 8"/>
+          <p:cNvSpPr/>
+          <p:nvPr/>
+        </p:nvSpPr>
+        <p:spPr>
+          <a:xfrm>
+            <a:off x="7955280" y="2880360"/>
+            <a:ext cx="3383280" cy="365760"/>
+          </a:xfrm>
+          <a:prstGeom prst="rect">
+            <a:avLst/>
+          </a:prstGeom>
+          <a:noFill/>
+          <a:ln/>
+        </p:spPr>
+        <p:txBody>
+          <a:bodyPr wrap="square" rtlCol="0" anchor="ctr"/>
+          <a:lstStyle/>
+          <a:p>
+            <a:pPr marL="0" indent="0">
+              <a:buNone/>
+            </a:pPr>
+            <a:r>
+              <a:rPr lang="en-US" sz="1300" dirty="0">
+                <a:solidFill>
+                  <a:srgbClr val="64748B"/>
+                </a:solidFill>
+                <a:latin typeface="Calibri" pitchFamily="34" charset="0"/>
+                <a:ea typeface="Calibri" pitchFamily="34" charset="-122"/>
+                <a:cs typeface="Calibri" pitchFamily="34" charset="-120"/>
+              </a:rPr>
+              <a:t>vocabulary words learned</a:t>
+            </a:r>
+            <a:endParaRPr lang="en-US" sz="1300" dirty="0"/>
+          </a:p>
+        </p:txBody>
+      </p:sp>
+      <p:sp>
+        <p:nvSpPr>
+          <p:cNvPr id="12" name="Text 9"/>
+          <p:cNvSpPr/>
+          <p:nvPr/>
+        </p:nvSpPr>
+        <p:spPr>
+          <a:xfrm>
+            <a:off x="7955280" y="3429000"/>
+            <a:ext cx="3383280" cy="2651760"/>
+          </a:xfrm>
+          <a:prstGeom prst="rect">
+            <a:avLst/>
+          </a:prstGeom>
+          <a:noFill/>
+          <a:ln/>
+        </p:spPr>
+        <p:txBody>
+          <a:bodyPr wrap="square" rtlCol="0" anchor="t"/>
+          <a:lstStyle/>
+          <a:p>
+            <a:pPr marL="342900" indent="-342900">
+              <a:spcAft>
+                <a:spcPts val="800"/>
+              </a:spcAft>
+              <a:buSzPct val="100000"/>
+              <a:buChar char="•"/>
+            </a:pPr>
+            <a:r>
+              <a:rPr lang="en-US" sz="1250" dirty="0">
+                <a:solidFill>
+                  <a:srgbClr val="1E293B"/>
+                </a:solidFill>
+                <a:latin typeface="Calibri" pitchFamily="34" charset="0"/>
+                <a:ea typeface="Calibri" pitchFamily="34" charset="-122"/>
+                <a:cs typeface="Calibri" pitchFamily="34" charset="-120"/>
+              </a:rPr>
+              <a:t>Vector size: 100 dimensions</a:t>
+            </a:r>
+            <a:endParaRPr lang="en-US" sz="1250" dirty="0"/>
+          </a:p>
+          <a:p>
+            <a:pPr marL="342900" indent="-342900">
+              <a:spcAft>
+                <a:spcPts val="800"/>
+              </a:spcAft>
+              <a:buSzPct val="100000"/>
+              <a:buChar char="•"/>
+            </a:pPr>
+            <a:r>
+              <a:rPr lang="en-US" sz="1250" dirty="0">
+                <a:solidFill>
+                  <a:srgbClr val="1E293B"/>
+                </a:solidFill>
+                <a:latin typeface="Calibri" pitchFamily="34" charset="0"/>
+                <a:ea typeface="Calibri" pitchFamily="34" charset="-122"/>
+                <a:cs typeface="Calibri" pitchFamily="34" charset="-120"/>
+              </a:rPr>
+              <a:t>Window: 5 words of context</a:t>
+            </a:r>
+            <a:endParaRPr lang="en-US" sz="1250" dirty="0"/>
+          </a:p>
+          <a:p>
+            <a:pPr marL="342900" indent="-342900">
+              <a:spcAft>
+                <a:spcPts val="800"/>
+              </a:spcAft>
+              <a:buSzPct val="100000"/>
+              <a:buChar char="•"/>
+            </a:pPr>
+            <a:r>
+              <a:rPr lang="en-US" sz="1250" dirty="0">
+                <a:solidFill>
+                  <a:srgbClr val="1E293B"/>
+                </a:solidFill>
+                <a:latin typeface="Calibri" pitchFamily="34" charset="0"/>
+                <a:ea typeface="Calibri" pitchFamily="34" charset="-122"/>
+                <a:cs typeface="Calibri" pitchFamily="34" charset="-120"/>
+              </a:rPr>
+              <a:t>Min count: 2 occurrences</a:t>
+            </a:r>
+            <a:endParaRPr lang="en-US" sz="1250" dirty="0"/>
+          </a:p>
+          <a:p>
+            <a:pPr marL="342900" indent="-342900">
+              <a:spcAft>
+                <a:spcPts val="800"/>
+              </a:spcAft>
+              <a:buSzPct val="100000"/>
+              <a:buChar char="•"/>
+            </a:pPr>
+            <a:r>
+              <a:rPr lang="en-US" sz="1250" dirty="0">
+                <a:solidFill>
+                  <a:srgbClr val="1E293B"/>
+                </a:solidFill>
+                <a:latin typeface="Calibri" pitchFamily="34" charset="0"/>
+                <a:ea typeface="Calibri" pitchFamily="34" charset="-122"/>
+                <a:cs typeface="Calibri" pitchFamily="34" charset="-120"/>
+              </a:rPr>
+              <a:t>Trained on: tokenized note text from this tool's pipeline</a:t>
+            </a:r>
+            <a:endParaRPr lang="en-US" sz="1250" dirty="0"/>
+          </a:p>
+        </p:txBody>
+      </p:sp>
+      <p:sp>
+        <p:nvSpPr>
+          <p:cNvPr id="13" name="Text 10"/>
+          <p:cNvSpPr/>
+          <p:nvPr/>
+        </p:nvSpPr>
+        <p:spPr>
+          <a:xfrm>
+            <a:off x="10058400" y="6446520"/>
+            <a:ext cx="1828800" cy="274320"/>
+          </a:xfrm>
+          <a:prstGeom prst="rect">
+            <a:avLst/>
+          </a:prstGeom>
+          <a:noFill/>
+          <a:ln/>
+        </p:spPr>
+        <p:txBody>
+          <a:bodyPr wrap="square" rtlCol="0" anchor="ctr"/>
+          <a:lstStyle/>
+          <a:p>
+            <a:pPr marL="0" indent="0" algn="r">
+              <a:buNone/>
+            </a:pPr>
+            <a:r>
+              <a:rPr lang="en-US" sz="1000" dirty="0">
+                <a:solidFill>
+                  <a:srgbClr val="64748B"/>
+                </a:solidFill>
+                <a:latin typeface="Calibri" pitchFamily="34" charset="0"/>
+                <a:ea typeface="Calibri" pitchFamily="34" charset="-122"/>
+                <a:cs typeface="Calibri" pitchFamily="34" charset="-120"/>
+              </a:rPr>
+              <a:t>5</a:t>
+            </a:r>
+            <a:endParaRPr lang="en-US" sz="1000" dirty="0"/>
+          </a:p>
+        </p:txBody>
+      </p:sp>
+    </p:spTree>
+  </p:cSld>
+  <p:clrMapOvr>
+    <a:masterClrMapping/>
+  </p:clrMapOvr>
+</p:sld>
+</file>
+
+<file path=ppt/slides/slide6.xml><?xml version="1.0" encoding="utf-8"?>
+<p:sld xmlns:a="http://schemas.openxmlformats.org/drawingml/2006/main" xmlns:r="http://schemas.openxmlformats.org/officeDocument/2006/relationships" xmlns:p="http://schemas.openxmlformats.org/presentationml/2006/main">
+  <p:cSld name="Slide 6">
+    <p:bg>
+      <p:bgPr>
+        <a:solidFill>
+          <a:srgbClr val="F4FAF9"/>
+        </a:solidFill>
+        <a:effectLst/>
+      </p:bgPr>
+    </p:bg>
+    <p:spTree>
+      <p:nvGrpSpPr>
+        <p:cNvPr id="1" name=""/>
+        <p:cNvGrpSpPr/>
+        <p:nvPr/>
+      </p:nvGrpSpPr>
+      <p:grpSpPr>
+        <a:xfrm>
+          <a:off x="0" y="0"/>
+          <a:ext cx="0" cy="0"/>
+          <a:chOff x="0" y="0"/>
+          <a:chExt cx="0" cy="0"/>
+        </a:xfrm>
+      </p:grpSpPr>
+      <p:sp>
+        <p:nvSpPr>
+          <p:cNvPr id="2" name="Text 0"/>
+          <p:cNvSpPr/>
+          <p:nvPr/>
+        </p:nvSpPr>
+        <p:spPr>
+          <a:xfrm>
+            <a:off x="548640" y="457200"/>
+            <a:ext cx="7315200" cy="365760"/>
+          </a:xfrm>
+          <a:prstGeom prst="rect">
+            <a:avLst/>
+          </a:prstGeom>
+          <a:noFill/>
+          <a:ln/>
+        </p:spPr>
+        <p:txBody>
+          <a:bodyPr wrap="square" rtlCol="0" anchor="ctr"/>
+          <a:lstStyle/>
+          <a:p>
+            <a:pPr marL="0" indent="0">
+              <a:buNone/>
+            </a:pPr>
+            <a:r>
+              <a:rPr lang="en-US" sz="1300" b="1" kern="0" spc="200" dirty="0">
+                <a:solidFill>
+                  <a:srgbClr val="00A896"/>
+                </a:solidFill>
+                <a:latin typeface="Calibri" pitchFamily="34" charset="0"/>
+                <a:ea typeface="Calibri" pitchFamily="34" charset="-122"/>
+                <a:cs typeface="Calibri" pitchFamily="34" charset="-120"/>
+              </a:rPr>
+              <a:t>TOOL 1 OF 3</a:t>
+            </a:r>
+            <a:endParaRPr lang="en-US" sz="1300" dirty="0"/>
+          </a:p>
+        </p:txBody>
+      </p:sp>
+      <p:sp>
+        <p:nvSpPr>
+          <p:cNvPr id="3" name="Text 1"/>
+          <p:cNvSpPr/>
+          <p:nvPr/>
+        </p:nvSpPr>
+        <p:spPr>
+          <a:xfrm>
+            <a:off x="548640" y="457200"/>
+            <a:ext cx="10972800" cy="502920"/>
+          </a:xfrm>
+          <a:prstGeom prst="rect">
+            <a:avLst/>
+          </a:prstGeom>
+          <a:noFill/>
+          <a:ln/>
+        </p:spPr>
+        <p:txBody>
+          <a:bodyPr wrap="square" lIns="91440" tIns="45720" rIns="91440" bIns="45720" rtlCol="0" anchor="ctr"/>
+          <a:lstStyle/>
+          <a:p>
+            <a:r>
+              <a:rPr lang="en-US" sz="2600" b="1" dirty="0">
+                <a:solidFill>
+                  <a:srgbClr val="1E293B"/>
+                </a:solidFill>
+                <a:latin typeface="Cambria"/>
+                <a:ea typeface="Cambria"/>
+                <a:cs typeface="Cambria" pitchFamily="34" charset="-120"/>
+              </a:rPr>
+              <a:t>                       </a:t>
+            </a:r>
+            <a:r>
+              <a:rPr lang="en-US" sz="2600" b="1" dirty="0" err="1">
+                <a:solidFill>
+                  <a:srgbClr val="1E293B"/>
+                </a:solidFill>
+                <a:latin typeface="Cambria"/>
+                <a:ea typeface="Cambria"/>
+                <a:cs typeface="Cambria" pitchFamily="34" charset="-120"/>
+              </a:rPr>
+              <a:t>spaCy</a:t>
+            </a:r>
+            <a:r>
+              <a:rPr lang="en-US" sz="2600" b="1" dirty="0">
+                <a:solidFill>
+                  <a:srgbClr val="1E293B"/>
+                </a:solidFill>
+                <a:latin typeface="Cambria"/>
+                <a:ea typeface="Cambria"/>
+                <a:cs typeface="Cambria" pitchFamily="34" charset="-120"/>
+              </a:rPr>
+              <a:t> — Tuned t-SNE Plot</a:t>
+            </a:r>
+            <a:endParaRPr lang="en-US" sz="2600" dirty="0">
+              <a:latin typeface="Cambria"/>
+              <a:ea typeface="Cambria"/>
+            </a:endParaRPr>
+          </a:p>
+        </p:txBody>
+      </p:sp>
+      <p:sp>
+        <p:nvSpPr>
+          <p:cNvPr id="4" name="Text 2"/>
+          <p:cNvSpPr/>
+          <p:nvPr/>
+        </p:nvSpPr>
+        <p:spPr>
+          <a:xfrm>
+            <a:off x="548640" y="960120"/>
+            <a:ext cx="10972800" cy="365760"/>
+          </a:xfrm>
+          <a:prstGeom prst="rect">
+            <a:avLst/>
+          </a:prstGeom>
+          <a:noFill/>
+          <a:ln/>
+        </p:spPr>
+        <p:txBody>
+          <a:bodyPr wrap="square" rtlCol="0" anchor="ctr"/>
+          <a:lstStyle/>
+          <a:p>
+            <a:pPr marL="0" indent="0">
+              <a:buNone/>
+            </a:pPr>
+            <a:r>
+              <a:rPr lang="en-US" sz="1400" i="1" dirty="0">
+                <a:solidFill>
+                  <a:srgbClr val="64748B"/>
+                </a:solidFill>
+                <a:latin typeface="Calibri" pitchFamily="34" charset="0"/>
+                <a:ea typeface="Calibri" pitchFamily="34" charset="-122"/>
+                <a:cs typeface="Calibri" pitchFamily="34" charset="-120"/>
+              </a:rPr>
+              <a:t>word2vec embeddings projected to 2D across four perplexity values</a:t>
+            </a:r>
+            <a:endParaRPr lang="en-US" sz="1400" dirty="0"/>
+          </a:p>
+        </p:txBody>
+      </p:sp>
+      <p:sp>
+        <p:nvSpPr>
+          <p:cNvPr id="5" name="Shape 3"/>
+          <p:cNvSpPr/>
+          <p:nvPr/>
+        </p:nvSpPr>
+        <p:spPr>
+          <a:xfrm>
+            <a:off x="548640" y="1463040"/>
+            <a:ext cx="11064240" cy="4572000"/>
+          </a:xfrm>
+          <a:prstGeom prst="roundRect">
+            <a:avLst>
+              <a:gd name="adj" fmla="val 1600"/>
+            </a:avLst>
+          </a:prstGeom>
+          <a:solidFill>
+            <a:srgbClr val="FFFFFF"/>
+          </a:solidFill>
+          <a:ln/>
+          <a:effectLst>
+            <a:outerShdw blurRad="101600" dist="38100" dir="5400000" algn="bl" rotWithShape="0">
+              <a:srgbClr val="000000">
+                <a:alpha val="10000"/>
+              </a:srgbClr>
+            </a:outerShdw>
+          </a:effectLst>
+        </p:spPr>
+      </p:sp>
+      <p:pic>
+        <p:nvPicPr>
+          <p:cNvPr id="6" name="Image 0" descr="/home/claude/tsne_images/spacy_tsne.png"/>
+          <p:cNvPicPr>
+            <a:picLocks noChangeAspect="1"/>
+          </p:cNvPicPr>
+          <p:nvPr/>
+        </p:nvPicPr>
+        <p:blipFill>
+          <a:blip r:embed="rId3"/>
+          <a:stretch>
+            <a:fillRect/>
+          </a:stretch>
+        </p:blipFill>
+        <p:spPr>
+          <a:xfrm>
+            <a:off x="822960" y="2493862"/>
+            <a:ext cx="10515600" cy="2327476"/>
+          </a:xfrm>
+          <a:prstGeom prst="rect">
+            <a:avLst/>
+          </a:prstGeom>
+        </p:spPr>
+      </p:pic>
+      <p:sp>
+        <p:nvSpPr>
+          <p:cNvPr id="7" name="Text 4"/>
+          <p:cNvSpPr/>
+          <p:nvPr/>
+        </p:nvSpPr>
+        <p:spPr>
+          <a:xfrm>
+            <a:off x="868680" y="5623560"/>
+            <a:ext cx="10424160" cy="365760"/>
+          </a:xfrm>
+          <a:prstGeom prst="rect">
+            <a:avLst/>
+          </a:prstGeom>
+          <a:noFill/>
+          <a:ln/>
+        </p:spPr>
+        <p:txBody>
+          <a:bodyPr wrap="square" rtlCol="0" anchor="ctr"/>
+          <a:lstStyle/>
+          <a:p>
+            <a:pPr marL="0" indent="0">
+              <a:buNone/>
+            </a:pPr>
+            <a:r>
+              <a:rPr lang="en-US" sz="1250" dirty="0">
+                <a:solidFill>
+                  <a:srgbClr val="64748B"/>
+                </a:solidFill>
+                <a:latin typeface="Calibri" pitchFamily="34" charset="0"/>
+                <a:ea typeface="Calibri" pitchFamily="34" charset="-122"/>
+                <a:cs typeface="Calibri" pitchFamily="34" charset="-120"/>
+              </a:rPr>
+              <a:t>Perplexity swept at 5, 15, 30, and 50 to check the clustering held up across settings, per the Distill.pub tuning guidance.</a:t>
+            </a:r>
+            <a:endParaRPr lang="en-US" sz="1250" dirty="0"/>
+          </a:p>
+        </p:txBody>
+      </p:sp>
+      <p:sp>
+        <p:nvSpPr>
+          <p:cNvPr id="8" name="Text 5"/>
+          <p:cNvSpPr/>
+          <p:nvPr/>
+        </p:nvSpPr>
+        <p:spPr>
+          <a:xfrm>
+            <a:off x="10058400" y="6446520"/>
+            <a:ext cx="1828800" cy="274320"/>
+          </a:xfrm>
+          <a:prstGeom prst="rect">
+            <a:avLst/>
+          </a:prstGeom>
+          <a:noFill/>
+          <a:ln/>
+        </p:spPr>
+        <p:txBody>
+          <a:bodyPr wrap="square" rtlCol="0" anchor="ctr"/>
+          <a:lstStyle/>
+          <a:p>
+            <a:pPr marL="0" indent="0" algn="r">
+              <a:buNone/>
+            </a:pPr>
+            <a:r>
+              <a:rPr lang="en-US" sz="1000" dirty="0">
+                <a:solidFill>
+                  <a:srgbClr val="64748B"/>
+                </a:solidFill>
+                <a:latin typeface="Calibri" pitchFamily="34" charset="0"/>
+                <a:ea typeface="Calibri" pitchFamily="34" charset="-122"/>
+                <a:cs typeface="Calibri" pitchFamily="34" charset="-120"/>
+              </a:rPr>
+              <a:t>6</a:t>
+            </a:r>
+            <a:endParaRPr lang="en-US" sz="1000" dirty="0"/>
+          </a:p>
+        </p:txBody>
+      </p:sp>
+    </p:spTree>
+  </p:cSld>
+  <p:clrMapOvr>
+    <a:masterClrMapping/>
+  </p:clrMapOvr>
+</p:sld>
+</file>
+
+<file path=ppt/slides/slide7.xml><?xml version="1.0" encoding="utf-8"?>
+<p:sld xmlns:a="http://schemas.openxmlformats.org/drawingml/2006/main" xmlns:r="http://schemas.openxmlformats.org/officeDocument/2006/relationships" xmlns:p="http://schemas.openxmlformats.org/presentationml/2006/main">
+  <p:cSld name="Slide 7">
+    <p:bg>
+      <p:bgPr>
+        <a:solidFill>
+          <a:srgbClr val="F4FAF9"/>
+        </a:solidFill>
+        <a:effectLst/>
+      </p:bgPr>
+    </p:bg>
+    <p:spTree>
+      <p:nvGrpSpPr>
+        <p:cNvPr id="1" name=""/>
+        <p:cNvGrpSpPr/>
+        <p:nvPr/>
+      </p:nvGrpSpPr>
+      <p:grpSpPr>
+        <a:xfrm>
+          <a:off x="0" y="0"/>
+          <a:ext cx="0" cy="0"/>
+          <a:chOff x="0" y="0"/>
+          <a:chExt cx="0" cy="0"/>
+        </a:xfrm>
+      </p:grpSpPr>
+      <p:sp>
+        <p:nvSpPr>
+          <p:cNvPr id="2" name="Text 0"/>
+          <p:cNvSpPr/>
+          <p:nvPr/>
+        </p:nvSpPr>
+        <p:spPr>
+          <a:xfrm>
+            <a:off x="548640" y="457200"/>
+            <a:ext cx="7315200" cy="365760"/>
+          </a:xfrm>
+          <a:prstGeom prst="rect">
+            <a:avLst/>
+          </a:prstGeom>
+          <a:noFill/>
+          <a:ln/>
+        </p:spPr>
+        <p:txBody>
+          <a:bodyPr wrap="square" rtlCol="0" anchor="ctr"/>
+          <a:lstStyle/>
+          <a:p>
+            <a:pPr marL="0" indent="0">
+              <a:buNone/>
+            </a:pPr>
+            <a:r>
+              <a:rPr lang="en-US" sz="1300" b="1" kern="0" spc="200" dirty="0">
+                <a:solidFill>
+                  <a:srgbClr val="00A896"/>
+                </a:solidFill>
+                <a:latin typeface="Calibri" pitchFamily="34" charset="0"/>
+                <a:ea typeface="Calibri" pitchFamily="34" charset="-122"/>
+                <a:cs typeface="Calibri" pitchFamily="34" charset="-120"/>
+              </a:rPr>
+              <a:t>TOOL 2 OF 3</a:t>
+            </a:r>
+            <a:endParaRPr lang="en-US" sz="1300" dirty="0"/>
+          </a:p>
+        </p:txBody>
+      </p:sp>
+      <p:sp>
+        <p:nvSpPr>
+          <p:cNvPr id="3" name="Text 1"/>
+          <p:cNvSpPr/>
+          <p:nvPr/>
+        </p:nvSpPr>
+        <p:spPr>
+          <a:xfrm>
+            <a:off x="548640" y="868680"/>
+            <a:ext cx="10972800" cy="548640"/>
+          </a:xfrm>
+          <a:prstGeom prst="rect">
+            <a:avLst/>
+          </a:prstGeom>
+          <a:noFill/>
+          <a:ln/>
+        </p:spPr>
+        <p:txBody>
+          <a:bodyPr wrap="square" rtlCol="0" anchor="ctr"/>
+          <a:lstStyle/>
+          <a:p>
+            <a:pPr marL="0" indent="0">
+              <a:buNone/>
+            </a:pPr>
+            <a:r>
+              <a:rPr lang="en-US" sz="2800" b="1" dirty="0">
+                <a:solidFill>
+                  <a:srgbClr val="1E293B"/>
+                </a:solidFill>
+                <a:latin typeface="Cambria" pitchFamily="34" charset="0"/>
+                <a:ea typeface="Cambria" pitchFamily="34" charset="-122"/>
+                <a:cs typeface="Cambria" pitchFamily="34" charset="-120"/>
+              </a:rPr>
+              <a:t>scispaCy — Biomedical NLP</a:t>
+            </a:r>
+            <a:endParaRPr lang="en-US" sz="2800" dirty="0"/>
+          </a:p>
+        </p:txBody>
+      </p:sp>
+      <p:sp>
+        <p:nvSpPr>
+          <p:cNvPr id="4" name="Text 2"/>
+          <p:cNvSpPr/>
+          <p:nvPr/>
+        </p:nvSpPr>
+        <p:spPr>
+          <a:xfrm>
+            <a:off x="548640" y="1417320"/>
+            <a:ext cx="10972800" cy="365760"/>
+          </a:xfrm>
+          <a:prstGeom prst="rect">
+            <a:avLst/>
+          </a:prstGeom>
+          <a:noFill/>
+          <a:ln/>
+        </p:spPr>
+        <p:txBody>
+          <a:bodyPr wrap="square" rtlCol="0" anchor="ctr"/>
+          <a:lstStyle/>
+          <a:p>
+            <a:pPr marL="0" indent="0">
+              <a:buNone/>
+            </a:pPr>
+            <a:r>
+              <a:rPr lang="en-US" sz="1500" i="1" dirty="0">
+                <a:solidFill>
+                  <a:srgbClr val="64748B"/>
+                </a:solidFill>
+                <a:latin typeface="Calibri" pitchFamily="34" charset="0"/>
+                <a:ea typeface="Calibri" pitchFamily="34" charset="-122"/>
+                <a:cs typeface="Calibri" pitchFamily="34" charset="-120"/>
+              </a:rPr>
+              <a:t>Same pipeline, trained on biomedical and clinical text</a:t>
+            </a:r>
+            <a:endParaRPr lang="en-US" sz="1500" dirty="0"/>
+          </a:p>
+        </p:txBody>
+      </p:sp>
+      <p:sp>
+        <p:nvSpPr>
+          <p:cNvPr id="5" name="Shape 3"/>
+          <p:cNvSpPr/>
+          <p:nvPr/>
+        </p:nvSpPr>
+        <p:spPr>
+          <a:xfrm>
+            <a:off x="548640" y="1965960"/>
+            <a:ext cx="5943600" cy="3977640"/>
+          </a:xfrm>
+          <a:prstGeom prst="roundRect">
+            <a:avLst>
+              <a:gd name="adj" fmla="val 1839"/>
+            </a:avLst>
+          </a:prstGeom>
+          <a:solidFill>
+            <a:srgbClr val="FFFFFF"/>
+          </a:solidFill>
+          <a:ln/>
+          <a:effectLst>
+            <a:outerShdw blurRad="101600" dist="38100" dir="5400000" algn="bl" rotWithShape="0">
+              <a:srgbClr val="000000">
+                <a:alpha val="10000"/>
+              </a:srgbClr>
+            </a:outerShdw>
+          </a:effectLst>
+        </p:spPr>
+      </p:sp>
+      <p:sp>
+        <p:nvSpPr>
+          <p:cNvPr id="6" name="Text 4"/>
+          <p:cNvSpPr/>
+          <p:nvPr/>
+        </p:nvSpPr>
+        <p:spPr>
+          <a:xfrm>
+            <a:off x="868680" y="2240280"/>
+            <a:ext cx="5349240" cy="3474720"/>
+          </a:xfrm>
+          <a:prstGeom prst="rect">
+            <a:avLst/>
+          </a:prstGeom>
+          <a:noFill/>
+          <a:ln/>
+        </p:spPr>
+        <p:txBody>
+          <a:bodyPr wrap="square" lIns="91440" tIns="45720" rIns="91440" bIns="45720" rtlCol="0" anchor="t"/>
+          <a:lstStyle/>
+          <a:p>
+            <a:pPr marL="0" indent="0">
+              <a:spcAft>
+                <a:spcPts val="600"/>
+              </a:spcAft>
+              <a:buNone/>
+            </a:pPr>
+            <a:r>
+              <a:rPr lang="en-US" sz="1400" b="1" dirty="0">
+                <a:solidFill>
+                  <a:srgbClr val="028090"/>
+                </a:solidFill>
+                <a:latin typeface="Calibri" pitchFamily="34" charset="0"/>
+                <a:ea typeface="Calibri" pitchFamily="34" charset="-122"/>
+                <a:cs typeface="Calibri" pitchFamily="34" charset="-120"/>
+              </a:rPr>
+              <a:t>What it does:</a:t>
+            </a:r>
+            <a:endParaRPr lang="en-US" sz="1400" dirty="0"/>
+          </a:p>
+          <a:p>
+            <a:pPr marL="0" indent="0">
+              <a:spcAft>
+                <a:spcPts val="600"/>
+              </a:spcAft>
+              <a:buNone/>
+            </a:pPr>
+            <a:r>
+              <a:rPr lang="en-US" sz="1400" dirty="0">
+                <a:solidFill>
+                  <a:srgbClr val="1E293B"/>
+                </a:solidFill>
+                <a:latin typeface="Calibri" pitchFamily="34" charset="0"/>
+                <a:ea typeface="Calibri" pitchFamily="34" charset="-122"/>
+                <a:cs typeface="Calibri" pitchFamily="34" charset="-120"/>
+              </a:rPr>
+              <a:t>Uses models trained on biomedical literature to recognize diseases, chemicals, and other domain-specific terms.</a:t>
+            </a:r>
+            <a:endParaRPr lang="en-US" sz="1400" dirty="0"/>
+          </a:p>
+          <a:p>
+            <a:pPr marL="0" indent="0">
+              <a:spcAft>
+                <a:spcPts val="600"/>
+              </a:spcAft>
+              <a:buNone/>
+            </a:pPr>
+            <a:r>
+              <a:rPr lang="en-US" sz="400" dirty="0">
+                <a:solidFill>
+                  <a:srgbClr val="000000"/>
+                </a:solidFill>
+                <a:latin typeface="Calibri" pitchFamily="34" charset="0"/>
+                <a:ea typeface="Calibri" pitchFamily="34" charset="-122"/>
+                <a:cs typeface="Calibri" pitchFamily="34" charset="-120"/>
+              </a:rPr>
+              <a:t> </a:t>
+            </a:r>
+            <a:endParaRPr lang="en-US" sz="1400" dirty="0"/>
+          </a:p>
+          <a:p>
+            <a:pPr marL="0" indent="0">
+              <a:spcAft>
+                <a:spcPts val="600"/>
+              </a:spcAft>
+              <a:buNone/>
+            </a:pPr>
+            <a:r>
+              <a:rPr lang="en-US" sz="1400" b="1" dirty="0">
+                <a:solidFill>
+                  <a:srgbClr val="028090"/>
+                </a:solidFill>
+                <a:latin typeface="Calibri" pitchFamily="34" charset="0"/>
+                <a:ea typeface="Calibri" pitchFamily="34" charset="-122"/>
+                <a:cs typeface="Calibri" pitchFamily="34" charset="-120"/>
+              </a:rPr>
+              <a:t>Why it matters:</a:t>
+            </a:r>
+            <a:endParaRPr lang="en-US" sz="1400" dirty="0"/>
+          </a:p>
+          <a:p>
+            <a:pPr marL="0" indent="0">
+              <a:spcAft>
+                <a:spcPts val="600"/>
+              </a:spcAft>
+              <a:buNone/>
+            </a:pPr>
+            <a:r>
+              <a:rPr lang="en-US" sz="1400" dirty="0">
+                <a:solidFill>
+                  <a:srgbClr val="1E293B"/>
+                </a:solidFill>
+                <a:latin typeface="Calibri"/>
+                <a:ea typeface="Calibri"/>
+                <a:cs typeface="Calibri"/>
+              </a:rPr>
+              <a:t>It understands clinical vocabulary that general </a:t>
+            </a:r>
+            <a:r>
+              <a:rPr lang="en-US" sz="1400" dirty="0" err="1">
+                <a:solidFill>
+                  <a:srgbClr val="1E293B"/>
+                </a:solidFill>
+                <a:latin typeface="Calibri"/>
+                <a:ea typeface="Calibri"/>
+                <a:cs typeface="Calibri"/>
+              </a:rPr>
+              <a:t>spaCy</a:t>
+            </a:r>
+            <a:r>
+              <a:rPr lang="en-US" sz="1400" dirty="0">
+                <a:solidFill>
+                  <a:srgbClr val="1E293B"/>
+                </a:solidFill>
+                <a:latin typeface="Calibri"/>
+                <a:ea typeface="Calibri"/>
+                <a:cs typeface="Calibri"/>
+              </a:rPr>
+              <a:t> simply doesn't recognize.</a:t>
+            </a:r>
+            <a:endParaRPr lang="en-US" sz="1400" dirty="0">
+              <a:latin typeface="Calibri"/>
+              <a:ea typeface="Calibri"/>
+              <a:cs typeface="Calibri"/>
+            </a:endParaRPr>
+          </a:p>
+          <a:p>
+            <a:pPr marL="0" indent="0">
+              <a:spcAft>
+                <a:spcPts val="600"/>
+              </a:spcAft>
+              <a:buNone/>
+            </a:pPr>
+            <a:r>
+              <a:rPr lang="en-US" sz="400" dirty="0">
+                <a:solidFill>
+                  <a:srgbClr val="000000"/>
+                </a:solidFill>
+                <a:latin typeface="Calibri" pitchFamily="34" charset="0"/>
+                <a:ea typeface="Calibri" pitchFamily="34" charset="-122"/>
+                <a:cs typeface="Calibri" pitchFamily="34" charset="-120"/>
+              </a:rPr>
+              <a:t> </a:t>
+            </a:r>
+            <a:endParaRPr lang="en-US" sz="1400" dirty="0"/>
+          </a:p>
+          <a:p>
+            <a:pPr>
+              <a:spcAft>
+                <a:spcPts val="600"/>
+              </a:spcAft>
+            </a:pPr>
+            <a:r>
+              <a:rPr lang="en-US" sz="1400" b="1" dirty="0">
+                <a:solidFill>
+                  <a:srgbClr val="028090"/>
+                </a:solidFill>
+                <a:latin typeface="Calibri"/>
+                <a:ea typeface="Calibri"/>
+                <a:cs typeface="Calibri"/>
+              </a:rPr>
+              <a:t>How it was </a:t>
+            </a:r>
+            <a:r>
+              <a:rPr lang="en-US" sz="1400" b="1">
+                <a:solidFill>
+                  <a:srgbClr val="028090"/>
+                </a:solidFill>
+                <a:latin typeface="Calibri"/>
+                <a:ea typeface="Calibri"/>
+                <a:cs typeface="Calibri"/>
+              </a:rPr>
+              <a:t> run:</a:t>
+            </a:r>
+            <a:endParaRPr lang="en-US" sz="1400">
+              <a:latin typeface="Calibri"/>
+              <a:ea typeface="Calibri"/>
+              <a:cs typeface="Calibri"/>
+            </a:endParaRPr>
+          </a:p>
+          <a:p>
+            <a:pPr marL="0" indent="0">
+              <a:spcAft>
+                <a:spcPts val="600"/>
+              </a:spcAft>
+              <a:buNone/>
+            </a:pPr>
+            <a:r>
+              <a:rPr lang="en-US" sz="1400" dirty="0">
+                <a:solidFill>
+                  <a:srgbClr val="1E293B"/>
+                </a:solidFill>
+                <a:latin typeface="Calibri"/>
+                <a:ea typeface="Calibri"/>
+                <a:cs typeface="Calibri"/>
+              </a:rPr>
+              <a:t>Load </a:t>
+            </a:r>
+            <a:r>
+              <a:rPr lang="en-US" sz="1400" dirty="0" err="1">
+                <a:solidFill>
+                  <a:srgbClr val="1E293B"/>
+                </a:solidFill>
+                <a:latin typeface="Calibri"/>
+                <a:ea typeface="Calibri"/>
+                <a:cs typeface="Calibri"/>
+              </a:rPr>
+              <a:t>en_core_sci_sm</a:t>
+            </a:r>
+            <a:r>
+              <a:rPr lang="en-US" sz="1400" dirty="0">
+                <a:solidFill>
+                  <a:srgbClr val="1E293B"/>
+                </a:solidFill>
+                <a:latin typeface="Calibri"/>
+                <a:ea typeface="Calibri"/>
+                <a:cs typeface="Calibri"/>
+              </a:rPr>
+              <a:t> and en_ner_bc5cdr_md, extract entities, tokenize, train word2vec, plot tuned t-SNE.</a:t>
+            </a:r>
+            <a:endParaRPr lang="en-US" sz="1400" dirty="0">
+              <a:latin typeface="Calibri"/>
+              <a:ea typeface="Calibri"/>
+              <a:cs typeface="Calibri"/>
+            </a:endParaRPr>
+          </a:p>
+        </p:txBody>
+      </p:sp>
+      <p:sp>
+        <p:nvSpPr>
+          <p:cNvPr id="7" name="Shape 5"/>
+          <p:cNvSpPr/>
+          <p:nvPr/>
+        </p:nvSpPr>
+        <p:spPr>
+          <a:xfrm>
+            <a:off x="6720840" y="1965960"/>
+            <a:ext cx="4892040" cy="3977640"/>
+          </a:xfrm>
+          <a:prstGeom prst="roundRect">
+            <a:avLst>
+              <a:gd name="adj" fmla="val 1839"/>
+            </a:avLst>
+          </a:prstGeom>
+          <a:solidFill>
+            <a:srgbClr val="EAFBF6"/>
+          </a:solidFill>
+          <a:ln/>
+          <a:effectLst>
+            <a:outerShdw blurRad="101600" dist="38100" dir="5400000" algn="bl" rotWithShape="0">
+              <a:srgbClr val="000000">
+                <a:alpha val="10000"/>
+              </a:srgbClr>
+            </a:outerShdw>
+          </a:effectLst>
+        </p:spPr>
+      </p:sp>
+      <p:sp>
+        <p:nvSpPr>
+          <p:cNvPr id="9" name="Text 6"/>
+          <p:cNvSpPr/>
+          <p:nvPr/>
+        </p:nvSpPr>
+        <p:spPr>
+          <a:xfrm>
+            <a:off x="7589520" y="2258568"/>
+            <a:ext cx="3840480" cy="457200"/>
+          </a:xfrm>
+          <a:prstGeom prst="rect">
+            <a:avLst/>
+          </a:prstGeom>
+          <a:noFill/>
+          <a:ln/>
+        </p:spPr>
+        <p:txBody>
+          <a:bodyPr wrap="square" rtlCol="0" anchor="ctr"/>
+          <a:lstStyle/>
+          <a:p>
+            <a:pPr marL="0" indent="0">
+              <a:buNone/>
+            </a:pPr>
+            <a:r>
+              <a:rPr lang="en-US" sz="1500" b="1" dirty="0">
+                <a:solidFill>
+                  <a:srgbClr val="0F766E"/>
+                </a:solidFill>
+                <a:latin typeface="Calibri" pitchFamily="34" charset="0"/>
+                <a:ea typeface="Calibri" pitchFamily="34" charset="-122"/>
+                <a:cs typeface="Calibri" pitchFamily="34" charset="-120"/>
+              </a:rPr>
+              <a:t>Finding</a:t>
+            </a:r>
+            <a:endParaRPr lang="en-US" sz="1500" dirty="0"/>
+          </a:p>
+        </p:txBody>
+      </p:sp>
+      <p:sp>
+        <p:nvSpPr>
+          <p:cNvPr id="10" name="Text 7"/>
+          <p:cNvSpPr/>
+          <p:nvPr/>
+        </p:nvSpPr>
+        <p:spPr>
+          <a:xfrm>
+            <a:off x="6995160" y="2834640"/>
+            <a:ext cx="4343400" cy="1828800"/>
+          </a:xfrm>
+          <a:prstGeom prst="rect">
+            <a:avLst/>
+          </a:prstGeom>
+          <a:noFill/>
+          <a:ln/>
+        </p:spPr>
+        <p:txBody>
+          <a:bodyPr wrap="square" rtlCol="0" anchor="t"/>
+          <a:lstStyle/>
+          <a:p>
+            <a:pPr marL="0" indent="0">
+              <a:buNone/>
+            </a:pPr>
+            <a:r>
+              <a:rPr lang="en-US" sz="1400" dirty="0">
+                <a:solidFill>
+                  <a:srgbClr val="1E293B"/>
+                </a:solidFill>
+                <a:latin typeface="Calibri" pitchFamily="34" charset="0"/>
+                <a:ea typeface="Calibri" pitchFamily="34" charset="-122"/>
+                <a:cs typeface="Calibri" pitchFamily="34" charset="-120"/>
+              </a:rPr>
+              <a:t>1,986 entities found - almost entirely DISEASE (1,207) and CHEMICAL (779) - a far more clinically useful breakdown than spaCy's 17 generic categories.</a:t>
+            </a:r>
+            <a:endParaRPr lang="en-US" sz="1400" dirty="0"/>
+          </a:p>
+        </p:txBody>
+      </p:sp>
+      <p:sp>
+        <p:nvSpPr>
+          <p:cNvPr id="11" name="Text 8"/>
+          <p:cNvSpPr/>
+          <p:nvPr/>
+        </p:nvSpPr>
+        <p:spPr>
+          <a:xfrm>
+            <a:off x="6995160" y="4709160"/>
+            <a:ext cx="4343400" cy="1097280"/>
+          </a:xfrm>
+          <a:prstGeom prst="rect">
+            <a:avLst/>
+          </a:prstGeom>
+          <a:noFill/>
+          <a:ln/>
+        </p:spPr>
+        <p:txBody>
+          <a:bodyPr wrap="square" rtlCol="0" anchor="t"/>
+          <a:lstStyle/>
+          <a:p>
+            <a:pPr marL="0" indent="0">
+              <a:buNone/>
+            </a:pPr>
+            <a:r>
+              <a:rPr lang="en-US" sz="1250" dirty="0">
+                <a:solidFill>
+                  <a:srgbClr val="64748B"/>
+                </a:solidFill>
+                <a:latin typeface="Calibri" pitchFamily="34" charset="0"/>
+                <a:ea typeface="Calibri" pitchFamily="34" charset="-122"/>
+                <a:cs typeface="Calibri" pitchFamily="34" charset="-120"/>
+              </a:rPr>
+              <a:t>Word2vec vocabulary size: 2,455 words</a:t>
+            </a:r>
+            <a:endParaRPr lang="en-US" sz="1250" dirty="0"/>
+          </a:p>
+        </p:txBody>
+      </p:sp>
+      <p:sp>
+        <p:nvSpPr>
+          <p:cNvPr id="12" name="Text 9"/>
+          <p:cNvSpPr/>
+          <p:nvPr/>
+        </p:nvSpPr>
+        <p:spPr>
+          <a:xfrm>
+            <a:off x="548640" y="6355080"/>
+            <a:ext cx="10972800" cy="320040"/>
+          </a:xfrm>
+          <a:prstGeom prst="rect">
+            <a:avLst/>
+          </a:prstGeom>
+          <a:noFill/>
+          <a:ln/>
+        </p:spPr>
+        <p:txBody>
+          <a:bodyPr wrap="square" rtlCol="0" anchor="ctr"/>
+          <a:lstStyle/>
+          <a:p>
+            <a:pPr marL="0" indent="0">
+              <a:buNone/>
+            </a:pPr>
+            <a:r>
+              <a:rPr lang="en-US" sz="1100" dirty="0">
+                <a:solidFill>
+                  <a:srgbClr val="64748B"/>
+                </a:solidFill>
+                <a:latin typeface="Calibri" pitchFamily="34" charset="0"/>
+                <a:ea typeface="Calibri" pitchFamily="34" charset="-122"/>
+                <a:cs typeface="Calibri" pitchFamily="34" charset="-120"/>
+              </a:rPr>
+              <a:t>Models: en_core_sci_sm, en_ner_bc5cdr_md  |  Output: entity counts, word2vec, tuned t-SNE plot</a:t>
+            </a:r>
+            <a:endParaRPr lang="en-US" sz="1100" dirty="0"/>
+          </a:p>
+        </p:txBody>
+      </p:sp>
+      <p:sp>
+        <p:nvSpPr>
+          <p:cNvPr id="13" name="Text 10"/>
+          <p:cNvSpPr/>
+          <p:nvPr/>
+        </p:nvSpPr>
+        <p:spPr>
+          <a:xfrm>
+            <a:off x="10058400" y="6446520"/>
+            <a:ext cx="1828800" cy="274320"/>
+          </a:xfrm>
+          <a:prstGeom prst="rect">
+            <a:avLst/>
+          </a:prstGeom>
+          <a:noFill/>
+          <a:ln/>
+        </p:spPr>
+        <p:txBody>
+          <a:bodyPr wrap="square" rtlCol="0" anchor="ctr"/>
+          <a:lstStyle/>
+          <a:p>
+            <a:pPr marL="0" indent="0" algn="r">
+              <a:buNone/>
+            </a:pPr>
+            <a:r>
+              <a:rPr lang="en-US" sz="1000" dirty="0">
+                <a:solidFill>
+                  <a:srgbClr val="64748B"/>
+                </a:solidFill>
+                <a:latin typeface="Calibri" pitchFamily="34" charset="0"/>
+                <a:ea typeface="Calibri" pitchFamily="34" charset="-122"/>
+                <a:cs typeface="Calibri" pitchFamily="34" charset="-120"/>
+              </a:rPr>
+              <a:t>7</a:t>
+            </a:r>
+            <a:endParaRPr lang="en-US" sz="1000" dirty="0"/>
+          </a:p>
+        </p:txBody>
+      </p:sp>
+    </p:spTree>
+  </p:cSld>
+  <p:clrMapOvr>
+    <a:masterClrMapping/>
+  </p:clrMapOvr>
+</p:sld>
+</file>
+
+<file path=ppt/slides/slide8.xml><?xml version="1.0" encoding="utf-8"?>
+<p:sld xmlns:a="http://schemas.openxmlformats.org/drawingml/2006/main" xmlns:r="http://schemas.openxmlformats.org/officeDocument/2006/relationships" xmlns:p="http://schemas.openxmlformats.org/presentationml/2006/main">
+  <p:cSld name="Slide 8">
+    <p:bg>
+      <p:bgPr>
+        <a:solidFill>
+          <a:srgbClr val="F4FAF9"/>
+        </a:solidFill>
+        <a:effectLst/>
+      </p:bgPr>
+    </p:bg>
+    <p:spTree>
+      <p:nvGrpSpPr>
+        <p:cNvPr id="1" name=""/>
+        <p:cNvGrpSpPr/>
+        <p:nvPr/>
+      </p:nvGrpSpPr>
+      <p:grpSpPr>
+        <a:xfrm>
+          <a:off x="0" y="0"/>
+          <a:ext cx="0" cy="0"/>
+          <a:chOff x="0" y="0"/>
+          <a:chExt cx="0" cy="0"/>
+        </a:xfrm>
+      </p:grpSpPr>
+      <p:sp>
+        <p:nvSpPr>
+          <p:cNvPr id="2" name="Text 0"/>
+          <p:cNvSpPr/>
+          <p:nvPr/>
+        </p:nvSpPr>
+        <p:spPr>
+          <a:xfrm>
+            <a:off x="548640" y="457200"/>
+            <a:ext cx="7315200" cy="365760"/>
+          </a:xfrm>
+          <a:prstGeom prst="rect">
+            <a:avLst/>
+          </a:prstGeom>
+          <a:noFill/>
+          <a:ln/>
+        </p:spPr>
+        <p:txBody>
+          <a:bodyPr wrap="square" rtlCol="0" anchor="ctr"/>
+          <a:lstStyle/>
+          <a:p>
+            <a:pPr marL="0" indent="0">
+              <a:buNone/>
+            </a:pPr>
+            <a:r>
+              <a:rPr lang="en-US" sz="1300" b="1" kern="0" spc="200" dirty="0">
+                <a:solidFill>
+                  <a:srgbClr val="00A896"/>
+                </a:solidFill>
+                <a:latin typeface="Calibri" pitchFamily="34" charset="0"/>
+                <a:ea typeface="Calibri" pitchFamily="34" charset="-122"/>
+                <a:cs typeface="Calibri" pitchFamily="34" charset="-120"/>
+              </a:rPr>
+              <a:t>TOOL 2 OF 3</a:t>
+            </a:r>
+            <a:endParaRPr lang="en-US" sz="1300" dirty="0"/>
+          </a:p>
+        </p:txBody>
+      </p:sp>
+      <p:sp>
+        <p:nvSpPr>
+          <p:cNvPr id="3" name="Text 1"/>
+          <p:cNvSpPr/>
+          <p:nvPr/>
+        </p:nvSpPr>
+        <p:spPr>
+          <a:xfrm>
+            <a:off x="548640" y="457200"/>
+            <a:ext cx="10972800" cy="548640"/>
+          </a:xfrm>
+          <a:prstGeom prst="rect">
+            <a:avLst/>
+          </a:prstGeom>
+          <a:noFill/>
+          <a:ln/>
+        </p:spPr>
+        <p:txBody>
+          <a:bodyPr wrap="square" lIns="91440" tIns="45720" rIns="91440" bIns="45720" rtlCol="0" anchor="ctr"/>
+          <a:lstStyle/>
+          <a:p>
+            <a:r>
+              <a:rPr lang="en-US" sz="2600" b="1" dirty="0">
+                <a:solidFill>
+                  <a:srgbClr val="1E293B"/>
+                </a:solidFill>
+                <a:latin typeface="Cambria"/>
+                <a:ea typeface="Cambria"/>
+                <a:cs typeface="Cambria" pitchFamily="34" charset="-120"/>
+              </a:rPr>
+              <a:t>  </a:t>
+            </a:r>
+            <a:r>
+              <a:rPr lang="en-US" sz="2600" b="1">
+                <a:solidFill>
+                  <a:srgbClr val="1E293B"/>
+                </a:solidFill>
+                <a:latin typeface="Cambria"/>
+                <a:ea typeface="Cambria"/>
+                <a:cs typeface="Cambria" pitchFamily="34" charset="-120"/>
+              </a:rPr>
+              <a:t>    </a:t>
+            </a:r>
+            <a:r>
+              <a:rPr lang="en-US" sz="2600" b="1" dirty="0">
+                <a:solidFill>
+                  <a:srgbClr val="1E293B"/>
+                </a:solidFill>
+                <a:latin typeface="Cambria"/>
+                <a:ea typeface="Cambria"/>
+                <a:cs typeface="Cambria" pitchFamily="34" charset="-120"/>
+              </a:rPr>
+              <a:t>scispaCy — Extracted Entities &amp; word2vec</a:t>
+            </a:r>
+            <a:endParaRPr lang="en-US" sz="2600" dirty="0">
+              <a:latin typeface="Cambria"/>
+              <a:ea typeface="Cambria"/>
+            </a:endParaRPr>
+          </a:p>
+        </p:txBody>
+      </p:sp>
+      <p:sp>
+        <p:nvSpPr>
+          <p:cNvPr id="4" name="Shape 2"/>
+          <p:cNvSpPr/>
+          <p:nvPr/>
+        </p:nvSpPr>
+        <p:spPr>
+          <a:xfrm>
+            <a:off x="548640" y="1234440"/>
+            <a:ext cx="6949440" cy="5074920"/>
+          </a:xfrm>
+          <a:prstGeom prst="roundRect">
+            <a:avLst>
+              <a:gd name="adj" fmla="val 1441"/>
+            </a:avLst>
+          </a:prstGeom>
+          <a:solidFill>
+            <a:srgbClr val="FFFFFF"/>
+          </a:solidFill>
+          <a:ln/>
+          <a:effectLst>
+            <a:outerShdw blurRad="101600" dist="38100" dir="5400000" algn="bl" rotWithShape="0">
+              <a:srgbClr val="000000">
+                <a:alpha val="10000"/>
+              </a:srgbClr>
+            </a:outerShdw>
+          </a:effectLst>
+        </p:spPr>
+      </p:sp>
+      <p:sp>
+        <p:nvSpPr>
+          <p:cNvPr id="5" name="Text 3"/>
+          <p:cNvSpPr/>
+          <p:nvPr/>
+        </p:nvSpPr>
+        <p:spPr>
+          <a:xfrm>
+            <a:off x="868680" y="1417320"/>
+            <a:ext cx="6400800" cy="365760"/>
+          </a:xfrm>
+          <a:prstGeom prst="rect">
+            <a:avLst/>
+          </a:prstGeom>
+          <a:noFill/>
+          <a:ln/>
+        </p:spPr>
+        <p:txBody>
+          <a:bodyPr wrap="square" rtlCol="0" anchor="ctr"/>
+          <a:lstStyle/>
+          <a:p>
+            <a:pPr marL="0" indent="0">
+              <a:buNone/>
+            </a:pPr>
+            <a:r>
+              <a:rPr lang="en-US" sz="1500" b="1" dirty="0">
+                <a:solidFill>
+                  <a:srgbClr val="028090"/>
+                </a:solidFill>
+                <a:latin typeface="Calibri" pitchFamily="34" charset="0"/>
+                <a:ea typeface="Calibri" pitchFamily="34" charset="-122"/>
+                <a:cs typeface="Calibri" pitchFamily="34" charset="-120"/>
+              </a:rPr>
+              <a:t>Extracted Entities (by label)</a:t>
+            </a:r>
+            <a:endParaRPr lang="en-US" sz="1500" dirty="0"/>
+          </a:p>
+        </p:txBody>
+      </p:sp>
+      <p:sp>
+        <p:nvSpPr>
+          <p:cNvPr id="6" name="Text 4"/>
+          <p:cNvSpPr/>
+          <p:nvPr/>
+        </p:nvSpPr>
+        <p:spPr>
+          <a:xfrm>
+            <a:off x="868680" y="1755648"/>
+            <a:ext cx="6400800" cy="274320"/>
+          </a:xfrm>
+          <a:prstGeom prst="rect">
+            <a:avLst/>
+          </a:prstGeom>
+          <a:noFill/>
+          <a:ln/>
+        </p:spPr>
+        <p:txBody>
+          <a:bodyPr wrap="square" rtlCol="0" anchor="ctr"/>
+          <a:lstStyle/>
+          <a:p>
+            <a:pPr marL="0" indent="0">
+              <a:buNone/>
+            </a:pPr>
+            <a:r>
+              <a:rPr lang="en-US" sz="1150" i="1" dirty="0">
+                <a:solidFill>
+                  <a:srgbClr val="64748B"/>
+                </a:solidFill>
+                <a:latin typeface="Calibri" pitchFamily="34" charset="0"/>
+                <a:ea typeface="Calibri" pitchFamily="34" charset="-122"/>
+                <a:cs typeface="Calibri" pitchFamily="34" charset="-120"/>
+              </a:rPr>
+              <a:t>Examples: "aneurysm" -&gt; DISEASE, "nimodipine" -&gt; CHEMICAL, "atrial fibrillation" -&gt; DISEASE</a:t>
+            </a:r>
+            <a:endParaRPr lang="en-US" sz="1150" dirty="0"/>
+          </a:p>
+        </p:txBody>
+      </p:sp>
+      <p:graphicFrame>
+        <p:nvGraphicFramePr>
+          <p:cNvPr id="7" name="Chart 0"/>
+          <p:cNvGraphicFramePr/>
+          <p:nvPr/>
+        </p:nvGraphicFramePr>
+        <p:xfrm>
+          <a:off x="777240" y="2103120"/>
+          <a:ext cx="6400800" cy="4023360"/>
+        </p:xfrm>
+        <a:graphic>
+          <a:graphicData uri="http://schemas.openxmlformats.org/drawingml/2006/chart">
+            <c:chart xmlns:c="http://schemas.openxmlformats.org/drawingml/2006/chart" xmlns:r="http://schemas.openxmlformats.org/officeDocument/2006/relationships" r:id="rId3"/>
+          </a:graphicData>
+        </a:graphic>
+      </p:graphicFrame>
+      <p:sp>
+        <p:nvSpPr>
+          <p:cNvPr id="8" name="Shape 5"/>
+          <p:cNvSpPr/>
+          <p:nvPr/>
+        </p:nvSpPr>
+        <p:spPr>
+          <a:xfrm>
+            <a:off x="7680960" y="1234440"/>
+            <a:ext cx="3931920" cy="5074920"/>
+          </a:xfrm>
+          <a:prstGeom prst="roundRect">
+            <a:avLst>
+              <a:gd name="adj" fmla="val 1860"/>
+            </a:avLst>
+          </a:prstGeom>
+          <a:solidFill>
+            <a:srgbClr val="EAFBF6"/>
+          </a:solidFill>
+          <a:ln/>
+          <a:effectLst>
+            <a:outerShdw blurRad="101600" dist="38100" dir="5400000" algn="bl" rotWithShape="0">
+              <a:srgbClr val="000000">
+                <a:alpha val="10000"/>
+              </a:srgbClr>
+            </a:outerShdw>
+          </a:effectLst>
+        </p:spPr>
+      </p:sp>
+      <p:sp>
+        <p:nvSpPr>
+          <p:cNvPr id="9" name="Text 6"/>
+          <p:cNvSpPr/>
+          <p:nvPr/>
+        </p:nvSpPr>
+        <p:spPr>
+          <a:xfrm>
+            <a:off x="7955280" y="1417320"/>
+            <a:ext cx="3383280" cy="365760"/>
+          </a:xfrm>
+          <a:prstGeom prst="rect">
+            <a:avLst/>
+          </a:prstGeom>
+          <a:noFill/>
+          <a:ln/>
+        </p:spPr>
+        <p:txBody>
+          <a:bodyPr wrap="square" rtlCol="0" anchor="ctr"/>
+          <a:lstStyle/>
+          <a:p>
+            <a:pPr marL="0" indent="0">
+              <a:buNone/>
+            </a:pPr>
+            <a:r>
+              <a:rPr lang="en-US" sz="1500" b="1" dirty="0">
+                <a:solidFill>
+                  <a:srgbClr val="028090"/>
+                </a:solidFill>
+                <a:latin typeface="Calibri" pitchFamily="34" charset="0"/>
+                <a:ea typeface="Calibri" pitchFamily="34" charset="-122"/>
+                <a:cs typeface="Calibri" pitchFamily="34" charset="-120"/>
+              </a:rPr>
+              <a:t>word2vec Embeddings</a:t>
+            </a:r>
+            <a:endParaRPr lang="en-US" sz="1500" dirty="0"/>
+          </a:p>
+        </p:txBody>
+      </p:sp>
+      <p:sp>
+        <p:nvSpPr>
+          <p:cNvPr id="10" name="Text 7"/>
+          <p:cNvSpPr/>
+          <p:nvPr/>
+        </p:nvSpPr>
+        <p:spPr>
+          <a:xfrm>
+            <a:off x="7955280" y="2011680"/>
+            <a:ext cx="3383280" cy="914400"/>
+          </a:xfrm>
+          <a:prstGeom prst="rect">
+            <a:avLst/>
+          </a:prstGeom>
+          <a:noFill/>
+          <a:ln/>
+        </p:spPr>
+        <p:txBody>
+          <a:bodyPr wrap="square" rtlCol="0" anchor="ctr"/>
+          <a:lstStyle/>
+          <a:p>
+            <a:pPr marL="0" indent="0">
+              <a:buNone/>
+            </a:pPr>
+            <a:r>
+              <a:rPr lang="en-US" sz="5600" b="1" dirty="0">
+                <a:solidFill>
+                  <a:srgbClr val="0F766E"/>
+                </a:solidFill>
+                <a:latin typeface="Calibri" pitchFamily="34" charset="0"/>
+                <a:ea typeface="Calibri" pitchFamily="34" charset="-122"/>
+                <a:cs typeface="Calibri" pitchFamily="34" charset="-120"/>
+              </a:rPr>
+              <a:t>2,455</a:t>
+            </a:r>
+            <a:endParaRPr lang="en-US" sz="5600" dirty="0"/>
+          </a:p>
+        </p:txBody>
+      </p:sp>
+      <p:sp>
+        <p:nvSpPr>
+          <p:cNvPr id="11" name="Text 8"/>
+          <p:cNvSpPr/>
+          <p:nvPr/>
+        </p:nvSpPr>
+        <p:spPr>
+          <a:xfrm>
+            <a:off x="7955280" y="2880360"/>
+            <a:ext cx="3383280" cy="365760"/>
+          </a:xfrm>
+          <a:prstGeom prst="rect">
+            <a:avLst/>
+          </a:prstGeom>
+          <a:noFill/>
+          <a:ln/>
+        </p:spPr>
+        <p:txBody>
+          <a:bodyPr wrap="square" rtlCol="0" anchor="ctr"/>
+          <a:lstStyle/>
+          <a:p>
+            <a:pPr marL="0" indent="0">
+              <a:buNone/>
+            </a:pPr>
+            <a:r>
+              <a:rPr lang="en-US" sz="1300" dirty="0">
+                <a:solidFill>
+                  <a:srgbClr val="64748B"/>
+                </a:solidFill>
+                <a:latin typeface="Calibri" pitchFamily="34" charset="0"/>
+                <a:ea typeface="Calibri" pitchFamily="34" charset="-122"/>
+                <a:cs typeface="Calibri" pitchFamily="34" charset="-120"/>
+              </a:rPr>
+              <a:t>vocabulary words learned</a:t>
+            </a:r>
+            <a:endParaRPr lang="en-US" sz="1300" dirty="0"/>
+          </a:p>
+        </p:txBody>
+      </p:sp>
+      <p:sp>
+        <p:nvSpPr>
+          <p:cNvPr id="12" name="Text 9"/>
+          <p:cNvSpPr/>
+          <p:nvPr/>
+        </p:nvSpPr>
+        <p:spPr>
+          <a:xfrm>
+            <a:off x="7955280" y="3429000"/>
+            <a:ext cx="3383280" cy="2651760"/>
+          </a:xfrm>
+          <a:prstGeom prst="rect">
+            <a:avLst/>
+          </a:prstGeom>
+          <a:noFill/>
+          <a:ln/>
+        </p:spPr>
+        <p:txBody>
+          <a:bodyPr wrap="square" rtlCol="0" anchor="t"/>
+          <a:lstStyle/>
+          <a:p>
+            <a:pPr marL="342900" indent="-342900">
+              <a:spcAft>
+                <a:spcPts val="800"/>
+              </a:spcAft>
+              <a:buSzPct val="100000"/>
+              <a:buChar char="•"/>
+            </a:pPr>
+            <a:r>
+              <a:rPr lang="en-US" sz="1250" dirty="0">
+                <a:solidFill>
+                  <a:srgbClr val="1E293B"/>
+                </a:solidFill>
+                <a:latin typeface="Calibri" pitchFamily="34" charset="0"/>
+                <a:ea typeface="Calibri" pitchFamily="34" charset="-122"/>
+                <a:cs typeface="Calibri" pitchFamily="34" charset="-120"/>
+              </a:rPr>
+              <a:t>Vector size: 100 dimensions</a:t>
+            </a:r>
+            <a:endParaRPr lang="en-US" sz="1250" dirty="0"/>
+          </a:p>
+          <a:p>
+            <a:pPr marL="342900" indent="-342900">
+              <a:spcAft>
+                <a:spcPts val="800"/>
+              </a:spcAft>
+              <a:buSzPct val="100000"/>
+              <a:buChar char="•"/>
+            </a:pPr>
+            <a:r>
+              <a:rPr lang="en-US" sz="1250" dirty="0">
+                <a:solidFill>
+                  <a:srgbClr val="1E293B"/>
+                </a:solidFill>
+                <a:latin typeface="Calibri" pitchFamily="34" charset="0"/>
+                <a:ea typeface="Calibri" pitchFamily="34" charset="-122"/>
+                <a:cs typeface="Calibri" pitchFamily="34" charset="-120"/>
+              </a:rPr>
+              <a:t>Window: 5 words of context</a:t>
+            </a:r>
+            <a:endParaRPr lang="en-US" sz="1250" dirty="0"/>
+          </a:p>
+          <a:p>
+            <a:pPr marL="342900" indent="-342900">
+              <a:spcAft>
+                <a:spcPts val="800"/>
+              </a:spcAft>
+              <a:buSzPct val="100000"/>
+              <a:buChar char="•"/>
+            </a:pPr>
+            <a:r>
+              <a:rPr lang="en-US" sz="1250" dirty="0">
+                <a:solidFill>
+                  <a:srgbClr val="1E293B"/>
+                </a:solidFill>
+                <a:latin typeface="Calibri" pitchFamily="34" charset="0"/>
+                <a:ea typeface="Calibri" pitchFamily="34" charset="-122"/>
+                <a:cs typeface="Calibri" pitchFamily="34" charset="-120"/>
+              </a:rPr>
+              <a:t>Min count: 2 occurrences</a:t>
+            </a:r>
+            <a:endParaRPr lang="en-US" sz="1250" dirty="0"/>
+          </a:p>
+          <a:p>
+            <a:pPr marL="342900" indent="-342900">
+              <a:spcAft>
+                <a:spcPts val="800"/>
+              </a:spcAft>
+              <a:buSzPct val="100000"/>
+              <a:buChar char="•"/>
+            </a:pPr>
+            <a:r>
+              <a:rPr lang="en-US" sz="1250" dirty="0">
+                <a:solidFill>
+                  <a:srgbClr val="1E293B"/>
+                </a:solidFill>
+                <a:latin typeface="Calibri" pitchFamily="34" charset="0"/>
+                <a:ea typeface="Calibri" pitchFamily="34" charset="-122"/>
+                <a:cs typeface="Calibri" pitchFamily="34" charset="-120"/>
+              </a:rPr>
+              <a:t>Trained on: tokenized note text from this tool's pipeline</a:t>
+            </a:r>
+            <a:endParaRPr lang="en-US" sz="1250" dirty="0"/>
+          </a:p>
+        </p:txBody>
+      </p:sp>
+      <p:sp>
+        <p:nvSpPr>
+          <p:cNvPr id="13" name="Text 10"/>
+          <p:cNvSpPr/>
+          <p:nvPr/>
+        </p:nvSpPr>
+        <p:spPr>
+          <a:xfrm>
+            <a:off x="10058400" y="6446520"/>
+            <a:ext cx="1828800" cy="274320"/>
+          </a:xfrm>
+          <a:prstGeom prst="rect">
+            <a:avLst/>
+          </a:prstGeom>
+          <a:noFill/>
+          <a:ln/>
+        </p:spPr>
+        <p:txBody>
+          <a:bodyPr wrap="square" rtlCol="0" anchor="ctr"/>
+          <a:lstStyle/>
+          <a:p>
+            <a:pPr marL="0" indent="0" algn="r">
+              <a:buNone/>
+            </a:pPr>
+            <a:r>
+              <a:rPr lang="en-US" sz="1000" dirty="0">
+                <a:solidFill>
+                  <a:srgbClr val="64748B"/>
+                </a:solidFill>
+                <a:latin typeface="Calibri" pitchFamily="34" charset="0"/>
+                <a:ea typeface="Calibri" pitchFamily="34" charset="-122"/>
+                <a:cs typeface="Calibri" pitchFamily="34" charset="-120"/>
+              </a:rPr>
               <a:t>8</a:t>
+            </a:r>
+            <a:endParaRPr lang="en-US" sz="1000" dirty="0"/>
+          </a:p>
+        </p:txBody>
+      </p:sp>
+    </p:spTree>
+  </p:cSld>
+  <p:clrMapOvr>
+    <a:masterClrMapping/>
+  </p:clrMapOvr>
+</p:sld>
+</file>
+
+<file path=ppt/slides/slide9.xml><?xml version="1.0" encoding="utf-8"?>
+<p:sld xmlns:a="http://schemas.openxmlformats.org/drawingml/2006/main" xmlns:r="http://schemas.openxmlformats.org/officeDocument/2006/relationships" xmlns:p="http://schemas.openxmlformats.org/presentationml/2006/main">
+  <p:cSld name="Slide 9">
+    <p:bg>
+      <p:bgPr>
+        <a:solidFill>
+          <a:srgbClr val="F4FAF9"/>
+        </a:solidFill>
+        <a:effectLst/>
+      </p:bgPr>
+    </p:bg>
+    <p:spTree>
+      <p:nvGrpSpPr>
+        <p:cNvPr id="1" name=""/>
+        <p:cNvGrpSpPr/>
+        <p:nvPr/>
+      </p:nvGrpSpPr>
+      <p:grpSpPr>
+        <a:xfrm>
+          <a:off x="0" y="0"/>
+          <a:ext cx="0" cy="0"/>
+          <a:chOff x="0" y="0"/>
+          <a:chExt cx="0" cy="0"/>
+        </a:xfrm>
+      </p:grpSpPr>
+      <p:sp>
+        <p:nvSpPr>
+          <p:cNvPr id="2" name="Text 0"/>
+          <p:cNvSpPr/>
+          <p:nvPr/>
+        </p:nvSpPr>
+        <p:spPr>
+          <a:xfrm>
+            <a:off x="548640" y="457200"/>
+            <a:ext cx="7315200" cy="365760"/>
+          </a:xfrm>
+          <a:prstGeom prst="rect">
+            <a:avLst/>
+          </a:prstGeom>
+          <a:noFill/>
+          <a:ln/>
+        </p:spPr>
+        <p:txBody>
+          <a:bodyPr wrap="square" rtlCol="0" anchor="ctr"/>
+          <a:lstStyle/>
+          <a:p>
+            <a:pPr marL="0" indent="0">
+              <a:buNone/>
+            </a:pPr>
+            <a:r>
+              <a:rPr lang="en-US" sz="1300" b="1" kern="0" spc="200" dirty="0">
+                <a:solidFill>
+                  <a:srgbClr val="00A896"/>
+                </a:solidFill>
+                <a:latin typeface="Calibri" pitchFamily="34" charset="0"/>
+                <a:ea typeface="Calibri" pitchFamily="34" charset="-122"/>
+                <a:cs typeface="Calibri" pitchFamily="34" charset="-120"/>
+              </a:rPr>
+              <a:t>TOOL 2 OF 3</a:t>
+            </a:r>
+            <a:endParaRPr lang="en-US" sz="1300" dirty="0"/>
+          </a:p>
+        </p:txBody>
+      </p:sp>
+      <p:sp>
+        <p:nvSpPr>
+          <p:cNvPr id="3" name="Text 1"/>
+          <p:cNvSpPr/>
+          <p:nvPr/>
+        </p:nvSpPr>
+        <p:spPr>
+          <a:xfrm>
+            <a:off x="548640" y="457200"/>
+            <a:ext cx="10972800" cy="502920"/>
+          </a:xfrm>
+          <a:prstGeom prst="rect">
+            <a:avLst/>
+          </a:prstGeom>
+          <a:noFill/>
+          <a:ln/>
+        </p:spPr>
+        <p:txBody>
+          <a:bodyPr wrap="square" lIns="91440" tIns="45720" rIns="91440" bIns="45720" rtlCol="0" anchor="ctr"/>
+          <a:lstStyle/>
+          <a:p>
+            <a:r>
+              <a:rPr lang="en-US" sz="2600" b="1" dirty="0">
+                <a:solidFill>
+                  <a:srgbClr val="1E293B"/>
+                </a:solidFill>
+                <a:latin typeface="Cambria"/>
+                <a:ea typeface="Cambria"/>
+                <a:cs typeface="Cambria" pitchFamily="34" charset="-120"/>
+              </a:rPr>
+              <a:t>     </a:t>
+            </a:r>
+            <a:r>
+              <a:rPr lang="en-US" sz="2600" b="1" dirty="0" err="1">
+                <a:solidFill>
+                  <a:srgbClr val="1E293B"/>
+                </a:solidFill>
+                <a:latin typeface="Cambria"/>
+                <a:ea typeface="Cambria"/>
+                <a:cs typeface="Cambria" pitchFamily="34" charset="-120"/>
+              </a:rPr>
+              <a:t>scispaCy</a:t>
+            </a:r>
+            <a:r>
+              <a:rPr lang="en-US" sz="2600" b="1" dirty="0">
+                <a:solidFill>
+                  <a:srgbClr val="1E293B"/>
+                </a:solidFill>
+                <a:latin typeface="Cambria"/>
+                <a:ea typeface="Cambria"/>
+                <a:cs typeface="Cambria" pitchFamily="34" charset="-120"/>
+              </a:rPr>
+              <a:t> — Tuned t-SNE Plot</a:t>
+            </a:r>
+            <a:endParaRPr lang="en-US" sz="2600" dirty="0">
+              <a:latin typeface="Cambria"/>
+              <a:ea typeface="Cambria"/>
+            </a:endParaRPr>
+          </a:p>
+        </p:txBody>
+      </p:sp>
+      <p:sp>
+        <p:nvSpPr>
+          <p:cNvPr id="4" name="Text 2"/>
+          <p:cNvSpPr/>
+          <p:nvPr/>
+        </p:nvSpPr>
+        <p:spPr>
+          <a:xfrm>
+            <a:off x="548640" y="960120"/>
+            <a:ext cx="10972800" cy="365760"/>
+          </a:xfrm>
+          <a:prstGeom prst="rect">
+            <a:avLst/>
+          </a:prstGeom>
+          <a:noFill/>
+          <a:ln/>
+        </p:spPr>
+        <p:txBody>
+          <a:bodyPr wrap="square" rtlCol="0" anchor="ctr"/>
+          <a:lstStyle/>
+          <a:p>
+            <a:pPr marL="0" indent="0">
+              <a:buNone/>
+            </a:pPr>
+            <a:r>
+              <a:rPr lang="en-US" sz="1400" i="1" dirty="0">
+                <a:solidFill>
+                  <a:srgbClr val="64748B"/>
+                </a:solidFill>
+                <a:latin typeface="Calibri" pitchFamily="34" charset="0"/>
+                <a:ea typeface="Calibri" pitchFamily="34" charset="-122"/>
+                <a:cs typeface="Calibri" pitchFamily="34" charset="-120"/>
+              </a:rPr>
+              <a:t>word2vec embeddings projected to 2D across four perplexity values</a:t>
+            </a:r>
+            <a:endParaRPr lang="en-US" sz="1400" dirty="0"/>
+          </a:p>
+        </p:txBody>
+      </p:sp>
+      <p:sp>
+        <p:nvSpPr>
+          <p:cNvPr id="5" name="Shape 3"/>
+          <p:cNvSpPr/>
+          <p:nvPr/>
+        </p:nvSpPr>
+        <p:spPr>
+          <a:xfrm>
+            <a:off x="548640" y="1463040"/>
+            <a:ext cx="11064240" cy="4572000"/>
+          </a:xfrm>
+          <a:prstGeom prst="roundRect">
+            <a:avLst>
+              <a:gd name="adj" fmla="val 1600"/>
+            </a:avLst>
+          </a:prstGeom>
+          <a:solidFill>
+            <a:srgbClr val="FFFFFF"/>
+          </a:solidFill>
+          <a:ln/>
+          <a:effectLst>
+            <a:outerShdw blurRad="101600" dist="38100" dir="5400000" algn="bl" rotWithShape="0">
+              <a:srgbClr val="000000">
+                <a:alpha val="10000"/>
+              </a:srgbClr>
+            </a:outerShdw>
+          </a:effectLst>
+        </p:spPr>
+      </p:sp>
+      <p:pic>
+        <p:nvPicPr>
+          <p:cNvPr id="6" name="Image 0" descr="/home/claude/tsne_images/scispacy_tsne.png"/>
+          <p:cNvPicPr>
+            <a:picLocks noChangeAspect="1"/>
+          </p:cNvPicPr>
+          <p:nvPr/>
+        </p:nvPicPr>
+        <p:blipFill>
+          <a:blip r:embed="rId3"/>
+          <a:stretch>
+            <a:fillRect/>
+          </a:stretch>
+        </p:blipFill>
+        <p:spPr>
+          <a:xfrm>
+            <a:off x="822960" y="2493862"/>
+            <a:ext cx="10515600" cy="2327476"/>
+          </a:xfrm>
+          <a:prstGeom prst="rect">
+            <a:avLst/>
+          </a:prstGeom>
+        </p:spPr>
+      </p:pic>
+      <p:sp>
+        <p:nvSpPr>
+          <p:cNvPr id="7" name="Text 4"/>
+          <p:cNvSpPr/>
+          <p:nvPr/>
+        </p:nvSpPr>
+        <p:spPr>
+          <a:xfrm>
+            <a:off x="868680" y="5623560"/>
+            <a:ext cx="10424160" cy="365760"/>
+          </a:xfrm>
+          <a:prstGeom prst="rect">
+            <a:avLst/>
+          </a:prstGeom>
+          <a:noFill/>
+          <a:ln/>
+        </p:spPr>
+        <p:txBody>
+          <a:bodyPr wrap="square" rtlCol="0" anchor="ctr"/>
+          <a:lstStyle/>
+          <a:p>
+            <a:pPr marL="0" indent="0">
+              <a:buNone/>
+            </a:pPr>
+            <a:r>
+              <a:rPr lang="en-US" sz="1250" dirty="0">
+                <a:solidFill>
+                  <a:srgbClr val="64748B"/>
+                </a:solidFill>
+                <a:latin typeface="Calibri" pitchFamily="34" charset="0"/>
+                <a:ea typeface="Calibri" pitchFamily="34" charset="-122"/>
+                <a:cs typeface="Calibri" pitchFamily="34" charset="-120"/>
+              </a:rPr>
+              <a:t>Biomedical vocabulary (disease and chemical terms) forms tighter, more separable clusters than spaCy's general-purpose embeddings.</a:t>
+            </a:r>
+            <a:endParaRPr lang="en-US" sz="1250" dirty="0"/>
+          </a:p>
+        </p:txBody>
+      </p:sp>
+      <p:sp>
+        <p:nvSpPr>
+          <p:cNvPr id="8" name="Text 5"/>
+          <p:cNvSpPr/>
+          <p:nvPr/>
+        </p:nvSpPr>
+        <p:spPr>
+          <a:xfrm>
+            <a:off x="10058400" y="6446520"/>
+            <a:ext cx="1828800" cy="274320"/>
+          </a:xfrm>
+          <a:prstGeom prst="rect">
+            <a:avLst/>
+          </a:prstGeom>
+          <a:noFill/>
+          <a:ln/>
+        </p:spPr>
+        <p:txBody>
+          <a:bodyPr wrap="square" rtlCol="0" anchor="ctr"/>
+          <a:lstStyle/>
+          <a:p>
+            <a:pPr marL="0" indent="0" algn="r">
+              <a:buNone/>
+            </a:pPr>
+            <a:r>
+              <a:rPr lang="en-US" sz="1000" dirty="0">
+                <a:solidFill>
+                  <a:srgbClr val="64748B"/>
+                </a:solidFill>
+                <a:latin typeface="Calibri" pitchFamily="34" charset="0"/>
+                <a:ea typeface="Calibri" pitchFamily="34" charset="-122"/>
+                <a:cs typeface="Calibri" pitchFamily="34" charset="-120"/>
+              </a:rPr>
+              <a:t>9</a:t>
             </a:r>
             <a:endParaRPr lang="en-US" sz="1000" dirty="0"/>
           </a:p>
